--- a/Terraform_Demo_presentation_Draft0.1.pptx
+++ b/Terraform_Demo_presentation_Draft0.1.pptx
@@ -7,14 +7,15 @@
     <p:sldMasterId id="2147483836" r:id="rId3"/>
   </p:sldMasterIdLst>
   <p:notesMasterIdLst>
-    <p:notesMasterId r:id="rId9"/>
+    <p:notesMasterId r:id="rId10"/>
   </p:notesMasterIdLst>
   <p:sldIdLst>
     <p:sldId id="2147470630" r:id="rId4"/>
-    <p:sldId id="2147470629" r:id="rId5"/>
-    <p:sldId id="2147470626" r:id="rId6"/>
-    <p:sldId id="2147470628" r:id="rId7"/>
-    <p:sldId id="2147470627" r:id="rId8"/>
+    <p:sldId id="2147375129" r:id="rId5"/>
+    <p:sldId id="2147470629" r:id="rId6"/>
+    <p:sldId id="2147470626" r:id="rId7"/>
+    <p:sldId id="2147470631" r:id="rId8"/>
+    <p:sldId id="2147470627" r:id="rId9"/>
   </p:sldIdLst>
   <p:sldSz cx="12192000" cy="6858000"/>
   <p:notesSz cx="6858000" cy="9144000"/>
@@ -124,7 +125,7 @@
 <file path=ppt/revisionInfo.xml><?xml version="1.0" encoding="utf-8"?>
 <p1510:revInfo xmlns:a="http://schemas.openxmlformats.org/drawingml/2006/main" xmlns:r="http://schemas.openxmlformats.org/officeDocument/2006/relationships" xmlns:p1510="http://schemas.microsoft.com/office/powerpoint/2015/10/main">
   <p1510:revLst>
-    <p1510:client id="{105CFBC6-4BA1-4F39-BF01-2C8CBF54D864}" v="25" dt="2026-02-26T09:39:01.176"/>
+    <p1510:client id="{105CFBC6-4BA1-4F39-BF01-2C8CBF54D864}" v="53" dt="2026-02-26T14:58:46.452"/>
   </p1510:revLst>
 </p1510:revInfo>
 </file>
@@ -133,13 +134,196 @@
 <pc:chgInfo xmlns:a="http://schemas.openxmlformats.org/drawingml/2006/main" xmlns:r="http://schemas.openxmlformats.org/officeDocument/2006/relationships" xmlns:ac="http://schemas.microsoft.com/office/drawing/2013/main/command" xmlns:pc="http://schemas.microsoft.com/office/powerpoint/2013/main/command">
   <pc:docChgLst>
     <pc:chgData name="Sushil Soni, Vodafone" userId="42f61249-e00d-4778-bd06-353e57e7c4e6" providerId="ADAL" clId="{EA7ACA62-6246-40AD-896F-A77B8CEAA7F1}"/>
-    <pc:docChg chg="undo custSel addSld modSld sldOrd">
-      <pc:chgData name="Sushil Soni, Vodafone" userId="42f61249-e00d-4778-bd06-353e57e7c4e6" providerId="ADAL" clId="{EA7ACA62-6246-40AD-896F-A77B8CEAA7F1}" dt="2026-02-26T09:39:55.922" v="2142" actId="255"/>
+    <pc:docChg chg="undo custSel addSld delSld modSld sldOrd">
+      <pc:chgData name="Sushil Soni, Vodafone" userId="42f61249-e00d-4778-bd06-353e57e7c4e6" providerId="ADAL" clId="{EA7ACA62-6246-40AD-896F-A77B8CEAA7F1}" dt="2026-02-26T14:59:32.449" v="3108" actId="1076"/>
       <pc:docMkLst>
         <pc:docMk/>
       </pc:docMkLst>
+      <pc:sldChg chg="modSp add mod ord modTransition">
+        <pc:chgData name="Sushil Soni, Vodafone" userId="42f61249-e00d-4778-bd06-353e57e7c4e6" providerId="ADAL" clId="{EA7ACA62-6246-40AD-896F-A77B8CEAA7F1}" dt="2026-02-26T13:18:49.302" v="3044" actId="1035"/>
+        <pc:sldMkLst>
+          <pc:docMk/>
+          <pc:sldMk cId="2129696808" sldId="2147375129"/>
+        </pc:sldMkLst>
+        <pc:spChg chg="mod">
+          <ac:chgData name="Sushil Soni, Vodafone" userId="42f61249-e00d-4778-bd06-353e57e7c4e6" providerId="ADAL" clId="{EA7ACA62-6246-40AD-896F-A77B8CEAA7F1}" dt="2026-02-26T13:18:49.302" v="3044" actId="1035"/>
+          <ac:spMkLst>
+            <pc:docMk/>
+            <pc:sldMk cId="2129696808" sldId="2147375129"/>
+            <ac:spMk id="3" creationId="{0D93DBF0-B164-F56A-7828-972131196791}"/>
+          </ac:spMkLst>
+        </pc:spChg>
+        <pc:spChg chg="mod">
+          <ac:chgData name="Sushil Soni, Vodafone" userId="42f61249-e00d-4778-bd06-353e57e7c4e6" providerId="ADAL" clId="{EA7ACA62-6246-40AD-896F-A77B8CEAA7F1}" dt="2026-02-26T13:18:49.302" v="3044" actId="1035"/>
+          <ac:spMkLst>
+            <pc:docMk/>
+            <pc:sldMk cId="2129696808" sldId="2147375129"/>
+            <ac:spMk id="21" creationId="{ADD2E85E-767A-E467-5AF5-40EDBDF9AC12}"/>
+          </ac:spMkLst>
+        </pc:spChg>
+        <pc:spChg chg="mod">
+          <ac:chgData name="Sushil Soni, Vodafone" userId="42f61249-e00d-4778-bd06-353e57e7c4e6" providerId="ADAL" clId="{EA7ACA62-6246-40AD-896F-A77B8CEAA7F1}" dt="2026-02-26T13:18:49.302" v="3044" actId="1035"/>
+          <ac:spMkLst>
+            <pc:docMk/>
+            <pc:sldMk cId="2129696808" sldId="2147375129"/>
+            <ac:spMk id="22" creationId="{4A415BE3-E5B3-487B-2ABD-7341F59B5231}"/>
+          </ac:spMkLst>
+        </pc:spChg>
+        <pc:spChg chg="mod">
+          <ac:chgData name="Sushil Soni, Vodafone" userId="42f61249-e00d-4778-bd06-353e57e7c4e6" providerId="ADAL" clId="{EA7ACA62-6246-40AD-896F-A77B8CEAA7F1}" dt="2026-02-26T13:18:49.302" v="3044" actId="1035"/>
+          <ac:spMkLst>
+            <pc:docMk/>
+            <pc:sldMk cId="2129696808" sldId="2147375129"/>
+            <ac:spMk id="32" creationId="{1C7521D4-1D27-3EDF-AADD-8DFA1958F7DD}"/>
+          </ac:spMkLst>
+        </pc:spChg>
+        <pc:spChg chg="mod">
+          <ac:chgData name="Sushil Soni, Vodafone" userId="42f61249-e00d-4778-bd06-353e57e7c4e6" providerId="ADAL" clId="{EA7ACA62-6246-40AD-896F-A77B8CEAA7F1}" dt="2026-02-26T13:18:49.302" v="3044" actId="1035"/>
+          <ac:spMkLst>
+            <pc:docMk/>
+            <pc:sldMk cId="2129696808" sldId="2147375129"/>
+            <ac:spMk id="34" creationId="{FDE6158D-99DB-63F1-8853-E1324911C9D4}"/>
+          </ac:spMkLst>
+        </pc:spChg>
+        <pc:spChg chg="mod">
+          <ac:chgData name="Sushil Soni, Vodafone" userId="42f61249-e00d-4778-bd06-353e57e7c4e6" providerId="ADAL" clId="{EA7ACA62-6246-40AD-896F-A77B8CEAA7F1}" dt="2026-02-26T13:18:49.302" v="3044" actId="1035"/>
+          <ac:spMkLst>
+            <pc:docMk/>
+            <pc:sldMk cId="2129696808" sldId="2147375129"/>
+            <ac:spMk id="41" creationId="{C3AAE0E8-4A9C-902B-9CE7-D092465ACECC}"/>
+          </ac:spMkLst>
+        </pc:spChg>
+        <pc:spChg chg="mod ord">
+          <ac:chgData name="Sushil Soni, Vodafone" userId="42f61249-e00d-4778-bd06-353e57e7c4e6" providerId="ADAL" clId="{EA7ACA62-6246-40AD-896F-A77B8CEAA7F1}" dt="2026-02-26T13:18:49.302" v="3044" actId="1035"/>
+          <ac:spMkLst>
+            <pc:docMk/>
+            <pc:sldMk cId="2129696808" sldId="2147375129"/>
+            <ac:spMk id="44" creationId="{0261EAEB-C81A-A42E-593C-EBCB2367AD85}"/>
+          </ac:spMkLst>
+        </pc:spChg>
+        <pc:spChg chg="mod">
+          <ac:chgData name="Sushil Soni, Vodafone" userId="42f61249-e00d-4778-bd06-353e57e7c4e6" providerId="ADAL" clId="{EA7ACA62-6246-40AD-896F-A77B8CEAA7F1}" dt="2026-02-26T13:18:49.302" v="3044" actId="1035"/>
+          <ac:spMkLst>
+            <pc:docMk/>
+            <pc:sldMk cId="2129696808" sldId="2147375129"/>
+            <ac:spMk id="45" creationId="{FCE7E6DE-38A2-BD46-48A8-1EA82BAC20E5}"/>
+          </ac:spMkLst>
+        </pc:spChg>
+        <pc:spChg chg="mod">
+          <ac:chgData name="Sushil Soni, Vodafone" userId="42f61249-e00d-4778-bd06-353e57e7c4e6" providerId="ADAL" clId="{EA7ACA62-6246-40AD-896F-A77B8CEAA7F1}" dt="2026-02-26T13:18:36.455" v="3036" actId="1035"/>
+          <ac:spMkLst>
+            <pc:docMk/>
+            <pc:sldMk cId="2129696808" sldId="2147375129"/>
+            <ac:spMk id="47" creationId="{FCCFEEEA-839C-AB8F-3286-5B701F1B3015}"/>
+          </ac:spMkLst>
+        </pc:spChg>
+        <pc:spChg chg="mod">
+          <ac:chgData name="Sushil Soni, Vodafone" userId="42f61249-e00d-4778-bd06-353e57e7c4e6" providerId="ADAL" clId="{EA7ACA62-6246-40AD-896F-A77B8CEAA7F1}" dt="2026-02-26T13:18:36.455" v="3036" actId="1035"/>
+          <ac:spMkLst>
+            <pc:docMk/>
+            <pc:sldMk cId="2129696808" sldId="2147375129"/>
+            <ac:spMk id="48" creationId="{5B64B5D5-352A-7792-C681-223F055B6771}"/>
+          </ac:spMkLst>
+        </pc:spChg>
+        <pc:spChg chg="mod">
+          <ac:chgData name="Sushil Soni, Vodafone" userId="42f61249-e00d-4778-bd06-353e57e7c4e6" providerId="ADAL" clId="{EA7ACA62-6246-40AD-896F-A77B8CEAA7F1}" dt="2026-02-26T13:18:36.455" v="3036" actId="1035"/>
+          <ac:spMkLst>
+            <pc:docMk/>
+            <pc:sldMk cId="2129696808" sldId="2147375129"/>
+            <ac:spMk id="53" creationId="{A8E66689-D857-E283-C306-EEB31C714430}"/>
+          </ac:spMkLst>
+        </pc:spChg>
+        <pc:spChg chg="mod">
+          <ac:chgData name="Sushil Soni, Vodafone" userId="42f61249-e00d-4778-bd06-353e57e7c4e6" providerId="ADAL" clId="{EA7ACA62-6246-40AD-896F-A77B8CEAA7F1}" dt="2026-02-26T13:18:24.607" v="3024" actId="1037"/>
+          <ac:spMkLst>
+            <pc:docMk/>
+            <pc:sldMk cId="2129696808" sldId="2147375129"/>
+            <ac:spMk id="57" creationId="{40C832D6-A556-151D-5FFE-2FA54EC048C0}"/>
+          </ac:spMkLst>
+        </pc:spChg>
+        <pc:spChg chg="mod">
+          <ac:chgData name="Sushil Soni, Vodafone" userId="42f61249-e00d-4778-bd06-353e57e7c4e6" providerId="ADAL" clId="{EA7ACA62-6246-40AD-896F-A77B8CEAA7F1}" dt="2026-02-26T13:18:16.826" v="3016" actId="1076"/>
+          <ac:spMkLst>
+            <pc:docMk/>
+            <pc:sldMk cId="2129696808" sldId="2147375129"/>
+            <ac:spMk id="63" creationId="{16F8E527-D9DA-2629-C9F0-78B4D1C5F11E}"/>
+          </ac:spMkLst>
+        </pc:spChg>
+        <pc:spChg chg="mod">
+          <ac:chgData name="Sushil Soni, Vodafone" userId="42f61249-e00d-4778-bd06-353e57e7c4e6" providerId="ADAL" clId="{EA7ACA62-6246-40AD-896F-A77B8CEAA7F1}" dt="2026-02-26T13:18:16.826" v="3016" actId="1076"/>
+          <ac:spMkLst>
+            <pc:docMk/>
+            <pc:sldMk cId="2129696808" sldId="2147375129"/>
+            <ac:spMk id="65" creationId="{8D3AE9CB-80C5-8620-BDC4-C4E47A240943}"/>
+          </ac:spMkLst>
+        </pc:spChg>
+        <pc:spChg chg="mod">
+          <ac:chgData name="Sushil Soni, Vodafone" userId="42f61249-e00d-4778-bd06-353e57e7c4e6" providerId="ADAL" clId="{EA7ACA62-6246-40AD-896F-A77B8CEAA7F1}" dt="2026-02-26T13:18:16.826" v="3016" actId="1076"/>
+          <ac:spMkLst>
+            <pc:docMk/>
+            <pc:sldMk cId="2129696808" sldId="2147375129"/>
+            <ac:spMk id="67" creationId="{A1165CCC-6127-7E00-28E0-53F2C9B6331E}"/>
+          </ac:spMkLst>
+        </pc:spChg>
+        <pc:spChg chg="mod">
+          <ac:chgData name="Sushil Soni, Vodafone" userId="42f61249-e00d-4778-bd06-353e57e7c4e6" providerId="ADAL" clId="{EA7ACA62-6246-40AD-896F-A77B8CEAA7F1}" dt="2026-02-26T13:18:16.826" v="3016" actId="1076"/>
+          <ac:spMkLst>
+            <pc:docMk/>
+            <pc:sldMk cId="2129696808" sldId="2147375129"/>
+            <ac:spMk id="68" creationId="{29DBC2D7-B9D0-7449-A308-DC3F21E56C96}"/>
+          </ac:spMkLst>
+        </pc:spChg>
+        <pc:spChg chg="mod">
+          <ac:chgData name="Sushil Soni, Vodafone" userId="42f61249-e00d-4778-bd06-353e57e7c4e6" providerId="ADAL" clId="{EA7ACA62-6246-40AD-896F-A77B8CEAA7F1}" dt="2026-02-26T13:18:36.455" v="3036" actId="1035"/>
+          <ac:spMkLst>
+            <pc:docMk/>
+            <pc:sldMk cId="2129696808" sldId="2147375129"/>
+            <ac:spMk id="72" creationId="{8124772D-680A-DF78-6685-829FD1B286EA}"/>
+          </ac:spMkLst>
+        </pc:spChg>
+        <pc:spChg chg="mod">
+          <ac:chgData name="Sushil Soni, Vodafone" userId="42f61249-e00d-4778-bd06-353e57e7c4e6" providerId="ADAL" clId="{EA7ACA62-6246-40AD-896F-A77B8CEAA7F1}" dt="2026-02-26T13:18:04.373" v="3015" actId="1076"/>
+          <ac:spMkLst>
+            <pc:docMk/>
+            <pc:sldMk cId="2129696808" sldId="2147375129"/>
+            <ac:spMk id="74" creationId="{9677193B-D9AC-DACD-9F3E-FF868C34145B}"/>
+          </ac:spMkLst>
+        </pc:spChg>
+        <pc:picChg chg="mod">
+          <ac:chgData name="Sushil Soni, Vodafone" userId="42f61249-e00d-4778-bd06-353e57e7c4e6" providerId="ADAL" clId="{EA7ACA62-6246-40AD-896F-A77B8CEAA7F1}" dt="2026-02-26T13:18:49.302" v="3044" actId="1035"/>
+          <ac:picMkLst>
+            <pc:docMk/>
+            <pc:sldMk cId="2129696808" sldId="2147375129"/>
+            <ac:picMk id="5" creationId="{3791A827-2765-2F43-53CF-1FA46AA85B7F}"/>
+          </ac:picMkLst>
+        </pc:picChg>
+        <pc:picChg chg="mod">
+          <ac:chgData name="Sushil Soni, Vodafone" userId="42f61249-e00d-4778-bd06-353e57e7c4e6" providerId="ADAL" clId="{EA7ACA62-6246-40AD-896F-A77B8CEAA7F1}" dt="2026-02-26T13:18:49.302" v="3044" actId="1035"/>
+          <ac:picMkLst>
+            <pc:docMk/>
+            <pc:sldMk cId="2129696808" sldId="2147375129"/>
+            <ac:picMk id="43" creationId="{814B40A2-C139-5806-E653-69D2D5187EDC}"/>
+          </ac:picMkLst>
+        </pc:picChg>
+        <pc:cxnChg chg="mod">
+          <ac:chgData name="Sushil Soni, Vodafone" userId="42f61249-e00d-4778-bd06-353e57e7c4e6" providerId="ADAL" clId="{EA7ACA62-6246-40AD-896F-A77B8CEAA7F1}" dt="2026-02-26T13:18:36.455" v="3036" actId="1035"/>
+          <ac:cxnSpMkLst>
+            <pc:docMk/>
+            <pc:sldMk cId="2129696808" sldId="2147375129"/>
+            <ac:cxnSpMk id="52" creationId="{9CEB3322-552D-4897-9D07-4EC5E1E024F3}"/>
+          </ac:cxnSpMkLst>
+        </pc:cxnChg>
+        <pc:cxnChg chg="mod">
+          <ac:chgData name="Sushil Soni, Vodafone" userId="42f61249-e00d-4778-bd06-353e57e7c4e6" providerId="ADAL" clId="{EA7ACA62-6246-40AD-896F-A77B8CEAA7F1}" dt="2026-02-26T13:18:16.826" v="3016" actId="1076"/>
+          <ac:cxnSpMkLst>
+            <pc:docMk/>
+            <pc:sldMk cId="2129696808" sldId="2147375129"/>
+            <ac:cxnSpMk id="66" creationId="{57609DCE-2AF8-705D-8054-28C16DFAD24D}"/>
+          </ac:cxnSpMkLst>
+        </pc:cxnChg>
+      </pc:sldChg>
       <pc:sldChg chg="addSp delSp modSp mod">
-        <pc:chgData name="Sushil Soni, Vodafone" userId="42f61249-e00d-4778-bd06-353e57e7c4e6" providerId="ADAL" clId="{EA7ACA62-6246-40AD-896F-A77B8CEAA7F1}" dt="2026-02-26T09:39:55.922" v="2142" actId="255"/>
+        <pc:chgData name="Sushil Soni, Vodafone" userId="42f61249-e00d-4778-bd06-353e57e7c4e6" providerId="ADAL" clId="{EA7ACA62-6246-40AD-896F-A77B8CEAA7F1}" dt="2026-02-26T14:59:32.449" v="3108" actId="1076"/>
         <pc:sldMkLst>
           <pc:docMk/>
           <pc:sldMk cId="3065513456" sldId="2147470626"/>
@@ -209,7 +393,7 @@
           </ac:spMkLst>
         </pc:spChg>
         <pc:spChg chg="add mod">
-          <ac:chgData name="Sushil Soni, Vodafone" userId="42f61249-e00d-4778-bd06-353e57e7c4e6" providerId="ADAL" clId="{EA7ACA62-6246-40AD-896F-A77B8CEAA7F1}" dt="2026-02-24T08:47:00.890" v="160" actId="1035"/>
+          <ac:chgData name="Sushil Soni, Vodafone" userId="42f61249-e00d-4778-bd06-353e57e7c4e6" providerId="ADAL" clId="{EA7ACA62-6246-40AD-896F-A77B8CEAA7F1}" dt="2026-02-26T14:54:29.748" v="3050" actId="255"/>
           <ac:spMkLst>
             <pc:docMk/>
             <pc:sldMk cId="3065513456" sldId="2147470626"/>
@@ -233,7 +417,7 @@
           </ac:spMkLst>
         </pc:spChg>
         <pc:spChg chg="add mod">
-          <ac:chgData name="Sushil Soni, Vodafone" userId="42f61249-e00d-4778-bd06-353e57e7c4e6" providerId="ADAL" clId="{EA7ACA62-6246-40AD-896F-A77B8CEAA7F1}" dt="2026-02-24T08:49:44.753" v="252" actId="1037"/>
+          <ac:chgData name="Sushil Soni, Vodafone" userId="42f61249-e00d-4778-bd06-353e57e7c4e6" providerId="ADAL" clId="{EA7ACA62-6246-40AD-896F-A77B8CEAA7F1}" dt="2026-02-26T14:54:36.169" v="3051" actId="255"/>
           <ac:spMkLst>
             <pc:docMk/>
             <pc:sldMk cId="3065513456" sldId="2147470626"/>
@@ -297,7 +481,7 @@
           </ac:spMkLst>
         </pc:spChg>
         <pc:spChg chg="add mod ord">
-          <ac:chgData name="Sushil Soni, Vodafone" userId="42f61249-e00d-4778-bd06-353e57e7c4e6" providerId="ADAL" clId="{EA7ACA62-6246-40AD-896F-A77B8CEAA7F1}" dt="2026-02-26T08:28:42.169" v="2125" actId="14100"/>
+          <ac:chgData name="Sushil Soni, Vodafone" userId="42f61249-e00d-4778-bd06-353e57e7c4e6" providerId="ADAL" clId="{EA7ACA62-6246-40AD-896F-A77B8CEAA7F1}" dt="2026-02-26T14:59:22.815" v="3106" actId="1076"/>
           <ac:spMkLst>
             <pc:docMk/>
             <pc:sldMk cId="3065513456" sldId="2147470626"/>
@@ -312,8 +496,8 @@
             <ac:spMk id="79" creationId="{1FD427C8-3CCC-7460-8598-22A0CA89B1EF}"/>
           </ac:spMkLst>
         </pc:spChg>
-        <pc:spChg chg="add mod">
-          <ac:chgData name="Sushil Soni, Vodafone" userId="42f61249-e00d-4778-bd06-353e57e7c4e6" providerId="ADAL" clId="{EA7ACA62-6246-40AD-896F-A77B8CEAA7F1}" dt="2026-02-26T04:56:01.390" v="1356" actId="1076"/>
+        <pc:spChg chg="add del mod">
+          <ac:chgData name="Sushil Soni, Vodafone" userId="42f61249-e00d-4778-bd06-353e57e7c4e6" providerId="ADAL" clId="{EA7ACA62-6246-40AD-896F-A77B8CEAA7F1}" dt="2026-02-26T14:56:51.130" v="3060" actId="478"/>
           <ac:spMkLst>
             <pc:docMk/>
             <pc:sldMk cId="3065513456" sldId="2147470626"/>
@@ -329,7 +513,7 @@
           </ac:spMkLst>
         </pc:spChg>
         <pc:spChg chg="add mod">
-          <ac:chgData name="Sushil Soni, Vodafone" userId="42f61249-e00d-4778-bd06-353e57e7c4e6" providerId="ADAL" clId="{EA7ACA62-6246-40AD-896F-A77B8CEAA7F1}" dt="2026-02-26T04:52:01.708" v="1299" actId="20577"/>
+          <ac:chgData name="Sushil Soni, Vodafone" userId="42f61249-e00d-4778-bd06-353e57e7c4e6" providerId="ADAL" clId="{EA7ACA62-6246-40AD-896F-A77B8CEAA7F1}" dt="2026-02-26T14:54:07.786" v="3047" actId="1076"/>
           <ac:spMkLst>
             <pc:docMk/>
             <pc:sldMk cId="3065513456" sldId="2147470626"/>
@@ -337,7 +521,7 @@
           </ac:spMkLst>
         </pc:spChg>
         <pc:spChg chg="add mod">
-          <ac:chgData name="Sushil Soni, Vodafone" userId="42f61249-e00d-4778-bd06-353e57e7c4e6" providerId="ADAL" clId="{EA7ACA62-6246-40AD-896F-A77B8CEAA7F1}" dt="2026-02-26T04:52:39.648" v="1314" actId="14100"/>
+          <ac:chgData name="Sushil Soni, Vodafone" userId="42f61249-e00d-4778-bd06-353e57e7c4e6" providerId="ADAL" clId="{EA7ACA62-6246-40AD-896F-A77B8CEAA7F1}" dt="2026-02-26T14:54:13.903" v="3048" actId="255"/>
           <ac:spMkLst>
             <pc:docMk/>
             <pc:sldMk cId="3065513456" sldId="2147470626"/>
@@ -345,7 +529,7 @@
           </ac:spMkLst>
         </pc:spChg>
         <pc:spChg chg="add mod">
-          <ac:chgData name="Sushil Soni, Vodafone" userId="42f61249-e00d-4778-bd06-353e57e7c4e6" providerId="ADAL" clId="{EA7ACA62-6246-40AD-896F-A77B8CEAA7F1}" dt="2026-02-26T04:53:22.292" v="1339" actId="1038"/>
+          <ac:chgData name="Sushil Soni, Vodafone" userId="42f61249-e00d-4778-bd06-353e57e7c4e6" providerId="ADAL" clId="{EA7ACA62-6246-40AD-896F-A77B8CEAA7F1}" dt="2026-02-26T14:54:21.139" v="3049" actId="255"/>
           <ac:spMkLst>
             <pc:docMk/>
             <pc:sldMk cId="3065513456" sldId="2147470626"/>
@@ -353,7 +537,7 @@
           </ac:spMkLst>
         </pc:spChg>
         <pc:spChg chg="add mod">
-          <ac:chgData name="Sushil Soni, Vodafone" userId="42f61249-e00d-4778-bd06-353e57e7c4e6" providerId="ADAL" clId="{EA7ACA62-6246-40AD-896F-A77B8CEAA7F1}" dt="2026-02-26T04:58:33.057" v="1382" actId="1076"/>
+          <ac:chgData name="Sushil Soni, Vodafone" userId="42f61249-e00d-4778-bd06-353e57e7c4e6" providerId="ADAL" clId="{EA7ACA62-6246-40AD-896F-A77B8CEAA7F1}" dt="2026-02-26T11:30:00.318" v="2917" actId="1076"/>
           <ac:spMkLst>
             <pc:docMk/>
             <pc:sldMk cId="3065513456" sldId="2147470626"/>
@@ -369,15 +553,103 @@
           </ac:spMkLst>
         </pc:spChg>
         <pc:spChg chg="mod">
-          <ac:chgData name="Sushil Soni, Vodafone" userId="42f61249-e00d-4778-bd06-353e57e7c4e6" providerId="ADAL" clId="{EA7ACA62-6246-40AD-896F-A77B8CEAA7F1}" dt="2026-02-25T13:08:29.655" v="957" actId="1076"/>
+          <ac:chgData name="Sushil Soni, Vodafone" userId="42f61249-e00d-4778-bd06-353e57e7c4e6" providerId="ADAL" clId="{EA7ACA62-6246-40AD-896F-A77B8CEAA7F1}" dt="2026-02-26T11:30:15.202" v="2919" actId="14100"/>
           <ac:spMkLst>
             <pc:docMk/>
             <pc:sldMk cId="3065513456" sldId="2147470626"/>
             <ac:spMk id="92" creationId="{56495703-036A-FF08-F6C0-BED3F5CB5BCF}"/>
           </ac:spMkLst>
         </pc:spChg>
+        <pc:spChg chg="add mod">
+          <ac:chgData name="Sushil Soni, Vodafone" userId="42f61249-e00d-4778-bd06-353e57e7c4e6" providerId="ADAL" clId="{EA7ACA62-6246-40AD-896F-A77B8CEAA7F1}" dt="2026-02-26T10:07:12.712" v="2212" actId="1076"/>
+          <ac:spMkLst>
+            <pc:docMk/>
+            <pc:sldMk cId="3065513456" sldId="2147470626"/>
+            <ac:spMk id="94" creationId="{1DD1902C-B71D-B79D-1EE3-E0109997B05A}"/>
+          </ac:spMkLst>
+        </pc:spChg>
+        <pc:spChg chg="add mod">
+          <ac:chgData name="Sushil Soni, Vodafone" userId="42f61249-e00d-4778-bd06-353e57e7c4e6" providerId="ADAL" clId="{EA7ACA62-6246-40AD-896F-A77B8CEAA7F1}" dt="2026-02-26T10:03:04.129" v="2173" actId="20577"/>
+          <ac:spMkLst>
+            <pc:docMk/>
+            <pc:sldMk cId="3065513456" sldId="2147470626"/>
+            <ac:spMk id="95" creationId="{6A399B3D-FC98-8E29-918D-EAAB19D20ADA}"/>
+          </ac:spMkLst>
+        </pc:spChg>
+        <pc:spChg chg="add mod">
+          <ac:chgData name="Sushil Soni, Vodafone" userId="42f61249-e00d-4778-bd06-353e57e7c4e6" providerId="ADAL" clId="{EA7ACA62-6246-40AD-896F-A77B8CEAA7F1}" dt="2026-02-26T10:02:58.964" v="2167" actId="20577"/>
+          <ac:spMkLst>
+            <pc:docMk/>
+            <pc:sldMk cId="3065513456" sldId="2147470626"/>
+            <ac:spMk id="96" creationId="{A7A1510E-DEA8-D076-6523-0AF76347EB36}"/>
+          </ac:spMkLst>
+        </pc:spChg>
+        <pc:spChg chg="add mod">
+          <ac:chgData name="Sushil Soni, Vodafone" userId="42f61249-e00d-4778-bd06-353e57e7c4e6" providerId="ADAL" clId="{EA7ACA62-6246-40AD-896F-A77B8CEAA7F1}" dt="2026-02-26T10:02:50.691" v="2160" actId="20577"/>
+          <ac:spMkLst>
+            <pc:docMk/>
+            <pc:sldMk cId="3065513456" sldId="2147470626"/>
+            <ac:spMk id="97" creationId="{1793245C-D5E3-8852-7EAE-F7B1367F2B9C}"/>
+          </ac:spMkLst>
+        </pc:spChg>
+        <pc:spChg chg="add del mod">
+          <ac:chgData name="Sushil Soni, Vodafone" userId="42f61249-e00d-4778-bd06-353e57e7c4e6" providerId="ADAL" clId="{EA7ACA62-6246-40AD-896F-A77B8CEAA7F1}" dt="2026-02-26T11:29:46.473" v="2916" actId="478"/>
+          <ac:spMkLst>
+            <pc:docMk/>
+            <pc:sldMk cId="3065513456" sldId="2147470626"/>
+            <ac:spMk id="98" creationId="{A7112A78-91FF-55C8-A998-BFCC5C598386}"/>
+          </ac:spMkLst>
+        </pc:spChg>
+        <pc:spChg chg="add del mod">
+          <ac:chgData name="Sushil Soni, Vodafone" userId="42f61249-e00d-4778-bd06-353e57e7c4e6" providerId="ADAL" clId="{EA7ACA62-6246-40AD-896F-A77B8CEAA7F1}" dt="2026-02-26T11:29:10.326" v="2914" actId="478"/>
+          <ac:spMkLst>
+            <pc:docMk/>
+            <pc:sldMk cId="3065513456" sldId="2147470626"/>
+            <ac:spMk id="99" creationId="{DAE107DE-9B3B-5692-ED57-0C03BBC4BB16}"/>
+          </ac:spMkLst>
+        </pc:spChg>
+        <pc:spChg chg="add mod">
+          <ac:chgData name="Sushil Soni, Vodafone" userId="42f61249-e00d-4778-bd06-353e57e7c4e6" providerId="ADAL" clId="{EA7ACA62-6246-40AD-896F-A77B8CEAA7F1}" dt="2026-02-26T11:30:54.295" v="2920"/>
+          <ac:spMkLst>
+            <pc:docMk/>
+            <pc:sldMk cId="3065513456" sldId="2147470626"/>
+            <ac:spMk id="101" creationId="{68514704-1045-9628-52BA-D4B375D0F429}"/>
+          </ac:spMkLst>
+        </pc:spChg>
+        <pc:spChg chg="add mod">
+          <ac:chgData name="Sushil Soni, Vodafone" userId="42f61249-e00d-4778-bd06-353e57e7c4e6" providerId="ADAL" clId="{EA7ACA62-6246-40AD-896F-A77B8CEAA7F1}" dt="2026-02-26T11:31:25.007" v="2953" actId="1037"/>
+          <ac:spMkLst>
+            <pc:docMk/>
+            <pc:sldMk cId="3065513456" sldId="2147470626"/>
+            <ac:spMk id="102" creationId="{996BC879-E56F-631D-43E9-85A0B640002C}"/>
+          </ac:spMkLst>
+        </pc:spChg>
+        <pc:spChg chg="add mod">
+          <ac:chgData name="Sushil Soni, Vodafone" userId="42f61249-e00d-4778-bd06-353e57e7c4e6" providerId="ADAL" clId="{EA7ACA62-6246-40AD-896F-A77B8CEAA7F1}" dt="2026-02-26T14:56:51.942" v="3061"/>
+          <ac:spMkLst>
+            <pc:docMk/>
+            <pc:sldMk cId="3065513456" sldId="2147470626"/>
+            <ac:spMk id="103" creationId="{25D24788-ACBC-F322-E4E6-732A25C09E9C}"/>
+          </ac:spMkLst>
+        </pc:spChg>
+        <pc:spChg chg="add mod">
+          <ac:chgData name="Sushil Soni, Vodafone" userId="42f61249-e00d-4778-bd06-353e57e7c4e6" providerId="ADAL" clId="{EA7ACA62-6246-40AD-896F-A77B8CEAA7F1}" dt="2026-02-26T14:59:27.395" v="3107" actId="1076"/>
+          <ac:spMkLst>
+            <pc:docMk/>
+            <pc:sldMk cId="3065513456" sldId="2147470626"/>
+            <ac:spMk id="107" creationId="{33A264BE-31E0-2ED6-AB19-2587CAAF6EB5}"/>
+          </ac:spMkLst>
+        </pc:spChg>
+        <pc:spChg chg="add mod">
+          <ac:chgData name="Sushil Soni, Vodafone" userId="42f61249-e00d-4778-bd06-353e57e7c4e6" providerId="ADAL" clId="{EA7ACA62-6246-40AD-896F-A77B8CEAA7F1}" dt="2026-02-26T14:59:32.449" v="3108" actId="1076"/>
+          <ac:spMkLst>
+            <pc:docMk/>
+            <pc:sldMk cId="3065513456" sldId="2147470626"/>
+            <ac:spMk id="109" creationId="{A75A1728-5FB7-1D7C-F8EA-389A3FF84BA4}"/>
+          </ac:spMkLst>
+        </pc:spChg>
         <pc:spChg chg="mod">
-          <ac:chgData name="Sushil Soni, Vodafone" userId="42f61249-e00d-4778-bd06-353e57e7c4e6" providerId="ADAL" clId="{EA7ACA62-6246-40AD-896F-A77B8CEAA7F1}" dt="2026-02-26T04:54:44.300" v="1347" actId="14100"/>
+          <ac:chgData name="Sushil Soni, Vodafone" userId="42f61249-e00d-4778-bd06-353e57e7c4e6" providerId="ADAL" clId="{EA7ACA62-6246-40AD-896F-A77B8CEAA7F1}" dt="2026-02-26T10:01:50.548" v="2145" actId="14100"/>
           <ac:spMkLst>
             <pc:docMk/>
             <pc:sldMk cId="3065513456" sldId="2147470626"/>
@@ -400,6 +672,38 @@
             <ac:grpSpMk id="44" creationId="{14F63F63-AE77-CB78-82BC-9649FA32EA75}"/>
           </ac:grpSpMkLst>
         </pc:grpChg>
+        <pc:picChg chg="del">
+          <ac:chgData name="Sushil Soni, Vodafone" userId="42f61249-e00d-4778-bd06-353e57e7c4e6" providerId="ADAL" clId="{EA7ACA62-6246-40AD-896F-A77B8CEAA7F1}" dt="2026-02-26T14:57:42.296" v="3062" actId="478"/>
+          <ac:picMkLst>
+            <pc:docMk/>
+            <pc:sldMk cId="3065513456" sldId="2147470626"/>
+            <ac:picMk id="67" creationId="{54EFFEA1-D58C-D5B3-80FD-C559D9A6BE77}"/>
+          </ac:picMkLst>
+        </pc:picChg>
+        <pc:picChg chg="del">
+          <ac:chgData name="Sushil Soni, Vodafone" userId="42f61249-e00d-4778-bd06-353e57e7c4e6" providerId="ADAL" clId="{EA7ACA62-6246-40AD-896F-A77B8CEAA7F1}" dt="2026-02-26T14:57:44.496" v="3063" actId="478"/>
+          <ac:picMkLst>
+            <pc:docMk/>
+            <pc:sldMk cId="3065513456" sldId="2147470626"/>
+            <ac:picMk id="68" creationId="{E3AEE46C-9CC8-65DC-1638-96D7AA26F612}"/>
+          </ac:picMkLst>
+        </pc:picChg>
+        <pc:picChg chg="add mod">
+          <ac:chgData name="Sushil Soni, Vodafone" userId="42f61249-e00d-4778-bd06-353e57e7c4e6" providerId="ADAL" clId="{EA7ACA62-6246-40AD-896F-A77B8CEAA7F1}" dt="2026-02-26T14:57:50.496" v="3065" actId="1076"/>
+          <ac:picMkLst>
+            <pc:docMk/>
+            <pc:sldMk cId="3065513456" sldId="2147470626"/>
+            <ac:picMk id="104" creationId="{C50849AD-53DC-7AF5-F249-CE68B6EC3F90}"/>
+          </ac:picMkLst>
+        </pc:picChg>
+        <pc:picChg chg="add mod">
+          <ac:chgData name="Sushil Soni, Vodafone" userId="42f61249-e00d-4778-bd06-353e57e7c4e6" providerId="ADAL" clId="{EA7ACA62-6246-40AD-896F-A77B8CEAA7F1}" dt="2026-02-26T14:57:57.045" v="3067" actId="1076"/>
+          <ac:picMkLst>
+            <pc:docMk/>
+            <pc:sldMk cId="3065513456" sldId="2147470626"/>
+            <ac:picMk id="105" creationId="{858193CD-6B35-820D-F384-DF75F21C4741}"/>
+          </ac:picMkLst>
+        </pc:picChg>
         <pc:cxnChg chg="add mod">
           <ac:chgData name="Sushil Soni, Vodafone" userId="42f61249-e00d-4778-bd06-353e57e7c4e6" providerId="ADAL" clId="{EA7ACA62-6246-40AD-896F-A77B8CEAA7F1}" dt="2026-02-26T04:28:05.143" v="1086" actId="14100"/>
           <ac:cxnSpMkLst>
@@ -417,7 +721,7 @@
           </ac:cxnSpMkLst>
         </pc:cxnChg>
         <pc:cxnChg chg="add mod">
-          <ac:chgData name="Sushil Soni, Vodafone" userId="42f61249-e00d-4778-bd06-353e57e7c4e6" providerId="ADAL" clId="{EA7ACA62-6246-40AD-896F-A77B8CEAA7F1}" dt="2026-02-26T09:39:37.811" v="2132" actId="693"/>
+          <ac:chgData name="Sushil Soni, Vodafone" userId="42f61249-e00d-4778-bd06-353e57e7c4e6" providerId="ADAL" clId="{EA7ACA62-6246-40AD-896F-A77B8CEAA7F1}" dt="2026-02-26T10:00:00.405" v="2143" actId="14100"/>
           <ac:cxnSpMkLst>
             <pc:docMk/>
             <pc:sldMk cId="3065513456" sldId="2147470626"/>
@@ -456,8 +760,8 @@
           </ac:spMkLst>
         </pc:spChg>
       </pc:sldChg>
-      <pc:sldChg chg="addSp delSp modSp add mod">
-        <pc:chgData name="Sushil Soni, Vodafone" userId="42f61249-e00d-4778-bd06-353e57e7c4e6" providerId="ADAL" clId="{EA7ACA62-6246-40AD-896F-A77B8CEAA7F1}" dt="2026-02-25T14:04:10.787" v="986" actId="478"/>
+      <pc:sldChg chg="addSp delSp modSp add del mod">
+        <pc:chgData name="Sushil Soni, Vodafone" userId="42f61249-e00d-4778-bd06-353e57e7c4e6" providerId="ADAL" clId="{EA7ACA62-6246-40AD-896F-A77B8CEAA7F1}" dt="2026-02-26T11:29:30.638" v="2915" actId="2696"/>
         <pc:sldMkLst>
           <pc:docMk/>
           <pc:sldMk cId="1330310226" sldId="2147470628"/>
@@ -468,110 +772,6 @@
             <pc:docMk/>
             <pc:sldMk cId="1330310226" sldId="2147470628"/>
             <ac:spMk id="2" creationId="{54B77AB8-32EA-A124-6CA7-7A11B08AD1E0}"/>
-          </ac:spMkLst>
-        </pc:spChg>
-        <pc:spChg chg="mod">
-          <ac:chgData name="Sushil Soni, Vodafone" userId="42f61249-e00d-4778-bd06-353e57e7c4e6" providerId="ADAL" clId="{EA7ACA62-6246-40AD-896F-A77B8CEAA7F1}" dt="2026-02-24T08:59:55.917" v="741" actId="1037"/>
-          <ac:spMkLst>
-            <pc:docMk/>
-            <pc:sldMk cId="1330310226" sldId="2147470628"/>
-            <ac:spMk id="4" creationId="{8D07426D-2253-24DB-003D-A39031D3F75B}"/>
-          </ac:spMkLst>
-        </pc:spChg>
-        <pc:spChg chg="mod">
-          <ac:chgData name="Sushil Soni, Vodafone" userId="42f61249-e00d-4778-bd06-353e57e7c4e6" providerId="ADAL" clId="{EA7ACA62-6246-40AD-896F-A77B8CEAA7F1}" dt="2026-02-24T08:59:12.560" v="713" actId="1076"/>
-          <ac:spMkLst>
-            <pc:docMk/>
-            <pc:sldMk cId="1330310226" sldId="2147470628"/>
-            <ac:spMk id="8" creationId="{2E9414DA-8D06-B268-401A-85A7C32499EB}"/>
-          </ac:spMkLst>
-        </pc:spChg>
-        <pc:spChg chg="mod">
-          <ac:chgData name="Sushil Soni, Vodafone" userId="42f61249-e00d-4778-bd06-353e57e7c4e6" providerId="ADAL" clId="{EA7ACA62-6246-40AD-896F-A77B8CEAA7F1}" dt="2026-02-24T08:59:18.909" v="714" actId="1076"/>
-          <ac:spMkLst>
-            <pc:docMk/>
-            <pc:sldMk cId="1330310226" sldId="2147470628"/>
-            <ac:spMk id="15" creationId="{05FC9F13-3E51-AFC6-261C-1424E551211E}"/>
-          </ac:spMkLst>
-        </pc:spChg>
-        <pc:spChg chg="mod">
-          <ac:chgData name="Sushil Soni, Vodafone" userId="42f61249-e00d-4778-bd06-353e57e7c4e6" providerId="ADAL" clId="{EA7ACA62-6246-40AD-896F-A77B8CEAA7F1}" dt="2026-02-24T08:52:13.056" v="408" actId="1037"/>
-          <ac:spMkLst>
-            <pc:docMk/>
-            <pc:sldMk cId="1330310226" sldId="2147470628"/>
-            <ac:spMk id="21" creationId="{B2329BB0-CFC5-18A2-F584-6D068E9821A8}"/>
-          </ac:spMkLst>
-        </pc:spChg>
-        <pc:spChg chg="mod">
-          <ac:chgData name="Sushil Soni, Vodafone" userId="42f61249-e00d-4778-bd06-353e57e7c4e6" providerId="ADAL" clId="{EA7ACA62-6246-40AD-896F-A77B8CEAA7F1}" dt="2026-02-24T08:52:13.056" v="408" actId="1037"/>
-          <ac:spMkLst>
-            <pc:docMk/>
-            <pc:sldMk cId="1330310226" sldId="2147470628"/>
-            <ac:spMk id="30" creationId="{0D5E0323-7E8A-A6DD-6CDC-F8CF94096235}"/>
-          </ac:spMkLst>
-        </pc:spChg>
-        <pc:spChg chg="mod">
-          <ac:chgData name="Sushil Soni, Vodafone" userId="42f61249-e00d-4778-bd06-353e57e7c4e6" providerId="ADAL" clId="{EA7ACA62-6246-40AD-896F-A77B8CEAA7F1}" dt="2026-02-24T08:55:33.978" v="480" actId="207"/>
-          <ac:spMkLst>
-            <pc:docMk/>
-            <pc:sldMk cId="1330310226" sldId="2147470628"/>
-            <ac:spMk id="62" creationId="{23AAF9B9-80D9-87D5-FB59-71DC7546D500}"/>
-          </ac:spMkLst>
-        </pc:spChg>
-        <pc:spChg chg="mod">
-          <ac:chgData name="Sushil Soni, Vodafone" userId="42f61249-e00d-4778-bd06-353e57e7c4e6" providerId="ADAL" clId="{EA7ACA62-6246-40AD-896F-A77B8CEAA7F1}" dt="2026-02-24T08:55:33.978" v="480" actId="207"/>
-          <ac:spMkLst>
-            <pc:docMk/>
-            <pc:sldMk cId="1330310226" sldId="2147470628"/>
-            <ac:spMk id="63" creationId="{AD1DBF47-6E57-0B2A-5C55-F44B8B4A24A0}"/>
-          </ac:spMkLst>
-        </pc:spChg>
-        <pc:spChg chg="mod">
-          <ac:chgData name="Sushil Soni, Vodafone" userId="42f61249-e00d-4778-bd06-353e57e7c4e6" providerId="ADAL" clId="{EA7ACA62-6246-40AD-896F-A77B8CEAA7F1}" dt="2026-02-24T08:55:33.978" v="480" actId="207"/>
-          <ac:spMkLst>
-            <pc:docMk/>
-            <pc:sldMk cId="1330310226" sldId="2147470628"/>
-            <ac:spMk id="64" creationId="{F3BE0A09-BF21-4994-E5F1-5AB3CBCBD554}"/>
-          </ac:spMkLst>
-        </pc:spChg>
-        <pc:spChg chg="mod">
-          <ac:chgData name="Sushil Soni, Vodafone" userId="42f61249-e00d-4778-bd06-353e57e7c4e6" providerId="ADAL" clId="{EA7ACA62-6246-40AD-896F-A77B8CEAA7F1}" dt="2026-02-24T08:55:33.978" v="480" actId="207"/>
-          <ac:spMkLst>
-            <pc:docMk/>
-            <pc:sldMk cId="1330310226" sldId="2147470628"/>
-            <ac:spMk id="69" creationId="{207E3152-3EBC-FCE6-AF34-A5082CAD47CD}"/>
-          </ac:spMkLst>
-        </pc:spChg>
-        <pc:spChg chg="mod">
-          <ac:chgData name="Sushil Soni, Vodafone" userId="42f61249-e00d-4778-bd06-353e57e7c4e6" providerId="ADAL" clId="{EA7ACA62-6246-40AD-896F-A77B8CEAA7F1}" dt="2026-02-24T08:55:33.978" v="480" actId="207"/>
-          <ac:spMkLst>
-            <pc:docMk/>
-            <pc:sldMk cId="1330310226" sldId="2147470628"/>
-            <ac:spMk id="71" creationId="{DC39D31A-3930-3758-2B3A-BDB205D81DDE}"/>
-          </ac:spMkLst>
-        </pc:spChg>
-        <pc:spChg chg="mod">
-          <ac:chgData name="Sushil Soni, Vodafone" userId="42f61249-e00d-4778-bd06-353e57e7c4e6" providerId="ADAL" clId="{EA7ACA62-6246-40AD-896F-A77B8CEAA7F1}" dt="2026-02-24T08:55:33.978" v="480" actId="207"/>
-          <ac:spMkLst>
-            <pc:docMk/>
-            <pc:sldMk cId="1330310226" sldId="2147470628"/>
-            <ac:spMk id="72" creationId="{5094F5FD-A520-BC8F-3A5D-0C765703F732}"/>
-          </ac:spMkLst>
-        </pc:spChg>
-        <pc:spChg chg="mod">
-          <ac:chgData name="Sushil Soni, Vodafone" userId="42f61249-e00d-4778-bd06-353e57e7c4e6" providerId="ADAL" clId="{EA7ACA62-6246-40AD-896F-A77B8CEAA7F1}" dt="2026-02-24T08:55:33.978" v="480" actId="207"/>
-          <ac:spMkLst>
-            <pc:docMk/>
-            <pc:sldMk cId="1330310226" sldId="2147470628"/>
-            <ac:spMk id="80" creationId="{4E427351-1F4D-0648-4A85-9434061D4D5D}"/>
-          </ac:spMkLst>
-        </pc:spChg>
-        <pc:spChg chg="add mod">
-          <ac:chgData name="Sushil Soni, Vodafone" userId="42f61249-e00d-4778-bd06-353e57e7c4e6" providerId="ADAL" clId="{EA7ACA62-6246-40AD-896F-A77B8CEAA7F1}" dt="2026-02-24T08:56:38.736" v="590" actId="1036"/>
-          <ac:spMkLst>
-            <pc:docMk/>
-            <pc:sldMk cId="1330310226" sldId="2147470628"/>
-            <ac:spMk id="84" creationId="{1E8B96A0-5596-BC97-E213-23D72E16D9C8}"/>
           </ac:spMkLst>
         </pc:spChg>
         <pc:spChg chg="mod">
@@ -590,110 +790,6 @@
             <ac:spMk id="122" creationId="{71CD513F-50CF-37C1-BE52-0741D5B505F4}"/>
           </ac:spMkLst>
         </pc:spChg>
-        <pc:grpChg chg="mod">
-          <ac:chgData name="Sushil Soni, Vodafone" userId="42f61249-e00d-4778-bd06-353e57e7c4e6" providerId="ADAL" clId="{EA7ACA62-6246-40AD-896F-A77B8CEAA7F1}" dt="2026-02-24T08:52:13.056" v="408" actId="1037"/>
-          <ac:grpSpMkLst>
-            <pc:docMk/>
-            <pc:sldMk cId="1330310226" sldId="2147470628"/>
-            <ac:grpSpMk id="43" creationId="{2277AB26-7CF3-60AC-876B-7ABD070C6766}"/>
-          </ac:grpSpMkLst>
-        </pc:grpChg>
-        <pc:grpChg chg="mod">
-          <ac:chgData name="Sushil Soni, Vodafone" userId="42f61249-e00d-4778-bd06-353e57e7c4e6" providerId="ADAL" clId="{EA7ACA62-6246-40AD-896F-A77B8CEAA7F1}" dt="2026-02-24T08:52:13.056" v="408" actId="1037"/>
-          <ac:grpSpMkLst>
-            <pc:docMk/>
-            <pc:sldMk cId="1330310226" sldId="2147470628"/>
-            <ac:grpSpMk id="44" creationId="{6A05D550-3A71-9DA0-47AE-5AC8344C2494}"/>
-          </ac:grpSpMkLst>
-        </pc:grpChg>
-        <pc:grpChg chg="mod">
-          <ac:chgData name="Sushil Soni, Vodafone" userId="42f61249-e00d-4778-bd06-353e57e7c4e6" providerId="ADAL" clId="{EA7ACA62-6246-40AD-896F-A77B8CEAA7F1}" dt="2026-02-24T08:56:38.736" v="590" actId="1036"/>
-          <ac:grpSpMkLst>
-            <pc:docMk/>
-            <pc:sldMk cId="1330310226" sldId="2147470628"/>
-            <ac:grpSpMk id="61" creationId="{C3255A7D-712F-71C5-34AD-E08F771673FA}"/>
-          </ac:grpSpMkLst>
-        </pc:grpChg>
-        <pc:picChg chg="mod">
-          <ac:chgData name="Sushil Soni, Vodafone" userId="42f61249-e00d-4778-bd06-353e57e7c4e6" providerId="ADAL" clId="{EA7ACA62-6246-40AD-896F-A77B8CEAA7F1}" dt="2026-02-24T08:52:13.056" v="408" actId="1037"/>
-          <ac:picMkLst>
-            <pc:docMk/>
-            <pc:sldMk cId="1330310226" sldId="2147470628"/>
-            <ac:picMk id="56" creationId="{C8246ED7-AECD-1321-A5A7-969C9FAB67D0}"/>
-          </ac:picMkLst>
-        </pc:picChg>
-        <pc:picChg chg="mod">
-          <ac:chgData name="Sushil Soni, Vodafone" userId="42f61249-e00d-4778-bd06-353e57e7c4e6" providerId="ADAL" clId="{EA7ACA62-6246-40AD-896F-A77B8CEAA7F1}" dt="2026-02-24T08:52:13.056" v="408" actId="1037"/>
-          <ac:picMkLst>
-            <pc:docMk/>
-            <pc:sldMk cId="1330310226" sldId="2147470628"/>
-            <ac:picMk id="57" creationId="{8935D077-61E3-B94E-954A-FB8634CD6E4B}"/>
-          </ac:picMkLst>
-        </pc:picChg>
-        <pc:picChg chg="mod">
-          <ac:chgData name="Sushil Soni, Vodafone" userId="42f61249-e00d-4778-bd06-353e57e7c4e6" providerId="ADAL" clId="{EA7ACA62-6246-40AD-896F-A77B8CEAA7F1}" dt="2026-02-24T08:57:37.505" v="700" actId="1035"/>
-          <ac:picMkLst>
-            <pc:docMk/>
-            <pc:sldMk cId="1330310226" sldId="2147470628"/>
-            <ac:picMk id="67" creationId="{7A2F9271-56E1-A060-8E14-C481D5923C64}"/>
-          </ac:picMkLst>
-        </pc:picChg>
-        <pc:picChg chg="mod">
-          <ac:chgData name="Sushil Soni, Vodafone" userId="42f61249-e00d-4778-bd06-353e57e7c4e6" providerId="ADAL" clId="{EA7ACA62-6246-40AD-896F-A77B8CEAA7F1}" dt="2026-02-24T08:57:45.123" v="712" actId="1038"/>
-          <ac:picMkLst>
-            <pc:docMk/>
-            <pc:sldMk cId="1330310226" sldId="2147470628"/>
-            <ac:picMk id="68" creationId="{F9807164-A73B-8454-F2E0-DA525A1DBF74}"/>
-          </ac:picMkLst>
-        </pc:picChg>
-        <pc:picChg chg="mod">
-          <ac:chgData name="Sushil Soni, Vodafone" userId="42f61249-e00d-4778-bd06-353e57e7c4e6" providerId="ADAL" clId="{EA7ACA62-6246-40AD-896F-A77B8CEAA7F1}" dt="2026-02-24T08:55:33.978" v="480" actId="207"/>
-          <ac:picMkLst>
-            <pc:docMk/>
-            <pc:sldMk cId="1330310226" sldId="2147470628"/>
-            <ac:picMk id="76" creationId="{CE421689-CE1D-C3A1-D6C3-EA04CFF7A2EC}"/>
-          </ac:picMkLst>
-        </pc:picChg>
-        <pc:picChg chg="mod">
-          <ac:chgData name="Sushil Soni, Vodafone" userId="42f61249-e00d-4778-bd06-353e57e7c4e6" providerId="ADAL" clId="{EA7ACA62-6246-40AD-896F-A77B8CEAA7F1}" dt="2026-02-24T08:55:33.978" v="480" actId="207"/>
-          <ac:picMkLst>
-            <pc:docMk/>
-            <pc:sldMk cId="1330310226" sldId="2147470628"/>
-            <ac:picMk id="78" creationId="{949DB664-4083-230F-9A3C-BB6BB8861EE5}"/>
-          </ac:picMkLst>
-        </pc:picChg>
-        <pc:picChg chg="mod">
-          <ac:chgData name="Sushil Soni, Vodafone" userId="42f61249-e00d-4778-bd06-353e57e7c4e6" providerId="ADAL" clId="{EA7ACA62-6246-40AD-896F-A77B8CEAA7F1}" dt="2026-02-24T08:55:33.978" v="480" actId="207"/>
-          <ac:picMkLst>
-            <pc:docMk/>
-            <pc:sldMk cId="1330310226" sldId="2147470628"/>
-            <ac:picMk id="79" creationId="{787C982C-8904-F98A-76AF-39177329DB2A}"/>
-          </ac:picMkLst>
-        </pc:picChg>
-        <pc:picChg chg="add mod">
-          <ac:chgData name="Sushil Soni, Vodafone" userId="42f61249-e00d-4778-bd06-353e57e7c4e6" providerId="ADAL" clId="{EA7ACA62-6246-40AD-896F-A77B8CEAA7F1}" dt="2026-02-24T08:56:38.736" v="590" actId="1036"/>
-          <ac:picMkLst>
-            <pc:docMk/>
-            <pc:sldMk cId="1330310226" sldId="2147470628"/>
-            <ac:picMk id="83" creationId="{3F5B865B-109F-E1D7-97D3-7CDDFE559F47}"/>
-          </ac:picMkLst>
-        </pc:picChg>
-        <pc:cxnChg chg="mod">
-          <ac:chgData name="Sushil Soni, Vodafone" userId="42f61249-e00d-4778-bd06-353e57e7c4e6" providerId="ADAL" clId="{EA7ACA62-6246-40AD-896F-A77B8CEAA7F1}" dt="2026-02-24T08:53:37.293" v="474" actId="14100"/>
-          <ac:cxnSpMkLst>
-            <pc:docMk/>
-            <pc:sldMk cId="1330310226" sldId="2147470628"/>
-            <ac:cxnSpMk id="59" creationId="{BB874D96-4504-E7FD-82AD-DF10B8737488}"/>
-          </ac:cxnSpMkLst>
-        </pc:cxnChg>
-        <pc:cxnChg chg="add mod">
-          <ac:chgData name="Sushil Soni, Vodafone" userId="42f61249-e00d-4778-bd06-353e57e7c4e6" providerId="ADAL" clId="{EA7ACA62-6246-40AD-896F-A77B8CEAA7F1}" dt="2026-02-24T08:57:10.072" v="593" actId="1076"/>
-          <ac:cxnSpMkLst>
-            <pc:docMk/>
-            <pc:sldMk cId="1330310226" sldId="2147470628"/>
-            <ac:cxnSpMk id="86" creationId="{33605172-69D3-5C49-3A88-120C1B009CC3}"/>
-          </ac:cxnSpMkLst>
-        </pc:cxnChg>
       </pc:sldChg>
       <pc:sldChg chg="addSp delSp modSp new mod ord">
         <pc:chgData name="Sushil Soni, Vodafone" userId="42f61249-e00d-4778-bd06-353e57e7c4e6" providerId="ADAL" clId="{EA7ACA62-6246-40AD-896F-A77B8CEAA7F1}" dt="2026-02-26T06:09:12.201" v="2123" actId="207"/>
@@ -751,7 +847,7 @@
         </pc:picChg>
       </pc:sldChg>
       <pc:sldChg chg="addSp delSp modSp new mod ord">
-        <pc:chgData name="Sushil Soni, Vodafone" userId="42f61249-e00d-4778-bd06-353e57e7c4e6" providerId="ADAL" clId="{EA7ACA62-6246-40AD-896F-A77B8CEAA7F1}" dt="2026-02-26T09:39:03.744" v="2130" actId="20577"/>
+        <pc:chgData name="Sushil Soni, Vodafone" userId="42f61249-e00d-4778-bd06-353e57e7c4e6" providerId="ADAL" clId="{EA7ACA62-6246-40AD-896F-A77B8CEAA7F1}" dt="2026-02-26T13:19:04.698" v="3045" actId="6549"/>
         <pc:sldMkLst>
           <pc:docMk/>
           <pc:sldMk cId="3389512670" sldId="2147470630"/>
@@ -765,7 +861,7 @@
           </ac:spMkLst>
         </pc:spChg>
         <pc:spChg chg="mod">
-          <ac:chgData name="Sushil Soni, Vodafone" userId="42f61249-e00d-4778-bd06-353e57e7c4e6" providerId="ADAL" clId="{EA7ACA62-6246-40AD-896F-A77B8CEAA7F1}" dt="2026-02-26T05:59:57.969" v="1861" actId="20577"/>
+          <ac:chgData name="Sushil Soni, Vodafone" userId="42f61249-e00d-4778-bd06-353e57e7c4e6" providerId="ADAL" clId="{EA7ACA62-6246-40AD-896F-A77B8CEAA7F1}" dt="2026-02-26T13:19:04.698" v="3045" actId="6549"/>
           <ac:spMkLst>
             <pc:docMk/>
             <pc:sldMk cId="3389512670" sldId="2147470630"/>
@@ -773,29 +869,443 @@
           </ac:spMkLst>
         </pc:spChg>
         <pc:spChg chg="mod">
-          <ac:chgData name="Sushil Soni, Vodafone" userId="42f61249-e00d-4778-bd06-353e57e7c4e6" providerId="ADAL" clId="{EA7ACA62-6246-40AD-896F-A77B8CEAA7F1}" dt="2026-02-26T06:08:33.399" v="2119" actId="207"/>
+          <ac:chgData name="Sushil Soni, Vodafone" userId="42f61249-e00d-4778-bd06-353e57e7c4e6" providerId="ADAL" clId="{EA7ACA62-6246-40AD-896F-A77B8CEAA7F1}" dt="2026-02-26T11:16:42.873" v="2639" actId="20577"/>
           <ac:spMkLst>
             <pc:docMk/>
             <pc:sldMk cId="3389512670" sldId="2147470630"/>
             <ac:spMk id="4" creationId="{02F8AB1F-776C-04C7-721A-1E913CD72990}"/>
           </ac:spMkLst>
         </pc:spChg>
-        <pc:spChg chg="add mod">
-          <ac:chgData name="Sushil Soni, Vodafone" userId="42f61249-e00d-4778-bd06-353e57e7c4e6" providerId="ADAL" clId="{EA7ACA62-6246-40AD-896F-A77B8CEAA7F1}" dt="2026-02-26T06:08:37.285" v="2120" actId="207"/>
+        <pc:spChg chg="add del mod">
+          <ac:chgData name="Sushil Soni, Vodafone" userId="42f61249-e00d-4778-bd06-353e57e7c4e6" providerId="ADAL" clId="{EA7ACA62-6246-40AD-896F-A77B8CEAA7F1}" dt="2026-02-26T10:36:32.187" v="2434" actId="478"/>
           <ac:spMkLst>
             <pc:docMk/>
             <pc:sldMk cId="3389512670" sldId="2147470630"/>
             <ac:spMk id="5" creationId="{45A820E8-80BB-143E-2AC7-42CB21683752}"/>
           </ac:spMkLst>
         </pc:spChg>
-        <pc:spChg chg="add mod">
-          <ac:chgData name="Sushil Soni, Vodafone" userId="42f61249-e00d-4778-bd06-353e57e7c4e6" providerId="ADAL" clId="{EA7ACA62-6246-40AD-896F-A77B8CEAA7F1}" dt="2026-02-26T09:39:03.744" v="2130" actId="20577"/>
+        <pc:spChg chg="add del mod">
+          <ac:chgData name="Sushil Soni, Vodafone" userId="42f61249-e00d-4778-bd06-353e57e7c4e6" providerId="ADAL" clId="{EA7ACA62-6246-40AD-896F-A77B8CEAA7F1}" dt="2026-02-26T10:37:26.959" v="2468" actId="478"/>
           <ac:spMkLst>
             <pc:docMk/>
             <pc:sldMk cId="3389512670" sldId="2147470630"/>
             <ac:spMk id="6" creationId="{5C6AEF61-FB5D-E5ED-3BC5-86997581EEF7}"/>
           </ac:spMkLst>
         </pc:spChg>
+      </pc:sldChg>
+      <pc:sldChg chg="addSp delSp modSp add mod">
+        <pc:chgData name="Sushil Soni, Vodafone" userId="42f61249-e00d-4778-bd06-353e57e7c4e6" providerId="ADAL" clId="{EA7ACA62-6246-40AD-896F-A77B8CEAA7F1}" dt="2026-02-26T14:58:53.609" v="3105" actId="1076"/>
+        <pc:sldMkLst>
+          <pc:docMk/>
+          <pc:sldMk cId="1998312597" sldId="2147470631"/>
+        </pc:sldMkLst>
+        <pc:spChg chg="mod">
+          <ac:chgData name="Sushil Soni, Vodafone" userId="42f61249-e00d-4778-bd06-353e57e7c4e6" providerId="ADAL" clId="{EA7ACA62-6246-40AD-896F-A77B8CEAA7F1}" dt="2026-02-26T11:18:19.170" v="2707"/>
+          <ac:spMkLst>
+            <pc:docMk/>
+            <pc:sldMk cId="1998312597" sldId="2147470631"/>
+            <ac:spMk id="13" creationId="{2204D74D-2E7B-2974-25BE-E480A606AA7B}"/>
+          </ac:spMkLst>
+        </pc:spChg>
+        <pc:spChg chg="mod">
+          <ac:chgData name="Sushil Soni, Vodafone" userId="42f61249-e00d-4778-bd06-353e57e7c4e6" providerId="ADAL" clId="{EA7ACA62-6246-40AD-896F-A77B8CEAA7F1}" dt="2026-02-26T11:18:19.170" v="2707"/>
+          <ac:spMkLst>
+            <pc:docMk/>
+            <pc:sldMk cId="1998312597" sldId="2147470631"/>
+            <ac:spMk id="19" creationId="{0018CD53-F616-AF7E-8E98-1C4C56EEDD44}"/>
+          </ac:spMkLst>
+        </pc:spChg>
+        <pc:spChg chg="mod">
+          <ac:chgData name="Sushil Soni, Vodafone" userId="42f61249-e00d-4778-bd06-353e57e7c4e6" providerId="ADAL" clId="{EA7ACA62-6246-40AD-896F-A77B8CEAA7F1}" dt="2026-02-26T11:27:51.585" v="2892" actId="255"/>
+          <ac:spMkLst>
+            <pc:docMk/>
+            <pc:sldMk cId="1998312597" sldId="2147470631"/>
+            <ac:spMk id="21" creationId="{9BD3E859-EBAC-D337-BB4A-712948D5AAA3}"/>
+          </ac:spMkLst>
+        </pc:spChg>
+        <pc:spChg chg="mod">
+          <ac:chgData name="Sushil Soni, Vodafone" userId="42f61249-e00d-4778-bd06-353e57e7c4e6" providerId="ADAL" clId="{EA7ACA62-6246-40AD-896F-A77B8CEAA7F1}" dt="2026-02-26T11:18:19.170" v="2707"/>
+          <ac:spMkLst>
+            <pc:docMk/>
+            <pc:sldMk cId="1998312597" sldId="2147470631"/>
+            <ac:spMk id="27" creationId="{F804356B-30F1-FFA4-F64F-C51018DDFE42}"/>
+          </ac:spMkLst>
+        </pc:spChg>
+        <pc:spChg chg="mod">
+          <ac:chgData name="Sushil Soni, Vodafone" userId="42f61249-e00d-4778-bd06-353e57e7c4e6" providerId="ADAL" clId="{EA7ACA62-6246-40AD-896F-A77B8CEAA7F1}" dt="2026-02-26T11:27:47.753" v="2891" actId="255"/>
+          <ac:spMkLst>
+            <pc:docMk/>
+            <pc:sldMk cId="1998312597" sldId="2147470631"/>
+            <ac:spMk id="30" creationId="{2DD6D3CE-A91A-C74C-CB52-FD4431C6F457}"/>
+          </ac:spMkLst>
+        </pc:spChg>
+        <pc:spChg chg="mod">
+          <ac:chgData name="Sushil Soni, Vodafone" userId="42f61249-e00d-4778-bd06-353e57e7c4e6" providerId="ADAL" clId="{EA7ACA62-6246-40AD-896F-A77B8CEAA7F1}" dt="2026-02-26T11:19:27.537" v="2779" actId="14100"/>
+          <ac:spMkLst>
+            <pc:docMk/>
+            <pc:sldMk cId="1998312597" sldId="2147470631"/>
+            <ac:spMk id="48" creationId="{D933E31E-F133-2FDB-F782-E2D4775C84AE}"/>
+          </ac:spMkLst>
+        </pc:spChg>
+        <pc:spChg chg="mod">
+          <ac:chgData name="Sushil Soni, Vodafone" userId="42f61249-e00d-4778-bd06-353e57e7c4e6" providerId="ADAL" clId="{EA7ACA62-6246-40AD-896F-A77B8CEAA7F1}" dt="2026-02-26T11:18:19.170" v="2707"/>
+          <ac:spMkLst>
+            <pc:docMk/>
+            <pc:sldMk cId="1998312597" sldId="2147470631"/>
+            <ac:spMk id="63" creationId="{A55CDB97-D499-2FB7-FB88-F21BC0021F6F}"/>
+          </ac:spMkLst>
+        </pc:spChg>
+        <pc:spChg chg="mod">
+          <ac:chgData name="Sushil Soni, Vodafone" userId="42f61249-e00d-4778-bd06-353e57e7c4e6" providerId="ADAL" clId="{EA7ACA62-6246-40AD-896F-A77B8CEAA7F1}" dt="2026-02-26T11:18:19.170" v="2707"/>
+          <ac:spMkLst>
+            <pc:docMk/>
+            <pc:sldMk cId="1998312597" sldId="2147470631"/>
+            <ac:spMk id="69" creationId="{CF5CE89F-E7C2-F419-DDC2-F39323696430}"/>
+          </ac:spMkLst>
+        </pc:spChg>
+        <pc:spChg chg="mod">
+          <ac:chgData name="Sushil Soni, Vodafone" userId="42f61249-e00d-4778-bd06-353e57e7c4e6" providerId="ADAL" clId="{EA7ACA62-6246-40AD-896F-A77B8CEAA7F1}" dt="2026-02-26T11:18:09.300" v="2706" actId="1037"/>
+          <ac:spMkLst>
+            <pc:docMk/>
+            <pc:sldMk cId="1998312597" sldId="2147470631"/>
+            <ac:spMk id="79" creationId="{AE5BD221-BA4E-E1F9-E8D5-FEE187C758F4}"/>
+          </ac:spMkLst>
+        </pc:spChg>
+        <pc:spChg chg="mod">
+          <ac:chgData name="Sushil Soni, Vodafone" userId="42f61249-e00d-4778-bd06-353e57e7c4e6" providerId="ADAL" clId="{EA7ACA62-6246-40AD-896F-A77B8CEAA7F1}" dt="2026-02-26T14:56:45.101" v="3059" actId="14100"/>
+          <ac:spMkLst>
+            <pc:docMk/>
+            <pc:sldMk cId="1998312597" sldId="2147470631"/>
+            <ac:spMk id="80" creationId="{FAFE0D5D-B5E6-B67E-EF9E-DFC497181FF7}"/>
+          </ac:spMkLst>
+        </pc:spChg>
+        <pc:spChg chg="mod">
+          <ac:chgData name="Sushil Soni, Vodafone" userId="42f61249-e00d-4778-bd06-353e57e7c4e6" providerId="ADAL" clId="{EA7ACA62-6246-40AD-896F-A77B8CEAA7F1}" dt="2026-02-26T11:27:17.640" v="2860" actId="1038"/>
+          <ac:spMkLst>
+            <pc:docMk/>
+            <pc:sldMk cId="1998312597" sldId="2147470631"/>
+            <ac:spMk id="84" creationId="{F446B3B9-9233-88B6-F75B-AA2CD86057BF}"/>
+          </ac:spMkLst>
+        </pc:spChg>
+        <pc:spChg chg="mod">
+          <ac:chgData name="Sushil Soni, Vodafone" userId="42f61249-e00d-4778-bd06-353e57e7c4e6" providerId="ADAL" clId="{EA7ACA62-6246-40AD-896F-A77B8CEAA7F1}" dt="2026-02-26T11:27:57.795" v="2893" actId="255"/>
+          <ac:spMkLst>
+            <pc:docMk/>
+            <pc:sldMk cId="1998312597" sldId="2147470631"/>
+            <ac:spMk id="85" creationId="{5B8787AE-EB1D-14CB-11B9-51D84BA9A8EC}"/>
+          </ac:spMkLst>
+        </pc:spChg>
+        <pc:spChg chg="mod">
+          <ac:chgData name="Sushil Soni, Vodafone" userId="42f61249-e00d-4778-bd06-353e57e7c4e6" providerId="ADAL" clId="{EA7ACA62-6246-40AD-896F-A77B8CEAA7F1}" dt="2026-02-26T11:27:32.456" v="2889" actId="1038"/>
+          <ac:spMkLst>
+            <pc:docMk/>
+            <pc:sldMk cId="1998312597" sldId="2147470631"/>
+            <ac:spMk id="86" creationId="{CB7A6235-0274-3E8A-8B6C-33CF41AB8BFF}"/>
+          </ac:spMkLst>
+        </pc:spChg>
+        <pc:spChg chg="mod">
+          <ac:chgData name="Sushil Soni, Vodafone" userId="42f61249-e00d-4778-bd06-353e57e7c4e6" providerId="ADAL" clId="{EA7ACA62-6246-40AD-896F-A77B8CEAA7F1}" dt="2026-02-26T14:54:51.198" v="3054" actId="1036"/>
+          <ac:spMkLst>
+            <pc:docMk/>
+            <pc:sldMk cId="1998312597" sldId="2147470631"/>
+            <ac:spMk id="87" creationId="{C5CDDC8F-0856-18B9-C070-0CB2DBE6380E}"/>
+          </ac:spMkLst>
+        </pc:spChg>
+        <pc:spChg chg="mod">
+          <ac:chgData name="Sushil Soni, Vodafone" userId="42f61249-e00d-4778-bd06-353e57e7c4e6" providerId="ADAL" clId="{EA7ACA62-6246-40AD-896F-A77B8CEAA7F1}" dt="2026-02-26T11:29:06.160" v="2913" actId="14100"/>
+          <ac:spMkLst>
+            <pc:docMk/>
+            <pc:sldMk cId="1998312597" sldId="2147470631"/>
+            <ac:spMk id="92" creationId="{C8BB6A4B-DE9E-0357-F09C-56199B4EAF50}"/>
+          </ac:spMkLst>
+        </pc:spChg>
+        <pc:spChg chg="mod">
+          <ac:chgData name="Sushil Soni, Vodafone" userId="42f61249-e00d-4778-bd06-353e57e7c4e6" providerId="ADAL" clId="{EA7ACA62-6246-40AD-896F-A77B8CEAA7F1}" dt="2026-02-26T11:25:22.094" v="2814" actId="1076"/>
+          <ac:spMkLst>
+            <pc:docMk/>
+            <pc:sldMk cId="1998312597" sldId="2147470631"/>
+            <ac:spMk id="94" creationId="{E4F86859-8282-BFAF-6A43-01640AA87966}"/>
+          </ac:spMkLst>
+        </pc:spChg>
+        <pc:spChg chg="mod">
+          <ac:chgData name="Sushil Soni, Vodafone" userId="42f61249-e00d-4778-bd06-353e57e7c4e6" providerId="ADAL" clId="{EA7ACA62-6246-40AD-896F-A77B8CEAA7F1}" dt="2026-02-26T11:25:17.029" v="2813" actId="1076"/>
+          <ac:spMkLst>
+            <pc:docMk/>
+            <pc:sldMk cId="1998312597" sldId="2147470631"/>
+            <ac:spMk id="95" creationId="{34B0E8EC-397B-E8C1-B556-CE579983038F}"/>
+          </ac:spMkLst>
+        </pc:spChg>
+        <pc:spChg chg="mod">
+          <ac:chgData name="Sushil Soni, Vodafone" userId="42f61249-e00d-4778-bd06-353e57e7c4e6" providerId="ADAL" clId="{EA7ACA62-6246-40AD-896F-A77B8CEAA7F1}" dt="2026-02-26T11:18:09.300" v="2706" actId="1037"/>
+          <ac:spMkLst>
+            <pc:docMk/>
+            <pc:sldMk cId="1998312597" sldId="2147470631"/>
+            <ac:spMk id="96" creationId="{F75FB7AA-2F46-E08C-CE8D-874C07ED3E9B}"/>
+          </ac:spMkLst>
+        </pc:spChg>
+        <pc:spChg chg="mod">
+          <ac:chgData name="Sushil Soni, Vodafone" userId="42f61249-e00d-4778-bd06-353e57e7c4e6" providerId="ADAL" clId="{EA7ACA62-6246-40AD-896F-A77B8CEAA7F1}" dt="2026-02-26T11:18:09.300" v="2706" actId="1037"/>
+          <ac:spMkLst>
+            <pc:docMk/>
+            <pc:sldMk cId="1998312597" sldId="2147470631"/>
+            <ac:spMk id="97" creationId="{49784DF5-548D-1941-C3E5-5E07E677BF2A}"/>
+          </ac:spMkLst>
+        </pc:spChg>
+        <pc:spChg chg="mod">
+          <ac:chgData name="Sushil Soni, Vodafone" userId="42f61249-e00d-4778-bd06-353e57e7c4e6" providerId="ADAL" clId="{EA7ACA62-6246-40AD-896F-A77B8CEAA7F1}" dt="2026-02-26T11:18:19.170" v="2707"/>
+          <ac:spMkLst>
+            <pc:docMk/>
+            <pc:sldMk cId="1998312597" sldId="2147470631"/>
+            <ac:spMk id="99" creationId="{FBBB2BB2-70BD-06C8-B81A-8176483C191C}"/>
+          </ac:spMkLst>
+        </pc:spChg>
+        <pc:spChg chg="add mod">
+          <ac:chgData name="Sushil Soni, Vodafone" userId="42f61249-e00d-4778-bd06-353e57e7c4e6" providerId="ADAL" clId="{EA7ACA62-6246-40AD-896F-A77B8CEAA7F1}" dt="2026-02-26T11:27:42.686" v="2890" actId="255"/>
+          <ac:spMkLst>
+            <pc:docMk/>
+            <pc:sldMk cId="1998312597" sldId="2147470631"/>
+            <ac:spMk id="102" creationId="{F7E934AD-145A-BC45-7491-4B839DF0859D}"/>
+          </ac:spMkLst>
+        </pc:spChg>
+        <pc:spChg chg="add mod">
+          <ac:chgData name="Sushil Soni, Vodafone" userId="42f61249-e00d-4778-bd06-353e57e7c4e6" providerId="ADAL" clId="{EA7ACA62-6246-40AD-896F-A77B8CEAA7F1}" dt="2026-02-26T11:19:44.200" v="2783" actId="20577"/>
+          <ac:spMkLst>
+            <pc:docMk/>
+            <pc:sldMk cId="1998312597" sldId="2147470631"/>
+            <ac:spMk id="103" creationId="{89E3F4FD-6D06-051F-E544-FC9D22FC98A6}"/>
+          </ac:spMkLst>
+        </pc:spChg>
+        <pc:spChg chg="add mod">
+          <ac:chgData name="Sushil Soni, Vodafone" userId="42f61249-e00d-4778-bd06-353e57e7c4e6" providerId="ADAL" clId="{EA7ACA62-6246-40AD-896F-A77B8CEAA7F1}" dt="2026-02-26T11:31:39.956" v="2955" actId="1076"/>
+          <ac:spMkLst>
+            <pc:docMk/>
+            <pc:sldMk cId="1998312597" sldId="2147470631"/>
+            <ac:spMk id="129" creationId="{DD8B70ED-C09F-E808-BB99-54B90D824883}"/>
+          </ac:spMkLst>
+        </pc:spChg>
+        <pc:spChg chg="add mod">
+          <ac:chgData name="Sushil Soni, Vodafone" userId="42f61249-e00d-4778-bd06-353e57e7c4e6" providerId="ADAL" clId="{EA7ACA62-6246-40AD-896F-A77B8CEAA7F1}" dt="2026-02-26T14:58:53.609" v="3105" actId="1076"/>
+          <ac:spMkLst>
+            <pc:docMk/>
+            <pc:sldMk cId="1998312597" sldId="2147470631"/>
+            <ac:spMk id="130" creationId="{959EE520-D25D-B671-AE13-E035CB052680}"/>
+          </ac:spMkLst>
+        </pc:spChg>
+        <pc:spChg chg="add mod">
+          <ac:chgData name="Sushil Soni, Vodafone" userId="42f61249-e00d-4778-bd06-353e57e7c4e6" providerId="ADAL" clId="{EA7ACA62-6246-40AD-896F-A77B8CEAA7F1}" dt="2026-02-26T14:58:50.421" v="3104" actId="1076"/>
+          <ac:spMkLst>
+            <pc:docMk/>
+            <pc:sldMk cId="1998312597" sldId="2147470631"/>
+            <ac:spMk id="131" creationId="{C89FCDA4-4350-9BDD-656B-10E89D4A026C}"/>
+          </ac:spMkLst>
+        </pc:spChg>
+        <pc:grpChg chg="mod">
+          <ac:chgData name="Sushil Soni, Vodafone" userId="42f61249-e00d-4778-bd06-353e57e7c4e6" providerId="ADAL" clId="{EA7ACA62-6246-40AD-896F-A77B8CEAA7F1}" dt="2026-02-26T11:18:39.280" v="2750" actId="14100"/>
+          <ac:grpSpMkLst>
+            <pc:docMk/>
+            <pc:sldMk cId="1998312597" sldId="2147470631"/>
+            <ac:grpSpMk id="4" creationId="{E1AB63D6-7286-699C-FD82-649C7D23ED6A}"/>
+          </ac:grpSpMkLst>
+        </pc:grpChg>
+        <pc:grpChg chg="mod">
+          <ac:chgData name="Sushil Soni, Vodafone" userId="42f61249-e00d-4778-bd06-353e57e7c4e6" providerId="ADAL" clId="{EA7ACA62-6246-40AD-896F-A77B8CEAA7F1}" dt="2026-02-26T11:18:09.300" v="2706" actId="1037"/>
+          <ac:grpSpMkLst>
+            <pc:docMk/>
+            <pc:sldMk cId="1998312597" sldId="2147470631"/>
+            <ac:grpSpMk id="43" creationId="{727AF875-EDFD-FE30-B668-AAE4B1C0624D}"/>
+          </ac:grpSpMkLst>
+        </pc:grpChg>
+        <pc:grpChg chg="mod">
+          <ac:chgData name="Sushil Soni, Vodafone" userId="42f61249-e00d-4778-bd06-353e57e7c4e6" providerId="ADAL" clId="{EA7ACA62-6246-40AD-896F-A77B8CEAA7F1}" dt="2026-02-26T11:18:09.300" v="2706" actId="1037"/>
+          <ac:grpSpMkLst>
+            <pc:docMk/>
+            <pc:sldMk cId="1998312597" sldId="2147470631"/>
+            <ac:grpSpMk id="44" creationId="{A6FA70BD-7659-C88D-4978-32CBA3F06558}"/>
+          </ac:grpSpMkLst>
+        </pc:grpChg>
+        <pc:picChg chg="mod">
+          <ac:chgData name="Sushil Soni, Vodafone" userId="42f61249-e00d-4778-bd06-353e57e7c4e6" providerId="ADAL" clId="{EA7ACA62-6246-40AD-896F-A77B8CEAA7F1}" dt="2026-02-26T11:18:09.300" v="2706" actId="1037"/>
+          <ac:picMkLst>
+            <pc:docMk/>
+            <pc:sldMk cId="1998312597" sldId="2147470631"/>
+            <ac:picMk id="56" creationId="{39EC1738-94C4-261A-13B0-77B2FC101C46}"/>
+          </ac:picMkLst>
+        </pc:picChg>
+        <pc:picChg chg="mod">
+          <ac:chgData name="Sushil Soni, Vodafone" userId="42f61249-e00d-4778-bd06-353e57e7c4e6" providerId="ADAL" clId="{EA7ACA62-6246-40AD-896F-A77B8CEAA7F1}" dt="2026-02-26T11:18:09.300" v="2706" actId="1037"/>
+          <ac:picMkLst>
+            <pc:docMk/>
+            <pc:sldMk cId="1998312597" sldId="2147470631"/>
+            <ac:picMk id="57" creationId="{C98A7ACA-04F0-D51A-BCA2-0E986B175C5B}"/>
+          </ac:picMkLst>
+        </pc:picChg>
+        <pc:picChg chg="del">
+          <ac:chgData name="Sushil Soni, Vodafone" userId="42f61249-e00d-4778-bd06-353e57e7c4e6" providerId="ADAL" clId="{EA7ACA62-6246-40AD-896F-A77B8CEAA7F1}" dt="2026-02-26T11:24:43.584" v="2808" actId="478"/>
+          <ac:picMkLst>
+            <pc:docMk/>
+            <pc:sldMk cId="1998312597" sldId="2147470631"/>
+            <ac:picMk id="67" creationId="{3B31FCE0-D57F-4C1E-AF0F-629C1A81668D}"/>
+          </ac:picMkLst>
+        </pc:picChg>
+        <pc:picChg chg="del">
+          <ac:chgData name="Sushil Soni, Vodafone" userId="42f61249-e00d-4778-bd06-353e57e7c4e6" providerId="ADAL" clId="{EA7ACA62-6246-40AD-896F-A77B8CEAA7F1}" dt="2026-02-26T11:24:35.432" v="2805" actId="478"/>
+          <ac:picMkLst>
+            <pc:docMk/>
+            <pc:sldMk cId="1998312597" sldId="2147470631"/>
+            <ac:picMk id="68" creationId="{E435FA6D-F0A1-2DFF-F1C0-647351C92614}"/>
+          </ac:picMkLst>
+        </pc:picChg>
+        <pc:picChg chg="mod">
+          <ac:chgData name="Sushil Soni, Vodafone" userId="42f61249-e00d-4778-bd06-353e57e7c4e6" providerId="ADAL" clId="{EA7ACA62-6246-40AD-896F-A77B8CEAA7F1}" dt="2026-02-26T11:18:19.170" v="2707"/>
+          <ac:picMkLst>
+            <pc:docMk/>
+            <pc:sldMk cId="1998312597" sldId="2147470631"/>
+            <ac:picMk id="98" creationId="{1B52BF45-2D4A-EA83-5222-26265453BB95}"/>
+          </ac:picMkLst>
+        </pc:picChg>
+        <pc:picChg chg="add mod">
+          <ac:chgData name="Sushil Soni, Vodafone" userId="42f61249-e00d-4778-bd06-353e57e7c4e6" providerId="ADAL" clId="{EA7ACA62-6246-40AD-896F-A77B8CEAA7F1}" dt="2026-02-26T11:18:27.034" v="2748" actId="1037"/>
+          <ac:picMkLst>
+            <pc:docMk/>
+            <pc:sldMk cId="1998312597" sldId="2147470631"/>
+            <ac:picMk id="101" creationId="{7F2A7ED6-BA31-F0A5-407E-174777C9EC83}"/>
+          </ac:picMkLst>
+        </pc:picChg>
+        <pc:picChg chg="add del mod">
+          <ac:chgData name="Sushil Soni, Vodafone" userId="42f61249-e00d-4778-bd06-353e57e7c4e6" providerId="ADAL" clId="{EA7ACA62-6246-40AD-896F-A77B8CEAA7F1}" dt="2026-02-26T11:24:58.268" v="2811" actId="478"/>
+          <ac:picMkLst>
+            <pc:docMk/>
+            <pc:sldMk cId="1998312597" sldId="2147470631"/>
+            <ac:picMk id="118" creationId="{31585ED5-EDD0-041E-2C2D-45CB09769901}"/>
+          </ac:picMkLst>
+        </pc:picChg>
+        <pc:picChg chg="add mod">
+          <ac:chgData name="Sushil Soni, Vodafone" userId="42f61249-e00d-4778-bd06-353e57e7c4e6" providerId="ADAL" clId="{EA7ACA62-6246-40AD-896F-A77B8CEAA7F1}" dt="2026-02-26T11:24:30.870" v="2804" actId="1076"/>
+          <ac:picMkLst>
+            <pc:docMk/>
+            <pc:sldMk cId="1998312597" sldId="2147470631"/>
+            <ac:picMk id="124" creationId="{3DBC2700-64AC-4F01-58C6-617058A56D13}"/>
+          </ac:picMkLst>
+        </pc:picChg>
+        <pc:picChg chg="add mod">
+          <ac:chgData name="Sushil Soni, Vodafone" userId="42f61249-e00d-4778-bd06-353e57e7c4e6" providerId="ADAL" clId="{EA7ACA62-6246-40AD-896F-A77B8CEAA7F1}" dt="2026-02-26T11:24:39.948" v="2807" actId="1076"/>
+          <ac:picMkLst>
+            <pc:docMk/>
+            <pc:sldMk cId="1998312597" sldId="2147470631"/>
+            <ac:picMk id="126" creationId="{479033F4-6384-EE4C-47CB-FEE5C404901C}"/>
+          </ac:picMkLst>
+        </pc:picChg>
+        <pc:picChg chg="add mod">
+          <ac:chgData name="Sushil Soni, Vodafone" userId="42f61249-e00d-4778-bd06-353e57e7c4e6" providerId="ADAL" clId="{EA7ACA62-6246-40AD-896F-A77B8CEAA7F1}" dt="2026-02-26T11:25:05.440" v="2812" actId="1076"/>
+          <ac:picMkLst>
+            <pc:docMk/>
+            <pc:sldMk cId="1998312597" sldId="2147470631"/>
+            <ac:picMk id="128" creationId="{707B8A71-12EB-18BE-5EEE-6BFE69E27C73}"/>
+          </ac:picMkLst>
+        </pc:picChg>
+        <pc:cxnChg chg="mod">
+          <ac:chgData name="Sushil Soni, Vodafone" userId="42f61249-e00d-4778-bd06-353e57e7c4e6" providerId="ADAL" clId="{EA7ACA62-6246-40AD-896F-A77B8CEAA7F1}" dt="2026-02-26T11:20:37.770" v="2793" actId="14100"/>
+          <ac:cxnSpMkLst>
+            <pc:docMk/>
+            <pc:sldMk cId="1998312597" sldId="2147470631"/>
+            <ac:cxnSpMk id="59" creationId="{083279B5-E959-75F8-CBBD-AF49C9629154}"/>
+          </ac:cxnSpMkLst>
+        </pc:cxnChg>
+        <pc:cxnChg chg="mod">
+          <ac:chgData name="Sushil Soni, Vodafone" userId="42f61249-e00d-4778-bd06-353e57e7c4e6" providerId="ADAL" clId="{EA7ACA62-6246-40AD-896F-A77B8CEAA7F1}" dt="2026-02-26T11:20:44.351" v="2794" actId="14100"/>
+          <ac:cxnSpMkLst>
+            <pc:docMk/>
+            <pc:sldMk cId="1998312597" sldId="2147470631"/>
+            <ac:cxnSpMk id="66" creationId="{84CD597B-A19A-B634-7F2D-9403C242FF37}"/>
+          </ac:cxnSpMkLst>
+        </pc:cxnChg>
+        <pc:cxnChg chg="add del mod">
+          <ac:chgData name="Sushil Soni, Vodafone" userId="42f61249-e00d-4778-bd06-353e57e7c4e6" providerId="ADAL" clId="{EA7ACA62-6246-40AD-896F-A77B8CEAA7F1}" dt="2026-02-26T11:20:32.637" v="2792" actId="478"/>
+          <ac:cxnSpMkLst>
+            <pc:docMk/>
+            <pc:sldMk cId="1998312597" sldId="2147470631"/>
+            <ac:cxnSpMk id="104" creationId="{6B5C3881-FE78-47BE-106F-C479935F97FD}"/>
+          </ac:cxnSpMkLst>
+        </pc:cxnChg>
+        <pc:cxnChg chg="add mod">
+          <ac:chgData name="Sushil Soni, Vodafone" userId="42f61249-e00d-4778-bd06-353e57e7c4e6" providerId="ADAL" clId="{EA7ACA62-6246-40AD-896F-A77B8CEAA7F1}" dt="2026-02-26T11:21:07.981" v="2800" actId="14100"/>
+          <ac:cxnSpMkLst>
+            <pc:docMk/>
+            <pc:sldMk cId="1998312597" sldId="2147470631"/>
+            <ac:cxnSpMk id="115" creationId="{147CF99B-6597-C66D-62C5-4667B41FB411}"/>
+          </ac:cxnSpMkLst>
+        </pc:cxnChg>
+      </pc:sldChg>
+      <pc:sldChg chg="addSp delSp modSp new del mod">
+        <pc:chgData name="Sushil Soni, Vodafone" userId="42f61249-e00d-4778-bd06-353e57e7c4e6" providerId="ADAL" clId="{EA7ACA62-6246-40AD-896F-A77B8CEAA7F1}" dt="2026-02-26T11:59:02.290" v="2966" actId="2696"/>
+        <pc:sldMkLst>
+          <pc:docMk/>
+          <pc:sldMk cId="4234125465" sldId="2147470632"/>
+        </pc:sldMkLst>
+        <pc:spChg chg="del">
+          <ac:chgData name="Sushil Soni, Vodafone" userId="42f61249-e00d-4778-bd06-353e57e7c4e6" providerId="ADAL" clId="{EA7ACA62-6246-40AD-896F-A77B8CEAA7F1}" dt="2026-02-26T11:26:52.078" v="2828" actId="478"/>
+          <ac:spMkLst>
+            <pc:docMk/>
+            <pc:sldMk cId="4234125465" sldId="2147470632"/>
+            <ac:spMk id="2" creationId="{7F04AA08-5002-CCF4-6B19-A6ACAFB42861}"/>
+          </ac:spMkLst>
+        </pc:spChg>
+        <pc:spChg chg="del">
+          <ac:chgData name="Sushil Soni, Vodafone" userId="42f61249-e00d-4778-bd06-353e57e7c4e6" providerId="ADAL" clId="{EA7ACA62-6246-40AD-896F-A77B8CEAA7F1}" dt="2026-02-26T10:16:46.164" v="2281" actId="478"/>
+          <ac:spMkLst>
+            <pc:docMk/>
+            <pc:sldMk cId="4234125465" sldId="2147470632"/>
+            <ac:spMk id="3" creationId="{1848E58D-F7C3-0614-AEC5-E1094B46E28E}"/>
+          </ac:spMkLst>
+        </pc:spChg>
+        <pc:spChg chg="del">
+          <ac:chgData name="Sushil Soni, Vodafone" userId="42f61249-e00d-4778-bd06-353e57e7c4e6" providerId="ADAL" clId="{EA7ACA62-6246-40AD-896F-A77B8CEAA7F1}" dt="2026-02-26T11:25:55.804" v="2815" actId="478"/>
+          <ac:spMkLst>
+            <pc:docMk/>
+            <pc:sldMk cId="4234125465" sldId="2147470632"/>
+            <ac:spMk id="4" creationId="{35CBC5BB-D048-BA85-BDCD-D0C08405120B}"/>
+          </ac:spMkLst>
+        </pc:spChg>
+        <pc:spChg chg="add del mod">
+          <ac:chgData name="Sushil Soni, Vodafone" userId="42f61249-e00d-4778-bd06-353e57e7c4e6" providerId="ADAL" clId="{EA7ACA62-6246-40AD-896F-A77B8CEAA7F1}" dt="2026-02-26T11:58:25.023" v="2961" actId="478"/>
+          <ac:spMkLst>
+            <pc:docMk/>
+            <pc:sldMk cId="4234125465" sldId="2147470632"/>
+            <ac:spMk id="9" creationId="{5AB848EE-488C-E400-F2B3-1EB26C716E9E}"/>
+          </ac:spMkLst>
+        </pc:spChg>
+        <pc:spChg chg="add del mod">
+          <ac:chgData name="Sushil Soni, Vodafone" userId="42f61249-e00d-4778-bd06-353e57e7c4e6" providerId="ADAL" clId="{EA7ACA62-6246-40AD-896F-A77B8CEAA7F1}" dt="2026-02-26T11:58:25.023" v="2961" actId="478"/>
+          <ac:spMkLst>
+            <pc:docMk/>
+            <pc:sldMk cId="4234125465" sldId="2147470632"/>
+            <ac:spMk id="10" creationId="{F0742EE9-B16D-52DC-B2DA-6435E3D455E1}"/>
+          </ac:spMkLst>
+        </pc:spChg>
+        <pc:spChg chg="add del mod">
+          <ac:chgData name="Sushil Soni, Vodafone" userId="42f61249-e00d-4778-bd06-353e57e7c4e6" providerId="ADAL" clId="{EA7ACA62-6246-40AD-896F-A77B8CEAA7F1}" dt="2026-02-26T11:58:27.089" v="2962" actId="478"/>
+          <ac:spMkLst>
+            <pc:docMk/>
+            <pc:sldMk cId="4234125465" sldId="2147470632"/>
+            <ac:spMk id="11" creationId="{4AA7A625-2C88-B9AE-A83D-0DADA6DC06DB}"/>
+          </ac:spMkLst>
+        </pc:spChg>
+        <pc:picChg chg="add del mod">
+          <ac:chgData name="Sushil Soni, Vodafone" userId="42f61249-e00d-4778-bd06-353e57e7c4e6" providerId="ADAL" clId="{EA7ACA62-6246-40AD-896F-A77B8CEAA7F1}" dt="2026-02-26T11:25:57.836" v="2816" actId="478"/>
+          <ac:picMkLst>
+            <pc:docMk/>
+            <pc:sldMk cId="4234125465" sldId="2147470632"/>
+            <ac:picMk id="6" creationId="{C765F4D1-03C7-2D20-87AF-D7376C6606F1}"/>
+          </ac:picMkLst>
+        </pc:picChg>
+        <pc:picChg chg="add del mod">
+          <ac:chgData name="Sushil Soni, Vodafone" userId="42f61249-e00d-4778-bd06-353e57e7c4e6" providerId="ADAL" clId="{EA7ACA62-6246-40AD-896F-A77B8CEAA7F1}" dt="2026-02-26T11:58:25.023" v="2961" actId="478"/>
+          <ac:picMkLst>
+            <pc:docMk/>
+            <pc:sldMk cId="4234125465" sldId="2147470632"/>
+            <ac:picMk id="8" creationId="{F02C452F-B351-D1A4-A221-1BF07832639C}"/>
+          </ac:picMkLst>
+        </pc:picChg>
       </pc:sldChg>
     </pc:docChg>
   </pc:docChgLst>
@@ -8358,50 +8868,71 @@
         </p:nvSpPr>
         <p:spPr>
           <a:xfrm>
-            <a:off x="838200" y="833377"/>
-            <a:ext cx="10515600" cy="2372753"/>
+            <a:off x="838200" y="1446835"/>
+            <a:ext cx="10515600" cy="4757195"/>
           </a:xfrm>
         </p:spPr>
         <p:txBody>
           <a:bodyPr/>
           <a:lstStyle/>
           <a:p>
-            <a:endParaRPr lang="en-US" dirty="0"/>
-          </a:p>
-          <a:p>
             <a:r>
               <a:rPr lang="en-US" dirty="0"/>
-              <a:t>.Currently incremental changes like Azure Firewall Rules, VNET </a:t>
+              <a:t>ALZ From Networks and Security Perspective</a:t>
             </a:r>
-            <a:r>
-              <a:rPr lang="en-US" dirty="0" err="1"/>
-              <a:t>Peerings</a:t>
-            </a:r>
+          </a:p>
+          <a:p>
+            <a:endParaRPr lang="en-US" dirty="0"/>
+          </a:p>
+          <a:p>
             <a:r>
               <a:rPr lang="en-US" dirty="0"/>
-              <a:t> and Spokes UDRs are being implemented outside of Terraform.</a:t>
+              <a:t>Deployment of subset of ALZ</a:t>
             </a:r>
           </a:p>
           <a:p>
+            <a:endParaRPr lang="en-US" dirty="0"/>
+          </a:p>
+          <a:p>
+            <a:pPr marL="736593" lvl="1" indent="-457200"/>
             <a:r>
               <a:rPr lang="en-US" dirty="0"/>
-              <a:t>No centralized management of these networking attributes</a:t>
+              <a:t>Terraform code explanation.</a:t>
             </a:r>
           </a:p>
           <a:p>
+            <a:pPr marL="736593" lvl="1" indent="-457200"/>
             <a:r>
               <a:rPr lang="en-US" dirty="0"/>
-              <a:t>In case of disaster- no databases of these attributes to be replicated in DR region.</a:t>
+              <a:t>Network connectivity with on-prem data centers.</a:t>
             </a:r>
           </a:p>
           <a:p>
-            <a:pPr marL="0" indent="0">
+            <a:endParaRPr lang="en-US" dirty="0"/>
+          </a:p>
+          <a:p>
+            <a:r>
+              <a:rPr lang="en-US" dirty="0"/>
+              <a:t>Security policy demo-</a:t>
+            </a:r>
+          </a:p>
+          <a:p>
+            <a:r>
+              <a:rPr lang="en-US" dirty="0"/>
+              <a:t>Benefits with Terraform Deployment</a:t>
+            </a:r>
+          </a:p>
+          <a:p>
+            <a:pPr marL="279393" lvl="1" indent="0">
               <a:buNone/>
             </a:pPr>
-            <a:r>
-              <a:rPr lang="en-US" dirty="0"/>
-              <a:t>.</a:t>
-            </a:r>
+            <a:endParaRPr lang="en-US" dirty="0"/>
+          </a:p>
+          <a:p>
+            <a:pPr marL="457200" indent="-457200">
+              <a:buAutoNum type="arabicPeriod"/>
+            </a:pPr>
+            <a:endParaRPr lang="en-US" dirty="0"/>
           </a:p>
           <a:p>
             <a:endParaRPr lang="en-US" dirty="0"/>
@@ -8443,297 +8974,8 @@
                   <a:schemeClr val="tx1"/>
                 </a:solidFill>
               </a:rPr>
-              <a:t>Problem Statement</a:t>
+              <a:t>Topics Covered</a:t>
             </a:r>
-          </a:p>
-        </p:txBody>
-      </p:sp>
-      <p:sp>
-        <p:nvSpPr>
-          <p:cNvPr id="5" name="Title 3">
-            <a:extLst>
-              <a:ext uri="{FF2B5EF4-FFF2-40B4-BE49-F238E27FC236}">
-                <a16:creationId xmlns:a16="http://schemas.microsoft.com/office/drawing/2014/main" id="{45A820E8-80BB-143E-2AC7-42CB21683752}"/>
-              </a:ext>
-            </a:extLst>
-          </p:cNvPr>
-          <p:cNvSpPr txBox="1">
-            <a:spLocks/>
-          </p:cNvSpPr>
-          <p:nvPr/>
-        </p:nvSpPr>
-        <p:spPr>
-          <a:xfrm>
-            <a:off x="745603" y="3316813"/>
-            <a:ext cx="10515600" cy="850074"/>
-          </a:xfrm>
-          <a:prstGeom prst="rect">
-            <a:avLst/>
-          </a:prstGeom>
-        </p:spPr>
-        <p:txBody>
-          <a:bodyPr vert="horz" lIns="109728" tIns="54864" rIns="109728" bIns="54864" rtlCol="0" anchor="ctr" anchorCtr="0">
-            <a:normAutofit/>
-          </a:bodyPr>
-          <a:lstStyle>
-            <a:lvl1pPr algn="l" defTabSz="1219170" rtl="0" eaLnBrk="1" latinLnBrk="0" hangingPunct="1">
-              <a:lnSpc>
-                <a:spcPct val="80000"/>
-              </a:lnSpc>
-              <a:spcBef>
-                <a:spcPct val="0"/>
-              </a:spcBef>
-              <a:buNone/>
-              <a:defRPr sz="3200" b="1" kern="1200">
-                <a:solidFill>
-                  <a:schemeClr val="accent6">
-                    <a:lumMod val="75000"/>
-                  </a:schemeClr>
-                </a:solidFill>
-                <a:latin typeface="Vodafone Rg" pitchFamily="34" charset="0"/>
-                <a:ea typeface="+mj-ea"/>
-                <a:cs typeface="+mj-cs"/>
-              </a:defRPr>
-            </a:lvl1pPr>
-          </a:lstStyle>
-          <a:p>
-            <a:r>
-              <a:rPr lang="en-US" dirty="0"/>
-              <a:t> </a:t>
-            </a:r>
-            <a:r>
-              <a:rPr lang="en-US" dirty="0">
-                <a:solidFill>
-                  <a:schemeClr val="tx1"/>
-                </a:solidFill>
-              </a:rPr>
-              <a:t>Solution</a:t>
-            </a:r>
-          </a:p>
-        </p:txBody>
-      </p:sp>
-      <p:sp>
-        <p:nvSpPr>
-          <p:cNvPr id="6" name="Content Placeholder 2">
-            <a:extLst>
-              <a:ext uri="{FF2B5EF4-FFF2-40B4-BE49-F238E27FC236}">
-                <a16:creationId xmlns:a16="http://schemas.microsoft.com/office/drawing/2014/main" id="{5C6AEF61-FB5D-E5ED-3BC5-86997581EEF7}"/>
-              </a:ext>
-            </a:extLst>
-          </p:cNvPr>
-          <p:cNvSpPr txBox="1">
-            <a:spLocks/>
-          </p:cNvSpPr>
-          <p:nvPr/>
-        </p:nvSpPr>
-        <p:spPr>
-          <a:xfrm>
-            <a:off x="930797" y="3935392"/>
-            <a:ext cx="10515600" cy="2249527"/>
-          </a:xfrm>
-          <a:prstGeom prst="rect">
-            <a:avLst/>
-          </a:prstGeom>
-        </p:spPr>
-        <p:txBody>
-          <a:bodyPr vert="horz" lIns="0" tIns="0" rIns="0" bIns="0" rtlCol="0" anchor="t" anchorCtr="0">
-            <a:noAutofit/>
-          </a:bodyPr>
-          <a:lstStyle>
-            <a:lvl1pPr marL="184146" indent="-184146" algn="l" defTabSz="1219170" rtl="0" eaLnBrk="1" latinLnBrk="0" hangingPunct="1">
-              <a:spcBef>
-                <a:spcPts val="0"/>
-              </a:spcBef>
-              <a:spcAft>
-                <a:spcPts val="800"/>
-              </a:spcAft>
-              <a:buClr>
-                <a:schemeClr val="accent1"/>
-              </a:buClr>
-              <a:buFont typeface="Arial" pitchFamily="34" charset="0"/>
-              <a:buChar char="•"/>
-              <a:defRPr sz="2400" kern="1200">
-                <a:solidFill>
-                  <a:schemeClr val="tx1"/>
-                </a:solidFill>
-                <a:latin typeface="Vodafone Rg" pitchFamily="34" charset="0"/>
-                <a:ea typeface="+mn-ea"/>
-                <a:cs typeface="+mn-cs"/>
-              </a:defRPr>
-            </a:lvl1pPr>
-            <a:lvl2pPr marL="463539" indent="-196846" algn="l" defTabSz="1219170" rtl="0" eaLnBrk="1" latinLnBrk="0" hangingPunct="1">
-              <a:spcBef>
-                <a:spcPts val="0"/>
-              </a:spcBef>
-              <a:spcAft>
-                <a:spcPts val="400"/>
-              </a:spcAft>
-              <a:buClr>
-                <a:schemeClr val="accent1"/>
-              </a:buClr>
-              <a:buFont typeface="Calibri" pitchFamily="34" charset="0"/>
-              <a:buChar char="–"/>
-              <a:defRPr sz="1867" kern="1200">
-                <a:solidFill>
-                  <a:schemeClr val="tx1"/>
-                </a:solidFill>
-                <a:latin typeface="Vodafone Rg" pitchFamily="34" charset="0"/>
-                <a:ea typeface="+mn-ea"/>
-                <a:cs typeface="+mn-cs"/>
-              </a:defRPr>
-            </a:lvl2pPr>
-            <a:lvl3pPr marL="514338" indent="194728" algn="l" defTabSz="1219170" rtl="0" eaLnBrk="1" latinLnBrk="0" hangingPunct="1">
-              <a:spcBef>
-                <a:spcPts val="0"/>
-              </a:spcBef>
-              <a:spcAft>
-                <a:spcPts val="400"/>
-              </a:spcAft>
-              <a:buClr>
-                <a:schemeClr val="accent1"/>
-              </a:buClr>
-              <a:buFont typeface="Calibri" pitchFamily="34" charset="0"/>
-              <a:buChar char="–"/>
-              <a:defRPr sz="1867" kern="1200">
-                <a:solidFill>
-                  <a:schemeClr val="tx1"/>
-                </a:solidFill>
-                <a:latin typeface="Vodafone Rg" pitchFamily="34" charset="0"/>
-                <a:ea typeface="+mn-ea"/>
-                <a:cs typeface="+mn-cs"/>
-              </a:defRPr>
-            </a:lvl3pPr>
-            <a:lvl4pPr marL="956709" indent="-201079" algn="l" defTabSz="1219170" rtl="0" eaLnBrk="1" latinLnBrk="0" hangingPunct="1">
-              <a:spcBef>
-                <a:spcPct val="20000"/>
-              </a:spcBef>
-              <a:buClr>
-                <a:schemeClr val="accent1"/>
-              </a:buClr>
-              <a:buFont typeface="Calibri" pitchFamily="34" charset="0"/>
-              <a:buChar char="–"/>
-              <a:defRPr sz="1600" kern="1200">
-                <a:solidFill>
-                  <a:schemeClr val="tx1"/>
-                </a:solidFill>
-                <a:latin typeface="+mn-lt"/>
-                <a:ea typeface="+mn-ea"/>
-                <a:cs typeface="+mn-cs"/>
-              </a:defRPr>
-            </a:lvl4pPr>
-            <a:lvl5pPr marL="1219170" indent="-215895" algn="l" defTabSz="1219170" rtl="0" eaLnBrk="1" latinLnBrk="0" hangingPunct="1">
-              <a:spcBef>
-                <a:spcPct val="20000"/>
-              </a:spcBef>
-              <a:buClr>
-                <a:schemeClr val="accent1"/>
-              </a:buClr>
-              <a:buFont typeface="Calibri" pitchFamily="34" charset="0"/>
-              <a:buChar char="–"/>
-              <a:defRPr sz="1600" kern="1200" baseline="0">
-                <a:solidFill>
-                  <a:schemeClr val="tx1"/>
-                </a:solidFill>
-                <a:latin typeface="+mn-lt"/>
-                <a:ea typeface="+mn-ea"/>
-                <a:cs typeface="+mn-cs"/>
-              </a:defRPr>
-            </a:lvl5pPr>
-            <a:lvl6pPr marL="3352716" indent="-304792" algn="l" defTabSz="1219170" rtl="0" eaLnBrk="1" latinLnBrk="0" hangingPunct="1">
-              <a:spcBef>
-                <a:spcPct val="20000"/>
-              </a:spcBef>
-              <a:buFont typeface="Arial" pitchFamily="34" charset="0"/>
-              <a:buChar char="•"/>
-              <a:defRPr sz="2667" kern="1200">
-                <a:solidFill>
-                  <a:schemeClr val="tx1"/>
-                </a:solidFill>
-                <a:latin typeface="+mn-lt"/>
-                <a:ea typeface="+mn-ea"/>
-                <a:cs typeface="+mn-cs"/>
-              </a:defRPr>
-            </a:lvl6pPr>
-            <a:lvl7pPr marL="3962301" indent="-304792" algn="l" defTabSz="1219170" rtl="0" eaLnBrk="1" latinLnBrk="0" hangingPunct="1">
-              <a:spcBef>
-                <a:spcPct val="20000"/>
-              </a:spcBef>
-              <a:buFont typeface="Arial" pitchFamily="34" charset="0"/>
-              <a:buChar char="•"/>
-              <a:defRPr sz="2667" kern="1200">
-                <a:solidFill>
-                  <a:schemeClr val="tx1"/>
-                </a:solidFill>
-                <a:latin typeface="+mn-lt"/>
-                <a:ea typeface="+mn-ea"/>
-                <a:cs typeface="+mn-cs"/>
-              </a:defRPr>
-            </a:lvl7pPr>
-            <a:lvl8pPr marL="4571886" indent="-304792" algn="l" defTabSz="1219170" rtl="0" eaLnBrk="1" latinLnBrk="0" hangingPunct="1">
-              <a:spcBef>
-                <a:spcPct val="20000"/>
-              </a:spcBef>
-              <a:buFont typeface="Arial" pitchFamily="34" charset="0"/>
-              <a:buChar char="•"/>
-              <a:defRPr sz="2667" kern="1200">
-                <a:solidFill>
-                  <a:schemeClr val="tx1"/>
-                </a:solidFill>
-                <a:latin typeface="+mn-lt"/>
-                <a:ea typeface="+mn-ea"/>
-                <a:cs typeface="+mn-cs"/>
-              </a:defRPr>
-            </a:lvl8pPr>
-            <a:lvl9pPr marL="5181470" indent="-304792" algn="l" defTabSz="1219170" rtl="0" eaLnBrk="1" latinLnBrk="0" hangingPunct="1">
-              <a:spcBef>
-                <a:spcPct val="20000"/>
-              </a:spcBef>
-              <a:buFont typeface="Arial" pitchFamily="34" charset="0"/>
-              <a:buChar char="•"/>
-              <a:defRPr sz="2667" kern="1200">
-                <a:solidFill>
-                  <a:schemeClr val="tx1"/>
-                </a:solidFill>
-                <a:latin typeface="+mn-lt"/>
-                <a:ea typeface="+mn-ea"/>
-                <a:cs typeface="+mn-cs"/>
-              </a:defRPr>
-            </a:lvl9pPr>
-          </a:lstStyle>
-          <a:p>
-            <a:endParaRPr lang="en-US" dirty="0"/>
-          </a:p>
-          <a:p>
-            <a:r>
-              <a:rPr lang="en-US" dirty="0"/>
-              <a:t>. Henceforth Need to start automate UDRs and firewall rules via  </a:t>
-            </a:r>
-            <a:r>
-              <a:rPr lang="en-US" dirty="0" err="1"/>
-              <a:t>IaC</a:t>
-            </a:r>
-            <a:r>
-              <a:rPr lang="en-US" dirty="0"/>
-              <a:t> Terraform.</a:t>
-            </a:r>
-          </a:p>
-          <a:p>
-            <a:r>
-              <a:rPr lang="en-US" dirty="0"/>
-              <a:t>Need to do Terraform Import of existing firewall rules/policies and UDRs</a:t>
-            </a:r>
-          </a:p>
-          <a:p>
-            <a:r>
-              <a:rPr lang="en-US" dirty="0"/>
-              <a:t>Need Develop DR pipelines</a:t>
-            </a:r>
-          </a:p>
-          <a:p>
-            <a:endParaRPr lang="en-US" dirty="0"/>
-          </a:p>
-          <a:p>
-            <a:endParaRPr lang="en-US" dirty="0"/>
           </a:p>
         </p:txBody>
       </p:sp>
@@ -8755,7 +8997,13 @@
   <p:cSld>
     <p:spTree>
       <p:nvGrpSpPr>
-        <p:cNvPr id="1" name=""/>
+        <p:cNvPr id="1" name="">
+          <a:extLst>
+            <a:ext uri="{FF2B5EF4-FFF2-40B4-BE49-F238E27FC236}">
+              <a16:creationId xmlns:a16="http://schemas.microsoft.com/office/drawing/2014/main" id="{4F6107CA-CE2A-495C-E08E-0C2E24BE4586}"/>
+            </a:ext>
+          </a:extLst>
+        </p:cNvPr>
         <p:cNvGrpSpPr/>
         <p:nvPr/>
       </p:nvGrpSpPr>
@@ -8769,10 +9017,79 @@
       </p:grpSpPr>
       <p:sp>
         <p:nvSpPr>
-          <p:cNvPr id="4" name="Title 3">
+          <p:cNvPr id="44" name="Arrow: Right 43">
             <a:extLst>
               <a:ext uri="{FF2B5EF4-FFF2-40B4-BE49-F238E27FC236}">
-                <a16:creationId xmlns:a16="http://schemas.microsoft.com/office/drawing/2014/main" id="{F5886D5A-312D-0DDC-BC99-339B19F1CA3F}"/>
+                <a16:creationId xmlns:a16="http://schemas.microsoft.com/office/drawing/2014/main" id="{0261EAEB-C81A-A42E-593C-EBCB2367AD85}"/>
+              </a:ext>
+            </a:extLst>
+          </p:cNvPr>
+          <p:cNvSpPr/>
+          <p:nvPr/>
+        </p:nvSpPr>
+        <p:spPr>
+          <a:xfrm>
+            <a:off x="3763887" y="4936005"/>
+            <a:ext cx="747299" cy="340015"/>
+          </a:xfrm>
+          <a:prstGeom prst="rightArrow">
+            <a:avLst/>
+          </a:prstGeom>
+          <a:solidFill>
+            <a:srgbClr val="0070C0"/>
+          </a:solidFill>
+          <a:ln w="25400" cap="flat" cmpd="sng" algn="ctr">
+            <a:noFill/>
+            <a:prstDash val="solid"/>
+          </a:ln>
+          <a:effectLst/>
+        </p:spPr>
+        <p:style>
+          <a:lnRef idx="2">
+            <a:scrgbClr r="0" g="0" b="0"/>
+          </a:lnRef>
+          <a:fillRef idx="1">
+            <a:scrgbClr r="0" g="0" b="0"/>
+          </a:fillRef>
+          <a:effectRef idx="0">
+            <a:scrgbClr r="0" g="0" b="0"/>
+          </a:effectRef>
+          <a:fontRef idx="minor">
+            <a:schemeClr val="lt1"/>
+          </a:fontRef>
+        </p:style>
+        <p:txBody>
+          <a:bodyPr spcFirstLastPara="0" vert="horz" wrap="square" lIns="8467" tIns="8467" rIns="8467" bIns="8467" numCol="1" spcCol="1270" rtlCol="0" anchor="ctr" anchorCtr="0">
+            <a:noAutofit/>
+          </a:bodyPr>
+          <a:lstStyle/>
+          <a:p>
+            <a:pPr algn="ctr" defTabSz="592652">
+              <a:lnSpc>
+                <a:spcPct val="90000"/>
+              </a:lnSpc>
+              <a:spcBef>
+                <a:spcPct val="0"/>
+              </a:spcBef>
+              <a:spcAft>
+                <a:spcPct val="35000"/>
+              </a:spcAft>
+            </a:pPr>
+            <a:endParaRPr lang="en-US" sz="1333" dirty="0">
+              <a:solidFill>
+                <a:srgbClr val="34342B"/>
+              </a:solidFill>
+              <a:latin typeface="Vodafone Rg" pitchFamily="34" charset="0"/>
+            </a:endParaRPr>
+          </a:p>
+        </p:txBody>
+      </p:sp>
+      <p:sp>
+        <p:nvSpPr>
+          <p:cNvPr id="2" name="Title 1">
+            <a:extLst>
+              <a:ext uri="{FF2B5EF4-FFF2-40B4-BE49-F238E27FC236}">
+                <a16:creationId xmlns:a16="http://schemas.microsoft.com/office/drawing/2014/main" id="{A5D333CD-28EB-28CE-EE4F-6CDECCD3EC3D}"/>
               </a:ext>
             </a:extLst>
           </p:cNvPr>
@@ -8785,8 +9102,8 @@
         </p:nvSpPr>
         <p:spPr>
           <a:xfrm>
-            <a:off x="92597" y="227341"/>
-            <a:ext cx="11887199" cy="609378"/>
+            <a:off x="334434" y="274638"/>
+            <a:ext cx="11523133" cy="329543"/>
           </a:xfrm>
         </p:spPr>
         <p:txBody>
@@ -8794,52 +9111,1231 @@
           <a:lstStyle/>
           <a:p>
             <a:r>
-              <a:rPr lang="en-US" dirty="0">
-                <a:solidFill>
-                  <a:schemeClr val="tx1"/>
-                </a:solidFill>
-              </a:rPr>
-              <a:t>Existing DCC ALZ- Network Prospective</a:t>
+              <a:rPr lang="en-GB" sz="2667" dirty="0"/>
+              <a:t>E2E Landing Zone Provisioning </a:t>
             </a:r>
+            <a:endParaRPr lang="en-US" sz="2667" dirty="0"/>
           </a:p>
         </p:txBody>
       </p:sp>
       <p:pic>
         <p:nvPicPr>
-          <p:cNvPr id="10" name="Content Placeholder 9">
+          <p:cNvPr id="16" name="Graphic 15" descr="Shield Tick outline">
             <a:extLst>
               <a:ext uri="{FF2B5EF4-FFF2-40B4-BE49-F238E27FC236}">
-                <a16:creationId xmlns:a16="http://schemas.microsoft.com/office/drawing/2014/main" id="{85F762E6-79A9-1F90-10F4-FA5BBB7FC8F4}"/>
+                <a16:creationId xmlns:a16="http://schemas.microsoft.com/office/drawing/2014/main" id="{CD4F4823-A74D-0D93-DF7C-6247172E075E}"/>
               </a:ext>
             </a:extLst>
           </p:cNvPr>
           <p:cNvPicPr>
-            <a:picLocks noGrp="1" noChangeAspect="1"/>
+            <a:picLocks noChangeAspect="1"/>
           </p:cNvPicPr>
-          <p:nvPr>
-            <p:ph idx="1"/>
-          </p:nvPr>
+          <p:nvPr/>
         </p:nvPicPr>
         <p:blipFill>
-          <a:blip r:embed="rId2"/>
+          <a:blip r:embed="rId2">
+            <a:extLst>
+              <a:ext uri="{96DAC541-7B7A-43D3-8B79-37D633B846F1}">
+                <asvg:svgBlip xmlns:asvg="http://schemas.microsoft.com/office/drawing/2016/SVG/main" r:embed="rId3"/>
+              </a:ext>
+            </a:extLst>
+          </a:blip>
           <a:stretch>
             <a:fillRect/>
           </a:stretch>
         </p:blipFill>
         <p:spPr>
           <a:xfrm>
-            <a:off x="0" y="1041722"/>
-            <a:ext cx="11979796" cy="5588937"/>
+            <a:off x="5614229" y="4367518"/>
+            <a:ext cx="1084175" cy="1136975"/>
           </a:xfrm>
           <a:prstGeom prst="rect">
             <a:avLst/>
           </a:prstGeom>
         </p:spPr>
       </p:pic>
+      <p:sp>
+        <p:nvSpPr>
+          <p:cNvPr id="3" name="Rectangle: Rounded Corners 2">
+            <a:extLst>
+              <a:ext uri="{FF2B5EF4-FFF2-40B4-BE49-F238E27FC236}">
+                <a16:creationId xmlns:a16="http://schemas.microsoft.com/office/drawing/2014/main" id="{0D93DBF0-B164-F56A-7828-972131196791}"/>
+              </a:ext>
+            </a:extLst>
+          </p:cNvPr>
+          <p:cNvSpPr/>
+          <p:nvPr/>
+        </p:nvSpPr>
+        <p:spPr>
+          <a:xfrm>
+            <a:off x="8564643" y="4170311"/>
+            <a:ext cx="3473708" cy="1783637"/>
+          </a:xfrm>
+          <a:prstGeom prst="roundRect">
+            <a:avLst/>
+          </a:prstGeom>
+          <a:noFill/>
+          <a:ln w="57150" cap="flat" cmpd="sng" algn="ctr">
+            <a:solidFill>
+              <a:srgbClr val="0070C0"/>
+            </a:solidFill>
+            <a:prstDash val="solid"/>
+          </a:ln>
+          <a:effectLst/>
+        </p:spPr>
+        <p:style>
+          <a:lnRef idx="2">
+            <a:scrgbClr r="0" g="0" b="0"/>
+          </a:lnRef>
+          <a:fillRef idx="1">
+            <a:scrgbClr r="0" g="0" b="0"/>
+          </a:fillRef>
+          <a:effectRef idx="0">
+            <a:scrgbClr r="0" g="0" b="0"/>
+          </a:effectRef>
+          <a:fontRef idx="minor">
+            <a:schemeClr val="lt1"/>
+          </a:fontRef>
+        </p:style>
+        <p:txBody>
+          <a:bodyPr spcFirstLastPara="0" vert="horz" wrap="square" lIns="8467" tIns="8467" rIns="8467" bIns="8467" numCol="1" spcCol="1270" rtlCol="0" anchor="ctr" anchorCtr="0">
+            <a:noAutofit/>
+          </a:bodyPr>
+          <a:lstStyle/>
+          <a:p>
+            <a:pPr algn="ctr" defTabSz="592652">
+              <a:lnSpc>
+                <a:spcPct val="90000"/>
+              </a:lnSpc>
+              <a:spcBef>
+                <a:spcPct val="0"/>
+              </a:spcBef>
+              <a:spcAft>
+                <a:spcPct val="35000"/>
+              </a:spcAft>
+            </a:pPr>
+            <a:endParaRPr lang="en-US" sz="1333" dirty="0">
+              <a:solidFill>
+                <a:srgbClr val="34342B"/>
+              </a:solidFill>
+              <a:latin typeface="Vodafone Rg" pitchFamily="34" charset="0"/>
+            </a:endParaRPr>
+          </a:p>
+        </p:txBody>
+      </p:sp>
+      <p:pic>
+        <p:nvPicPr>
+          <p:cNvPr id="5" name="Graphic 4" descr="Advertising with solid fill">
+            <a:extLst>
+              <a:ext uri="{FF2B5EF4-FFF2-40B4-BE49-F238E27FC236}">
+                <a16:creationId xmlns:a16="http://schemas.microsoft.com/office/drawing/2014/main" id="{3791A827-2765-2F43-53CF-1FA46AA85B7F}"/>
+              </a:ext>
+            </a:extLst>
+          </p:cNvPr>
+          <p:cNvPicPr>
+            <a:picLocks noChangeAspect="1"/>
+          </p:cNvPicPr>
+          <p:nvPr/>
+        </p:nvPicPr>
+        <p:blipFill>
+          <a:blip r:embed="rId4">
+            <a:extLst>
+              <a:ext uri="{96DAC541-7B7A-43D3-8B79-37D633B846F1}">
+                <asvg:svgBlip xmlns:asvg="http://schemas.microsoft.com/office/drawing/2016/SVG/main" r:embed="rId5"/>
+              </a:ext>
+            </a:extLst>
+          </a:blip>
+          <a:stretch>
+            <a:fillRect/>
+          </a:stretch>
+        </p:blipFill>
+        <p:spPr>
+          <a:xfrm>
+            <a:off x="9611900" y="4453365"/>
+            <a:ext cx="1219200" cy="1219200"/>
+          </a:xfrm>
+          <a:prstGeom prst="rect">
+            <a:avLst/>
+          </a:prstGeom>
+        </p:spPr>
+      </p:pic>
+      <p:sp>
+        <p:nvSpPr>
+          <p:cNvPr id="21" name="TextBox 20">
+            <a:extLst>
+              <a:ext uri="{FF2B5EF4-FFF2-40B4-BE49-F238E27FC236}">
+                <a16:creationId xmlns:a16="http://schemas.microsoft.com/office/drawing/2014/main" id="{ADD2E85E-767A-E467-5AF5-40EDBDF9AC12}"/>
+              </a:ext>
+            </a:extLst>
+          </p:cNvPr>
+          <p:cNvSpPr txBox="1"/>
+          <p:nvPr/>
+        </p:nvSpPr>
+        <p:spPr>
+          <a:xfrm>
+            <a:off x="9657154" y="5516911"/>
+            <a:ext cx="2070467" cy="338376"/>
+          </a:xfrm>
+          <a:prstGeom prst="rect">
+            <a:avLst/>
+          </a:prstGeom>
+        </p:spPr>
+        <p:txBody>
+          <a:bodyPr wrap="square" lIns="0" tIns="0" rIns="0" bIns="0" rtlCol="0">
+            <a:noAutofit/>
+          </a:bodyPr>
+          <a:lstStyle/>
+          <a:p>
+            <a:r>
+              <a:rPr lang="en-US" sz="2400" b="1" dirty="0">
+                <a:latin typeface="Vodafone Rg" pitchFamily="34" charset="0"/>
+              </a:rPr>
+              <a:t>Compute</a:t>
+            </a:r>
+          </a:p>
+        </p:txBody>
+      </p:sp>
+      <p:sp>
+        <p:nvSpPr>
+          <p:cNvPr id="22" name="Rectangle: Rounded Corners 21">
+            <a:extLst>
+              <a:ext uri="{FF2B5EF4-FFF2-40B4-BE49-F238E27FC236}">
+                <a16:creationId xmlns:a16="http://schemas.microsoft.com/office/drawing/2014/main" id="{4A415BE3-E5B3-487B-2ABD-7341F59B5231}"/>
+              </a:ext>
+            </a:extLst>
+          </p:cNvPr>
+          <p:cNvSpPr/>
+          <p:nvPr/>
+        </p:nvSpPr>
+        <p:spPr>
+          <a:xfrm>
+            <a:off x="4410453" y="4281842"/>
+            <a:ext cx="3473708" cy="1783637"/>
+          </a:xfrm>
+          <a:prstGeom prst="roundRect">
+            <a:avLst/>
+          </a:prstGeom>
+          <a:noFill/>
+          <a:ln w="57150" cap="flat" cmpd="sng" algn="ctr">
+            <a:solidFill>
+              <a:srgbClr val="0070C0"/>
+            </a:solidFill>
+            <a:prstDash val="solid"/>
+          </a:ln>
+          <a:effectLst/>
+        </p:spPr>
+        <p:style>
+          <a:lnRef idx="2">
+            <a:scrgbClr r="0" g="0" b="0"/>
+          </a:lnRef>
+          <a:fillRef idx="1">
+            <a:scrgbClr r="0" g="0" b="0"/>
+          </a:fillRef>
+          <a:effectRef idx="0">
+            <a:scrgbClr r="0" g="0" b="0"/>
+          </a:effectRef>
+          <a:fontRef idx="minor">
+            <a:schemeClr val="lt1"/>
+          </a:fontRef>
+        </p:style>
+        <p:txBody>
+          <a:bodyPr spcFirstLastPara="0" vert="horz" wrap="square" lIns="8467" tIns="8467" rIns="8467" bIns="8467" numCol="1" spcCol="1270" rtlCol="0" anchor="ctr" anchorCtr="0">
+            <a:noAutofit/>
+          </a:bodyPr>
+          <a:lstStyle/>
+          <a:p>
+            <a:pPr algn="ctr" defTabSz="592652">
+              <a:lnSpc>
+                <a:spcPct val="90000"/>
+              </a:lnSpc>
+              <a:spcBef>
+                <a:spcPct val="0"/>
+              </a:spcBef>
+              <a:spcAft>
+                <a:spcPct val="35000"/>
+              </a:spcAft>
+            </a:pPr>
+            <a:endParaRPr lang="en-US" sz="1333" dirty="0">
+              <a:solidFill>
+                <a:srgbClr val="34342B"/>
+              </a:solidFill>
+              <a:latin typeface="Vodafone Rg" pitchFamily="34" charset="0"/>
+            </a:endParaRPr>
+          </a:p>
+        </p:txBody>
+      </p:sp>
+      <p:sp>
+        <p:nvSpPr>
+          <p:cNvPr id="32" name="TextBox 31">
+            <a:extLst>
+              <a:ext uri="{FF2B5EF4-FFF2-40B4-BE49-F238E27FC236}">
+                <a16:creationId xmlns:a16="http://schemas.microsoft.com/office/drawing/2014/main" id="{1C7521D4-1D27-3EDF-AADD-8DFA1958F7DD}"/>
+              </a:ext>
+            </a:extLst>
+          </p:cNvPr>
+          <p:cNvSpPr txBox="1"/>
+          <p:nvPr/>
+        </p:nvSpPr>
+        <p:spPr>
+          <a:xfrm>
+            <a:off x="5762480" y="5591413"/>
+            <a:ext cx="2070467" cy="338376"/>
+          </a:xfrm>
+          <a:prstGeom prst="rect">
+            <a:avLst/>
+          </a:prstGeom>
+        </p:spPr>
+        <p:txBody>
+          <a:bodyPr wrap="square" lIns="0" tIns="0" rIns="0" bIns="0" rtlCol="0">
+            <a:noAutofit/>
+          </a:bodyPr>
+          <a:lstStyle/>
+          <a:p>
+            <a:r>
+              <a:rPr lang="en-US" sz="2400" b="1" dirty="0">
+                <a:latin typeface="Vodafone Rg" pitchFamily="34" charset="0"/>
+              </a:rPr>
+              <a:t>Policy</a:t>
+            </a:r>
+          </a:p>
+        </p:txBody>
+      </p:sp>
+      <p:sp>
+        <p:nvSpPr>
+          <p:cNvPr id="34" name="Rectangle: Rounded Corners 33">
+            <a:extLst>
+              <a:ext uri="{FF2B5EF4-FFF2-40B4-BE49-F238E27FC236}">
+                <a16:creationId xmlns:a16="http://schemas.microsoft.com/office/drawing/2014/main" id="{FDE6158D-99DB-63F1-8853-E1324911C9D4}"/>
+              </a:ext>
+            </a:extLst>
+          </p:cNvPr>
+          <p:cNvSpPr/>
+          <p:nvPr/>
+        </p:nvSpPr>
+        <p:spPr>
+          <a:xfrm>
+            <a:off x="356598" y="4281842"/>
+            <a:ext cx="3451967" cy="1783637"/>
+          </a:xfrm>
+          <a:prstGeom prst="roundRect">
+            <a:avLst/>
+          </a:prstGeom>
+          <a:noFill/>
+          <a:ln w="57150" cap="flat" cmpd="sng" algn="ctr">
+            <a:solidFill>
+              <a:srgbClr val="0070C0"/>
+            </a:solidFill>
+            <a:prstDash val="solid"/>
+          </a:ln>
+          <a:effectLst/>
+        </p:spPr>
+        <p:style>
+          <a:lnRef idx="2">
+            <a:scrgbClr r="0" g="0" b="0"/>
+          </a:lnRef>
+          <a:fillRef idx="1">
+            <a:scrgbClr r="0" g="0" b="0"/>
+          </a:fillRef>
+          <a:effectRef idx="0">
+            <a:scrgbClr r="0" g="0" b="0"/>
+          </a:effectRef>
+          <a:fontRef idx="minor">
+            <a:schemeClr val="lt1"/>
+          </a:fontRef>
+        </p:style>
+        <p:txBody>
+          <a:bodyPr spcFirstLastPara="0" vert="horz" wrap="square" lIns="8467" tIns="8467" rIns="8467" bIns="8467" numCol="1" spcCol="1270" rtlCol="0" anchor="ctr" anchorCtr="0">
+            <a:noAutofit/>
+          </a:bodyPr>
+          <a:lstStyle/>
+          <a:p>
+            <a:pPr algn="ctr" defTabSz="592652">
+              <a:lnSpc>
+                <a:spcPct val="90000"/>
+              </a:lnSpc>
+              <a:spcBef>
+                <a:spcPct val="0"/>
+              </a:spcBef>
+              <a:spcAft>
+                <a:spcPct val="35000"/>
+              </a:spcAft>
+            </a:pPr>
+            <a:endParaRPr lang="en-US" sz="1333" dirty="0">
+              <a:solidFill>
+                <a:srgbClr val="34342B"/>
+              </a:solidFill>
+              <a:latin typeface="Vodafone Rg" pitchFamily="34" charset="0"/>
+            </a:endParaRPr>
+          </a:p>
+        </p:txBody>
+      </p:sp>
+      <p:sp>
+        <p:nvSpPr>
+          <p:cNvPr id="41" name="TextBox 40">
+            <a:extLst>
+              <a:ext uri="{FF2B5EF4-FFF2-40B4-BE49-F238E27FC236}">
+                <a16:creationId xmlns:a16="http://schemas.microsoft.com/office/drawing/2014/main" id="{C3AAE0E8-4A9C-902B-9CE7-D092465ACECC}"/>
+              </a:ext>
+            </a:extLst>
+          </p:cNvPr>
+          <p:cNvSpPr txBox="1"/>
+          <p:nvPr/>
+        </p:nvSpPr>
+        <p:spPr>
+          <a:xfrm>
+            <a:off x="1369896" y="5550354"/>
+            <a:ext cx="2070467" cy="338376"/>
+          </a:xfrm>
+          <a:prstGeom prst="rect">
+            <a:avLst/>
+          </a:prstGeom>
+        </p:spPr>
+        <p:txBody>
+          <a:bodyPr wrap="square" lIns="0" tIns="0" rIns="0" bIns="0" rtlCol="0">
+            <a:noAutofit/>
+          </a:bodyPr>
+          <a:lstStyle/>
+          <a:p>
+            <a:r>
+              <a:rPr lang="en-US" sz="2400" b="1" dirty="0">
+                <a:latin typeface="Vodafone Rg" pitchFamily="34" charset="0"/>
+              </a:rPr>
+              <a:t>Cloud NW</a:t>
+            </a:r>
+          </a:p>
+        </p:txBody>
+      </p:sp>
+      <p:pic>
+        <p:nvPicPr>
+          <p:cNvPr id="43" name="Graphic 42" descr="Internet Of Things with solid fill">
+            <a:extLst>
+              <a:ext uri="{FF2B5EF4-FFF2-40B4-BE49-F238E27FC236}">
+                <a16:creationId xmlns:a16="http://schemas.microsoft.com/office/drawing/2014/main" id="{814B40A2-C139-5806-E653-69D2D5187EDC}"/>
+              </a:ext>
+            </a:extLst>
+          </p:cNvPr>
+          <p:cNvPicPr>
+            <a:picLocks noChangeAspect="1"/>
+          </p:cNvPicPr>
+          <p:nvPr/>
+        </p:nvPicPr>
+        <p:blipFill>
+          <a:blip r:embed="rId6">
+            <a:extLst>
+              <a:ext uri="{96DAC541-7B7A-43D3-8B79-37D633B846F1}">
+                <asvg:svgBlip xmlns:asvg="http://schemas.microsoft.com/office/drawing/2016/SVG/main" r:embed="rId7"/>
+              </a:ext>
+            </a:extLst>
+          </a:blip>
+          <a:stretch>
+            <a:fillRect/>
+          </a:stretch>
+        </p:blipFill>
+        <p:spPr>
+          <a:xfrm>
+            <a:off x="1360900" y="4385586"/>
+            <a:ext cx="1219200" cy="1219200"/>
+          </a:xfrm>
+          <a:prstGeom prst="rect">
+            <a:avLst/>
+          </a:prstGeom>
+        </p:spPr>
+      </p:pic>
+      <p:sp>
+        <p:nvSpPr>
+          <p:cNvPr id="45" name="Arrow: Right 44">
+            <a:extLst>
+              <a:ext uri="{FF2B5EF4-FFF2-40B4-BE49-F238E27FC236}">
+                <a16:creationId xmlns:a16="http://schemas.microsoft.com/office/drawing/2014/main" id="{FCE7E6DE-38A2-BD46-48A8-1EA82BAC20E5}"/>
+              </a:ext>
+            </a:extLst>
+          </p:cNvPr>
+          <p:cNvSpPr/>
+          <p:nvPr/>
+        </p:nvSpPr>
+        <p:spPr>
+          <a:xfrm>
+            <a:off x="7902179" y="4927683"/>
+            <a:ext cx="747299" cy="340015"/>
+          </a:xfrm>
+          <a:prstGeom prst="rightArrow">
+            <a:avLst/>
+          </a:prstGeom>
+          <a:solidFill>
+            <a:srgbClr val="0070C0"/>
+          </a:solidFill>
+          <a:ln w="25400" cap="flat" cmpd="sng" algn="ctr">
+            <a:noFill/>
+            <a:prstDash val="solid"/>
+          </a:ln>
+          <a:effectLst/>
+        </p:spPr>
+        <p:style>
+          <a:lnRef idx="2">
+            <a:scrgbClr r="0" g="0" b="0"/>
+          </a:lnRef>
+          <a:fillRef idx="1">
+            <a:scrgbClr r="0" g="0" b="0"/>
+          </a:fillRef>
+          <a:effectRef idx="0">
+            <a:scrgbClr r="0" g="0" b="0"/>
+          </a:effectRef>
+          <a:fontRef idx="minor">
+            <a:schemeClr val="lt1"/>
+          </a:fontRef>
+        </p:style>
+        <p:txBody>
+          <a:bodyPr spcFirstLastPara="0" vert="horz" wrap="square" lIns="8467" tIns="8467" rIns="8467" bIns="8467" numCol="1" spcCol="1270" rtlCol="0" anchor="ctr" anchorCtr="0">
+            <a:noAutofit/>
+          </a:bodyPr>
+          <a:lstStyle/>
+          <a:p>
+            <a:pPr algn="ctr" defTabSz="592652">
+              <a:lnSpc>
+                <a:spcPct val="90000"/>
+              </a:lnSpc>
+              <a:spcBef>
+                <a:spcPct val="0"/>
+              </a:spcBef>
+              <a:spcAft>
+                <a:spcPct val="35000"/>
+              </a:spcAft>
+            </a:pPr>
+            <a:endParaRPr lang="en-US" sz="1333" dirty="0">
+              <a:solidFill>
+                <a:srgbClr val="34342B"/>
+              </a:solidFill>
+              <a:latin typeface="Vodafone Rg" pitchFamily="34" charset="0"/>
+            </a:endParaRPr>
+          </a:p>
+        </p:txBody>
+      </p:sp>
+      <p:sp>
+        <p:nvSpPr>
+          <p:cNvPr id="47" name="Rectangle 46">
+            <a:extLst>
+              <a:ext uri="{FF2B5EF4-FFF2-40B4-BE49-F238E27FC236}">
+                <a16:creationId xmlns:a16="http://schemas.microsoft.com/office/drawing/2014/main" id="{FCCFEEEA-839C-AB8F-3286-5B701F1B3015}"/>
+              </a:ext>
+            </a:extLst>
+          </p:cNvPr>
+          <p:cNvSpPr/>
+          <p:nvPr/>
+        </p:nvSpPr>
+        <p:spPr>
+          <a:xfrm>
+            <a:off x="8530134" y="1833396"/>
+            <a:ext cx="3292924" cy="1877568"/>
+          </a:xfrm>
+          <a:prstGeom prst="rect">
+            <a:avLst/>
+          </a:prstGeom>
+          <a:ln/>
+        </p:spPr>
+        <p:style>
+          <a:lnRef idx="2">
+            <a:schemeClr val="dk1"/>
+          </a:lnRef>
+          <a:fillRef idx="1">
+            <a:schemeClr val="lt1"/>
+          </a:fillRef>
+          <a:effectRef idx="0">
+            <a:schemeClr val="dk1"/>
+          </a:effectRef>
+          <a:fontRef idx="minor">
+            <a:schemeClr val="dk1"/>
+          </a:fontRef>
+        </p:style>
+        <p:txBody>
+          <a:bodyPr spcFirstLastPara="0" vert="horz" wrap="square" lIns="8467" tIns="8467" rIns="8467" bIns="8467" numCol="1" spcCol="1270" rtlCol="0" anchor="ctr" anchorCtr="0">
+            <a:noAutofit/>
+          </a:bodyPr>
+          <a:lstStyle/>
+          <a:p>
+            <a:pPr algn="ctr" defTabSz="592652">
+              <a:lnSpc>
+                <a:spcPct val="90000"/>
+              </a:lnSpc>
+              <a:spcBef>
+                <a:spcPct val="0"/>
+              </a:spcBef>
+              <a:spcAft>
+                <a:spcPct val="35000"/>
+              </a:spcAft>
+            </a:pPr>
+            <a:endParaRPr lang="en-US" sz="1333" dirty="0">
+              <a:solidFill>
+                <a:srgbClr val="34342B"/>
+              </a:solidFill>
+              <a:latin typeface="Vodafone Rg" pitchFamily="34" charset="0"/>
+            </a:endParaRPr>
+          </a:p>
+        </p:txBody>
+      </p:sp>
+      <p:sp>
+        <p:nvSpPr>
+          <p:cNvPr id="48" name="TextBox 47">
+            <a:extLst>
+              <a:ext uri="{FF2B5EF4-FFF2-40B4-BE49-F238E27FC236}">
+                <a16:creationId xmlns:a16="http://schemas.microsoft.com/office/drawing/2014/main" id="{5B64B5D5-352A-7792-C681-223F055B6771}"/>
+              </a:ext>
+            </a:extLst>
+          </p:cNvPr>
+          <p:cNvSpPr txBox="1"/>
+          <p:nvPr/>
+        </p:nvSpPr>
+        <p:spPr>
+          <a:xfrm>
+            <a:off x="8908086" y="1969651"/>
+            <a:ext cx="2657856" cy="554008"/>
+          </a:xfrm>
+          <a:prstGeom prst="rect">
+            <a:avLst/>
+          </a:prstGeom>
+        </p:spPr>
+        <p:txBody>
+          <a:bodyPr wrap="square" lIns="0" tIns="0" rIns="0" bIns="0" rtlCol="0">
+            <a:noAutofit/>
+          </a:bodyPr>
+          <a:lstStyle/>
+          <a:p>
+            <a:pPr algn="ctr"/>
+            <a:r>
+              <a:rPr lang="en-US" sz="2400" b="1" dirty="0">
+                <a:latin typeface="Vodafone Rg" pitchFamily="34" charset="0"/>
+              </a:rPr>
+              <a:t>VM </a:t>
+            </a:r>
+          </a:p>
+          <a:p>
+            <a:pPr algn="ctr"/>
+            <a:r>
+              <a:rPr lang="en-US" sz="2400" b="1" dirty="0">
+                <a:latin typeface="Vodafone Rg" pitchFamily="34" charset="0"/>
+              </a:rPr>
+              <a:t>Provisioning</a:t>
+            </a:r>
+          </a:p>
+        </p:txBody>
+      </p:sp>
+      <p:cxnSp>
+        <p:nvCxnSpPr>
+          <p:cNvPr id="52" name="Straight Connector 51">
+            <a:extLst>
+              <a:ext uri="{FF2B5EF4-FFF2-40B4-BE49-F238E27FC236}">
+                <a16:creationId xmlns:a16="http://schemas.microsoft.com/office/drawing/2014/main" id="{9CEB3322-552D-4897-9D07-4EC5E1E024F3}"/>
+              </a:ext>
+            </a:extLst>
+          </p:cNvPr>
+          <p:cNvCxnSpPr/>
+          <p:nvPr/>
+        </p:nvCxnSpPr>
+        <p:spPr>
+          <a:xfrm>
+            <a:off x="8908085" y="2723412"/>
+            <a:ext cx="2657856" cy="0"/>
+          </a:xfrm>
+          <a:prstGeom prst="line">
+            <a:avLst/>
+          </a:prstGeom>
+        </p:spPr>
+        <p:style>
+          <a:lnRef idx="1">
+            <a:schemeClr val="dk1"/>
+          </a:lnRef>
+          <a:fillRef idx="0">
+            <a:schemeClr val="dk1"/>
+          </a:fillRef>
+          <a:effectRef idx="0">
+            <a:schemeClr val="dk1"/>
+          </a:effectRef>
+          <a:fontRef idx="minor">
+            <a:schemeClr val="tx1"/>
+          </a:fontRef>
+        </p:style>
+      </p:cxnSp>
+      <p:sp>
+        <p:nvSpPr>
+          <p:cNvPr id="53" name="TextBox 52">
+            <a:extLst>
+              <a:ext uri="{FF2B5EF4-FFF2-40B4-BE49-F238E27FC236}">
+                <a16:creationId xmlns:a16="http://schemas.microsoft.com/office/drawing/2014/main" id="{A8E66689-D857-E283-C306-EEB31C714430}"/>
+              </a:ext>
+            </a:extLst>
+          </p:cNvPr>
+          <p:cNvSpPr txBox="1"/>
+          <p:nvPr/>
+        </p:nvSpPr>
+        <p:spPr>
+          <a:xfrm>
+            <a:off x="8725205" y="2772181"/>
+            <a:ext cx="2962656" cy="707135"/>
+          </a:xfrm>
+          <a:prstGeom prst="rect">
+            <a:avLst/>
+          </a:prstGeom>
+        </p:spPr>
+        <p:txBody>
+          <a:bodyPr wrap="square" lIns="0" tIns="0" rIns="0" bIns="0" rtlCol="0">
+            <a:noAutofit/>
+          </a:bodyPr>
+          <a:lstStyle/>
+          <a:p>
+            <a:endParaRPr lang="en-US" sz="2400" dirty="0">
+              <a:latin typeface="Vodafone Rg" pitchFamily="34" charset="0"/>
+            </a:endParaRPr>
+          </a:p>
+        </p:txBody>
+      </p:sp>
+      <p:sp>
+        <p:nvSpPr>
+          <p:cNvPr id="57" name="Rectangle 56">
+            <a:extLst>
+              <a:ext uri="{FF2B5EF4-FFF2-40B4-BE49-F238E27FC236}">
+                <a16:creationId xmlns:a16="http://schemas.microsoft.com/office/drawing/2014/main" id="{40C832D6-A556-151D-5FFE-2FA54EC048C0}"/>
+              </a:ext>
+            </a:extLst>
+          </p:cNvPr>
+          <p:cNvSpPr/>
+          <p:nvPr/>
+        </p:nvSpPr>
+        <p:spPr>
+          <a:xfrm>
+            <a:off x="4569415" y="1861591"/>
+            <a:ext cx="3292924" cy="1877568"/>
+          </a:xfrm>
+          <a:prstGeom prst="rect">
+            <a:avLst/>
+          </a:prstGeom>
+          <a:ln/>
+        </p:spPr>
+        <p:style>
+          <a:lnRef idx="2">
+            <a:schemeClr val="dk1"/>
+          </a:lnRef>
+          <a:fillRef idx="1">
+            <a:schemeClr val="lt1"/>
+          </a:fillRef>
+          <a:effectRef idx="0">
+            <a:schemeClr val="dk1"/>
+          </a:effectRef>
+          <a:fontRef idx="minor">
+            <a:schemeClr val="dk1"/>
+          </a:fontRef>
+        </p:style>
+        <p:txBody>
+          <a:bodyPr spcFirstLastPara="0" vert="horz" wrap="square" lIns="8467" tIns="8467" rIns="8467" bIns="8467" numCol="1" spcCol="1270" rtlCol="0" anchor="ctr" anchorCtr="0">
+            <a:noAutofit/>
+          </a:bodyPr>
+          <a:lstStyle/>
+          <a:p>
+            <a:pPr algn="ctr" defTabSz="592652">
+              <a:lnSpc>
+                <a:spcPct val="90000"/>
+              </a:lnSpc>
+              <a:spcBef>
+                <a:spcPct val="0"/>
+              </a:spcBef>
+              <a:spcAft>
+                <a:spcPct val="35000"/>
+              </a:spcAft>
+            </a:pPr>
+            <a:endParaRPr lang="en-US" sz="1333" dirty="0">
+              <a:solidFill>
+                <a:srgbClr val="34342B"/>
+              </a:solidFill>
+              <a:latin typeface="Vodafone Rg" pitchFamily="34" charset="0"/>
+            </a:endParaRPr>
+          </a:p>
+        </p:txBody>
+      </p:sp>
+      <p:sp>
+        <p:nvSpPr>
+          <p:cNvPr id="58" name="TextBox 57">
+            <a:extLst>
+              <a:ext uri="{FF2B5EF4-FFF2-40B4-BE49-F238E27FC236}">
+                <a16:creationId xmlns:a16="http://schemas.microsoft.com/office/drawing/2014/main" id="{6A146ED9-6AB1-E26B-8B36-526B4B8B36E2}"/>
+              </a:ext>
+            </a:extLst>
+          </p:cNvPr>
+          <p:cNvSpPr txBox="1"/>
+          <p:nvPr/>
+        </p:nvSpPr>
+        <p:spPr>
+          <a:xfrm>
+            <a:off x="5385885" y="1912223"/>
+            <a:ext cx="2327588" cy="707136"/>
+          </a:xfrm>
+          <a:prstGeom prst="rect">
+            <a:avLst/>
+          </a:prstGeom>
+        </p:spPr>
+        <p:txBody>
+          <a:bodyPr wrap="square" lIns="0" tIns="0" rIns="0" bIns="0" rtlCol="0">
+            <a:noAutofit/>
+          </a:bodyPr>
+          <a:lstStyle/>
+          <a:p>
+            <a:pPr algn="ctr"/>
+            <a:r>
+              <a:rPr lang="en-US" sz="2400" b="1" dirty="0">
+                <a:latin typeface="Vodafone Rg" pitchFamily="34" charset="0"/>
+              </a:rPr>
+              <a:t>Security Provisioning</a:t>
+            </a:r>
+          </a:p>
+        </p:txBody>
+      </p:sp>
+      <p:cxnSp>
+        <p:nvCxnSpPr>
+          <p:cNvPr id="59" name="Straight Connector 58">
+            <a:extLst>
+              <a:ext uri="{FF2B5EF4-FFF2-40B4-BE49-F238E27FC236}">
+                <a16:creationId xmlns:a16="http://schemas.microsoft.com/office/drawing/2014/main" id="{AD1D3BE6-0B8E-19D5-3728-7B30E4042267}"/>
+              </a:ext>
+            </a:extLst>
+          </p:cNvPr>
+          <p:cNvCxnSpPr/>
+          <p:nvPr/>
+        </p:nvCxnSpPr>
+        <p:spPr>
+          <a:xfrm>
+            <a:off x="5055616" y="2714752"/>
+            <a:ext cx="2657856" cy="0"/>
+          </a:xfrm>
+          <a:prstGeom prst="line">
+            <a:avLst/>
+          </a:prstGeom>
+        </p:spPr>
+        <p:style>
+          <a:lnRef idx="1">
+            <a:schemeClr val="dk1"/>
+          </a:lnRef>
+          <a:fillRef idx="0">
+            <a:schemeClr val="dk1"/>
+          </a:fillRef>
+          <a:effectRef idx="0">
+            <a:schemeClr val="dk1"/>
+          </a:effectRef>
+          <a:fontRef idx="minor">
+            <a:schemeClr val="tx1"/>
+          </a:fontRef>
+        </p:style>
+      </p:cxnSp>
+      <p:sp>
+        <p:nvSpPr>
+          <p:cNvPr id="60" name="TextBox 59">
+            <a:extLst>
+              <a:ext uri="{FF2B5EF4-FFF2-40B4-BE49-F238E27FC236}">
+                <a16:creationId xmlns:a16="http://schemas.microsoft.com/office/drawing/2014/main" id="{84D76E7D-DB53-502F-13F0-8064E6765094}"/>
+              </a:ext>
+            </a:extLst>
+          </p:cNvPr>
+          <p:cNvSpPr txBox="1"/>
+          <p:nvPr/>
+        </p:nvSpPr>
+        <p:spPr>
+          <a:xfrm>
+            <a:off x="4872736" y="2763521"/>
+            <a:ext cx="2962656" cy="707135"/>
+          </a:xfrm>
+          <a:prstGeom prst="rect">
+            <a:avLst/>
+          </a:prstGeom>
+        </p:spPr>
+        <p:txBody>
+          <a:bodyPr wrap="square" lIns="0" tIns="0" rIns="0" bIns="0" rtlCol="0">
+            <a:noAutofit/>
+          </a:bodyPr>
+          <a:lstStyle/>
+          <a:p>
+            <a:endParaRPr lang="en-US" sz="2400" dirty="0">
+              <a:latin typeface="Vodafone Rg" pitchFamily="34" charset="0"/>
+            </a:endParaRPr>
+          </a:p>
+        </p:txBody>
+      </p:sp>
+      <p:sp>
+        <p:nvSpPr>
+          <p:cNvPr id="63" name="Rectangle 62">
+            <a:extLst>
+              <a:ext uri="{FF2B5EF4-FFF2-40B4-BE49-F238E27FC236}">
+                <a16:creationId xmlns:a16="http://schemas.microsoft.com/office/drawing/2014/main" id="{16F8E527-D9DA-2629-C9F0-78B4D1C5F11E}"/>
+              </a:ext>
+            </a:extLst>
+          </p:cNvPr>
+          <p:cNvSpPr/>
+          <p:nvPr/>
+        </p:nvSpPr>
+        <p:spPr>
+          <a:xfrm>
+            <a:off x="473116" y="1891793"/>
+            <a:ext cx="3292924" cy="1877568"/>
+          </a:xfrm>
+          <a:prstGeom prst="rect">
+            <a:avLst/>
+          </a:prstGeom>
+          <a:ln/>
+        </p:spPr>
+        <p:style>
+          <a:lnRef idx="2">
+            <a:schemeClr val="dk1"/>
+          </a:lnRef>
+          <a:fillRef idx="1">
+            <a:schemeClr val="lt1"/>
+          </a:fillRef>
+          <a:effectRef idx="0">
+            <a:schemeClr val="dk1"/>
+          </a:effectRef>
+          <a:fontRef idx="minor">
+            <a:schemeClr val="dk1"/>
+          </a:fontRef>
+        </p:style>
+        <p:txBody>
+          <a:bodyPr spcFirstLastPara="0" vert="horz" wrap="square" lIns="8467" tIns="8467" rIns="8467" bIns="8467" numCol="1" spcCol="1270" rtlCol="0" anchor="ctr" anchorCtr="0">
+            <a:noAutofit/>
+          </a:bodyPr>
+          <a:lstStyle/>
+          <a:p>
+            <a:pPr algn="ctr" defTabSz="592652">
+              <a:lnSpc>
+                <a:spcPct val="90000"/>
+              </a:lnSpc>
+              <a:spcBef>
+                <a:spcPct val="0"/>
+              </a:spcBef>
+              <a:spcAft>
+                <a:spcPct val="35000"/>
+              </a:spcAft>
+            </a:pPr>
+            <a:endParaRPr lang="en-US" sz="1333" dirty="0">
+              <a:solidFill>
+                <a:srgbClr val="34342B"/>
+              </a:solidFill>
+              <a:latin typeface="Vodafone Rg" pitchFamily="34" charset="0"/>
+            </a:endParaRPr>
+          </a:p>
+        </p:txBody>
+      </p:sp>
+      <p:sp>
+        <p:nvSpPr>
+          <p:cNvPr id="65" name="TextBox 64">
+            <a:extLst>
+              <a:ext uri="{FF2B5EF4-FFF2-40B4-BE49-F238E27FC236}">
+                <a16:creationId xmlns:a16="http://schemas.microsoft.com/office/drawing/2014/main" id="{8D3AE9CB-80C5-8620-BDC4-C4E47A240943}"/>
+              </a:ext>
+            </a:extLst>
+          </p:cNvPr>
+          <p:cNvSpPr txBox="1"/>
+          <p:nvPr/>
+        </p:nvSpPr>
+        <p:spPr>
+          <a:xfrm>
+            <a:off x="1181336" y="2028048"/>
+            <a:ext cx="2327588" cy="707136"/>
+          </a:xfrm>
+          <a:prstGeom prst="rect">
+            <a:avLst/>
+          </a:prstGeom>
+        </p:spPr>
+        <p:txBody>
+          <a:bodyPr wrap="square" lIns="0" tIns="0" rIns="0" bIns="0" rtlCol="0">
+            <a:noAutofit/>
+          </a:bodyPr>
+          <a:lstStyle/>
+          <a:p>
+            <a:pPr algn="ctr"/>
+            <a:r>
+              <a:rPr lang="en-US" sz="2400" b="1" dirty="0">
+                <a:latin typeface="Vodafone Rg" pitchFamily="34" charset="0"/>
+              </a:rPr>
+              <a:t>Network</a:t>
+            </a:r>
+          </a:p>
+          <a:p>
+            <a:pPr algn="ctr"/>
+            <a:r>
+              <a:rPr lang="en-US" sz="2400" b="1" dirty="0">
+                <a:latin typeface="Vodafone Rg" pitchFamily="34" charset="0"/>
+              </a:rPr>
+              <a:t>Provisioning</a:t>
+            </a:r>
+          </a:p>
+        </p:txBody>
+      </p:sp>
+      <p:cxnSp>
+        <p:nvCxnSpPr>
+          <p:cNvPr id="66" name="Straight Connector 65">
+            <a:extLst>
+              <a:ext uri="{FF2B5EF4-FFF2-40B4-BE49-F238E27FC236}">
+                <a16:creationId xmlns:a16="http://schemas.microsoft.com/office/drawing/2014/main" id="{57609DCE-2AF8-705D-8054-28C16DFAD24D}"/>
+              </a:ext>
+            </a:extLst>
+          </p:cNvPr>
+          <p:cNvCxnSpPr/>
+          <p:nvPr/>
+        </p:nvCxnSpPr>
+        <p:spPr>
+          <a:xfrm>
+            <a:off x="851067" y="2781809"/>
+            <a:ext cx="2657856" cy="0"/>
+          </a:xfrm>
+          <a:prstGeom prst="line">
+            <a:avLst/>
+          </a:prstGeom>
+        </p:spPr>
+        <p:style>
+          <a:lnRef idx="1">
+            <a:schemeClr val="dk1"/>
+          </a:lnRef>
+          <a:fillRef idx="0">
+            <a:schemeClr val="dk1"/>
+          </a:fillRef>
+          <a:effectRef idx="0">
+            <a:schemeClr val="dk1"/>
+          </a:effectRef>
+          <a:fontRef idx="minor">
+            <a:schemeClr val="tx1"/>
+          </a:fontRef>
+        </p:style>
+      </p:cxnSp>
+      <p:sp>
+        <p:nvSpPr>
+          <p:cNvPr id="67" name="TextBox 66">
+            <a:extLst>
+              <a:ext uri="{FF2B5EF4-FFF2-40B4-BE49-F238E27FC236}">
+                <a16:creationId xmlns:a16="http://schemas.microsoft.com/office/drawing/2014/main" id="{A1165CCC-6127-7E00-28E0-53F2C9B6331E}"/>
+              </a:ext>
+            </a:extLst>
+          </p:cNvPr>
+          <p:cNvSpPr txBox="1"/>
+          <p:nvPr/>
+        </p:nvSpPr>
+        <p:spPr>
+          <a:xfrm>
+            <a:off x="668187" y="2830578"/>
+            <a:ext cx="2962656" cy="707135"/>
+          </a:xfrm>
+          <a:prstGeom prst="rect">
+            <a:avLst/>
+          </a:prstGeom>
+        </p:spPr>
+        <p:txBody>
+          <a:bodyPr wrap="square" lIns="0" tIns="0" rIns="0" bIns="0" rtlCol="0">
+            <a:noAutofit/>
+          </a:bodyPr>
+          <a:lstStyle/>
+          <a:p>
+            <a:endParaRPr lang="en-US" sz="2400" dirty="0">
+              <a:latin typeface="Vodafone Rg" pitchFamily="34" charset="0"/>
+            </a:endParaRPr>
+          </a:p>
+        </p:txBody>
+      </p:sp>
+      <p:sp>
+        <p:nvSpPr>
+          <p:cNvPr id="68" name="TextBox 67">
+            <a:extLst>
+              <a:ext uri="{FF2B5EF4-FFF2-40B4-BE49-F238E27FC236}">
+                <a16:creationId xmlns:a16="http://schemas.microsoft.com/office/drawing/2014/main" id="{29DBC2D7-B9D0-7449-A308-DC3F21E56C96}"/>
+              </a:ext>
+            </a:extLst>
+          </p:cNvPr>
+          <p:cNvSpPr txBox="1"/>
+          <p:nvPr/>
+        </p:nvSpPr>
+        <p:spPr>
+          <a:xfrm>
+            <a:off x="572446" y="2888088"/>
+            <a:ext cx="3292924" cy="707136"/>
+          </a:xfrm>
+          <a:prstGeom prst="rect">
+            <a:avLst/>
+          </a:prstGeom>
+        </p:spPr>
+        <p:txBody>
+          <a:bodyPr wrap="square" lIns="0" tIns="0" rIns="0" bIns="0" rtlCol="0">
+            <a:noAutofit/>
+          </a:bodyPr>
+          <a:lstStyle/>
+          <a:p>
+            <a:pPr marL="380990" indent="-380990">
+              <a:buFont typeface="Arial" panose="020B0604020202020204" pitchFamily="34" charset="0"/>
+              <a:buChar char="•"/>
+            </a:pPr>
+            <a:r>
+              <a:rPr lang="en-US" sz="2133" dirty="0">
+                <a:latin typeface="Vodafone Rg" pitchFamily="34" charset="0"/>
+              </a:rPr>
+              <a:t>Landing Zone connectivity</a:t>
+            </a:r>
+          </a:p>
+          <a:p>
+            <a:pPr marL="380990" indent="-380990">
+              <a:buFont typeface="Arial" panose="020B0604020202020204" pitchFamily="34" charset="0"/>
+              <a:buChar char="•"/>
+            </a:pPr>
+            <a:r>
+              <a:rPr lang="en-US" sz="2133" dirty="0">
+                <a:latin typeface="Vodafone Rg" pitchFamily="34" charset="0"/>
+              </a:rPr>
+              <a:t>Terraform</a:t>
+            </a:r>
+          </a:p>
+        </p:txBody>
+      </p:sp>
+      <p:sp>
+        <p:nvSpPr>
+          <p:cNvPr id="71" name="TextBox 70">
+            <a:extLst>
+              <a:ext uri="{FF2B5EF4-FFF2-40B4-BE49-F238E27FC236}">
+                <a16:creationId xmlns:a16="http://schemas.microsoft.com/office/drawing/2014/main" id="{8A83D185-BFF0-1A96-A06B-EC9C5B85A435}"/>
+              </a:ext>
+            </a:extLst>
+          </p:cNvPr>
+          <p:cNvSpPr txBox="1"/>
+          <p:nvPr/>
+        </p:nvSpPr>
+        <p:spPr>
+          <a:xfrm>
+            <a:off x="4775201" y="2830577"/>
+            <a:ext cx="2994084" cy="707136"/>
+          </a:xfrm>
+          <a:prstGeom prst="rect">
+            <a:avLst/>
+          </a:prstGeom>
+        </p:spPr>
+        <p:txBody>
+          <a:bodyPr wrap="square" lIns="0" tIns="0" rIns="0" bIns="0" rtlCol="0">
+            <a:noAutofit/>
+          </a:bodyPr>
+          <a:lstStyle/>
+          <a:p>
+            <a:pPr marL="380990" indent="-380990">
+              <a:buFont typeface="Arial" panose="020B0604020202020204" pitchFamily="34" charset="0"/>
+              <a:buChar char="•"/>
+            </a:pPr>
+            <a:r>
+              <a:rPr lang="en-US" sz="2133" dirty="0">
+                <a:latin typeface="Vodafone Rg" pitchFamily="34" charset="0"/>
+              </a:rPr>
+              <a:t>Auto Policy push</a:t>
+            </a:r>
+          </a:p>
+          <a:p>
+            <a:pPr marL="380990" indent="-380990">
+              <a:buFont typeface="Arial" panose="020B0604020202020204" pitchFamily="34" charset="0"/>
+              <a:buChar char="•"/>
+            </a:pPr>
+            <a:r>
+              <a:rPr lang="en-US" sz="2133" dirty="0">
+                <a:latin typeface="Vodafone Rg" pitchFamily="34" charset="0"/>
+              </a:rPr>
+              <a:t>Azure DevOps</a:t>
+            </a:r>
+          </a:p>
+        </p:txBody>
+      </p:sp>
+      <p:sp>
+        <p:nvSpPr>
+          <p:cNvPr id="72" name="TextBox 71">
+            <a:extLst>
+              <a:ext uri="{FF2B5EF4-FFF2-40B4-BE49-F238E27FC236}">
+                <a16:creationId xmlns:a16="http://schemas.microsoft.com/office/drawing/2014/main" id="{8124772D-680A-DF78-6685-829FD1B286EA}"/>
+              </a:ext>
+            </a:extLst>
+          </p:cNvPr>
+          <p:cNvSpPr txBox="1"/>
+          <p:nvPr/>
+        </p:nvSpPr>
+        <p:spPr>
+          <a:xfrm>
+            <a:off x="8666819" y="2881905"/>
+            <a:ext cx="2994084" cy="707136"/>
+          </a:xfrm>
+          <a:prstGeom prst="rect">
+            <a:avLst/>
+          </a:prstGeom>
+        </p:spPr>
+        <p:txBody>
+          <a:bodyPr wrap="square" lIns="0" tIns="0" rIns="0" bIns="0" rtlCol="0">
+            <a:noAutofit/>
+          </a:bodyPr>
+          <a:lstStyle/>
+          <a:p>
+            <a:pPr marL="380990" indent="-380990">
+              <a:buFont typeface="Arial" panose="020B0604020202020204" pitchFamily="34" charset="0"/>
+              <a:buChar char="•"/>
+            </a:pPr>
+            <a:r>
+              <a:rPr lang="en-US" sz="2133" dirty="0">
+                <a:latin typeface="Vodafone Rg" pitchFamily="34" charset="0"/>
+              </a:rPr>
+              <a:t>Landing Zone Compute</a:t>
+            </a:r>
+          </a:p>
+          <a:p>
+            <a:pPr marL="380990" indent="-380990">
+              <a:buFont typeface="Arial" panose="020B0604020202020204" pitchFamily="34" charset="0"/>
+              <a:buChar char="•"/>
+            </a:pPr>
+            <a:r>
+              <a:rPr lang="en-US" sz="2133" dirty="0">
+                <a:latin typeface="Vodafone Rg" pitchFamily="34" charset="0"/>
+              </a:rPr>
+              <a:t>Prov at scale</a:t>
+            </a:r>
+          </a:p>
+        </p:txBody>
+      </p:sp>
+      <p:sp>
+        <p:nvSpPr>
+          <p:cNvPr id="74" name="TextBox 73">
+            <a:extLst>
+              <a:ext uri="{FF2B5EF4-FFF2-40B4-BE49-F238E27FC236}">
+                <a16:creationId xmlns:a16="http://schemas.microsoft.com/office/drawing/2014/main" id="{9677193B-D9AC-DACD-9F3E-FF868C34145B}"/>
+              </a:ext>
+            </a:extLst>
+          </p:cNvPr>
+          <p:cNvSpPr txBox="1"/>
+          <p:nvPr/>
+        </p:nvSpPr>
+        <p:spPr>
+          <a:xfrm>
+            <a:off x="621793" y="963169"/>
+            <a:ext cx="11105828" cy="694943"/>
+          </a:xfrm>
+          <a:prstGeom prst="rect">
+            <a:avLst/>
+          </a:prstGeom>
+        </p:spPr>
+        <p:txBody>
+          <a:bodyPr wrap="square" lIns="0" tIns="0" rIns="0" bIns="0" rtlCol="0">
+            <a:noAutofit/>
+          </a:bodyPr>
+          <a:lstStyle/>
+          <a:p>
+            <a:r>
+              <a:rPr lang="en-US" sz="2133" dirty="0">
+                <a:latin typeface="Vodafone Rg" pitchFamily="34" charset="0"/>
+              </a:rPr>
+              <a:t>E2E Provisioning </a:t>
+            </a:r>
+          </a:p>
+          <a:p>
+            <a:r>
+              <a:rPr lang="en-US" sz="2133" dirty="0">
+                <a:latin typeface="Vodafone Rg" pitchFamily="34" charset="0"/>
+              </a:rPr>
+              <a:t>DCC Architecture</a:t>
+            </a:r>
+          </a:p>
+        </p:txBody>
+      </p:sp>
     </p:spTree>
     <p:extLst>
       <p:ext uri="{BB962C8B-B14F-4D97-AF65-F5344CB8AC3E}">
-        <p14:creationId xmlns:p14="http://schemas.microsoft.com/office/powerpoint/2010/main" val="3991684126"/>
+        <p14:creationId xmlns:p14="http://schemas.microsoft.com/office/powerpoint/2010/main" val="2129696808"/>
       </p:ext>
     </p:extLst>
   </p:cSld>
@@ -8868,6 +10364,105 @@
       </p:grpSpPr>
       <p:sp>
         <p:nvSpPr>
+          <p:cNvPr id="4" name="Title 3">
+            <a:extLst>
+              <a:ext uri="{FF2B5EF4-FFF2-40B4-BE49-F238E27FC236}">
+                <a16:creationId xmlns:a16="http://schemas.microsoft.com/office/drawing/2014/main" id="{F5886D5A-312D-0DDC-BC99-339B19F1CA3F}"/>
+              </a:ext>
+            </a:extLst>
+          </p:cNvPr>
+          <p:cNvSpPr>
+            <a:spLocks noGrp="1"/>
+          </p:cNvSpPr>
+          <p:nvPr>
+            <p:ph type="title"/>
+          </p:nvPr>
+        </p:nvSpPr>
+        <p:spPr>
+          <a:xfrm>
+            <a:off x="92597" y="227341"/>
+            <a:ext cx="11887199" cy="609378"/>
+          </a:xfrm>
+        </p:spPr>
+        <p:txBody>
+          <a:bodyPr/>
+          <a:lstStyle/>
+          <a:p>
+            <a:r>
+              <a:rPr lang="en-US" dirty="0">
+                <a:solidFill>
+                  <a:schemeClr val="tx1"/>
+                </a:solidFill>
+              </a:rPr>
+              <a:t>Existing DCC ALZ- Network Prospective</a:t>
+            </a:r>
+          </a:p>
+        </p:txBody>
+      </p:sp>
+      <p:pic>
+        <p:nvPicPr>
+          <p:cNvPr id="10" name="Content Placeholder 9">
+            <a:extLst>
+              <a:ext uri="{FF2B5EF4-FFF2-40B4-BE49-F238E27FC236}">
+                <a16:creationId xmlns:a16="http://schemas.microsoft.com/office/drawing/2014/main" id="{85F762E6-79A9-1F90-10F4-FA5BBB7FC8F4}"/>
+              </a:ext>
+            </a:extLst>
+          </p:cNvPr>
+          <p:cNvPicPr>
+            <a:picLocks noGrp="1" noChangeAspect="1"/>
+          </p:cNvPicPr>
+          <p:nvPr>
+            <p:ph idx="1"/>
+          </p:nvPr>
+        </p:nvPicPr>
+        <p:blipFill>
+          <a:blip r:embed="rId2"/>
+          <a:stretch>
+            <a:fillRect/>
+          </a:stretch>
+        </p:blipFill>
+        <p:spPr>
+          <a:xfrm>
+            <a:off x="0" y="1041722"/>
+            <a:ext cx="11979796" cy="5588937"/>
+          </a:xfrm>
+          <a:prstGeom prst="rect">
+            <a:avLst/>
+          </a:prstGeom>
+        </p:spPr>
+      </p:pic>
+    </p:spTree>
+    <p:extLst>
+      <p:ext uri="{BB962C8B-B14F-4D97-AF65-F5344CB8AC3E}">
+        <p14:creationId xmlns:p14="http://schemas.microsoft.com/office/powerpoint/2010/main" val="3991684126"/>
+      </p:ext>
+    </p:extLst>
+  </p:cSld>
+  <p:clrMapOvr>
+    <a:masterClrMapping/>
+  </p:clrMapOvr>
+</p:sld>
+</file>
+
+<file path=ppt/slides/slide4.xml><?xml version="1.0" encoding="utf-8"?>
+<p:sld xmlns:a="http://schemas.openxmlformats.org/drawingml/2006/main" xmlns:r="http://schemas.openxmlformats.org/officeDocument/2006/relationships" xmlns:p="http://schemas.openxmlformats.org/presentationml/2006/main">
+  <p:cSld>
+    <p:spTree>
+      <p:nvGrpSpPr>
+        <p:cNvPr id="1" name=""/>
+        <p:cNvGrpSpPr/>
+        <p:nvPr/>
+      </p:nvGrpSpPr>
+      <p:grpSpPr>
+        <a:xfrm>
+          <a:off x="0" y="0"/>
+          <a:ext cx="0" cy="0"/>
+          <a:chOff x="0" y="0"/>
+          <a:chExt cx="0" cy="0"/>
+        </a:xfrm>
+      </p:grpSpPr>
+      <p:sp>
+        <p:nvSpPr>
           <p:cNvPr id="78" name="Rectangle 77">
             <a:extLst>
               <a:ext uri="{FF2B5EF4-FFF2-40B4-BE49-F238E27FC236}">
@@ -8880,7 +10475,7 @@
         </p:nvSpPr>
         <p:spPr>
           <a:xfrm>
-            <a:off x="80039" y="914120"/>
+            <a:off x="144379" y="914747"/>
             <a:ext cx="10661267" cy="5676541"/>
           </a:xfrm>
           <a:prstGeom prst="rect">
@@ -9102,7 +10697,7 @@
         <p:spPr bwMode="auto">
           <a:xfrm>
             <a:off x="324474" y="139923"/>
-            <a:ext cx="9740208" cy="589197"/>
+            <a:ext cx="9740208" cy="321295"/>
           </a:xfrm>
           <a:prstGeom prst="rect">
             <a:avLst/>
@@ -9245,24 +10840,6 @@
               </a:rPr>
               <a:t>is</a:t>
             </a:r>
-            <a:r>
-              <a:rPr kumimoji="0" lang="de-DE" sz="2400" b="1" i="0" u="none" strike="noStrike" kern="1200" cap="none" spc="0" normalizeH="0" baseline="0" noProof="0" dirty="0">
-                <a:ln>
-                  <a:noFill/>
-                </a:ln>
-                <a:solidFill>
-                  <a:srgbClr val="E60000"/>
-                </a:solidFill>
-                <a:effectLst/>
-                <a:uLnTx/>
-                <a:uFillTx/>
-                <a:latin typeface="Vodafone Rg" pitchFamily="34" charset="0"/>
-                <a:ea typeface="+mj-ea"/>
-                <a:cs typeface="+mj-cs"/>
-                <a:sym typeface="Webdings" panose="05030102010509060703" pitchFamily="18" charset="2"/>
-              </a:rPr>
-              <a:t> Day 0 Infra prepared using Terraform</a:t>
-            </a:r>
             <a:endParaRPr kumimoji="0" lang="en-GB" sz="2400" b="1" i="0" u="none" strike="noStrike" kern="1200" cap="none" spc="0" normalizeH="0" baseline="0" noProof="0" dirty="0">
               <a:ln>
                 <a:noFill/>
@@ -9450,7 +11027,7 @@
                 <a:tabLst/>
                 <a:defRPr/>
               </a:pPr>
-              <a:t>3</a:t>
+              <a:t>4</a:t>
             </a:fld>
             <a:endParaRPr kumimoji="0" lang="en-US" sz="1000" b="0" i="0" u="none" strike="noStrike" kern="1200" cap="none" spc="0" normalizeH="0" baseline="0" noProof="0" dirty="0">
               <a:ln>
@@ -11512,66 +13089,6 @@
           </a:fontRef>
         </p:style>
       </p:cxnSp>
-      <p:pic>
-        <p:nvPicPr>
-          <p:cNvPr id="67" name="Picture 66">
-            <a:extLst>
-              <a:ext uri="{FF2B5EF4-FFF2-40B4-BE49-F238E27FC236}">
-                <a16:creationId xmlns:a16="http://schemas.microsoft.com/office/drawing/2014/main" id="{54EFFEA1-D58C-D5B3-80FD-C559D9A6BE77}"/>
-              </a:ext>
-            </a:extLst>
-          </p:cNvPr>
-          <p:cNvPicPr>
-            <a:picLocks noChangeAspect="1"/>
-          </p:cNvPicPr>
-          <p:nvPr/>
-        </p:nvPicPr>
-        <p:blipFill>
-          <a:blip r:embed="rId8"/>
-          <a:stretch>
-            <a:fillRect/>
-          </a:stretch>
-        </p:blipFill>
-        <p:spPr>
-          <a:xfrm>
-            <a:off x="6826826" y="4080511"/>
-            <a:ext cx="355337" cy="355337"/>
-          </a:xfrm>
-          <a:prstGeom prst="rect">
-            <a:avLst/>
-          </a:prstGeom>
-        </p:spPr>
-      </p:pic>
-      <p:pic>
-        <p:nvPicPr>
-          <p:cNvPr id="68" name="Picture 67">
-            <a:extLst>
-              <a:ext uri="{FF2B5EF4-FFF2-40B4-BE49-F238E27FC236}">
-                <a16:creationId xmlns:a16="http://schemas.microsoft.com/office/drawing/2014/main" id="{E3AEE46C-9CC8-65DC-1638-96D7AA26F612}"/>
-              </a:ext>
-            </a:extLst>
-          </p:cNvPr>
-          <p:cNvPicPr>
-            <a:picLocks noChangeAspect="1"/>
-          </p:cNvPicPr>
-          <p:nvPr/>
-        </p:nvPicPr>
-        <p:blipFill>
-          <a:blip r:embed="rId8"/>
-          <a:stretch>
-            <a:fillRect/>
-          </a:stretch>
-        </p:blipFill>
-        <p:spPr>
-          <a:xfrm>
-            <a:off x="9721431" y="4128234"/>
-            <a:ext cx="355337" cy="355337"/>
-          </a:xfrm>
-          <a:prstGeom prst="rect">
-            <a:avLst/>
-          </a:prstGeom>
-        </p:spPr>
-      </p:pic>
       <p:sp>
         <p:nvSpPr>
           <p:cNvPr id="3" name="Rectangle 2">
@@ -13464,7 +14981,7 @@
               <a:buNone/>
             </a:pPr>
             <a:r>
-              <a:rPr lang="en-US" dirty="0">
+              <a:rPr lang="en-US" sz="1000" dirty="0">
                 <a:latin typeface="Vodafone Rg" pitchFamily="34" charset="0"/>
               </a:rPr>
               <a:t>10.9.0.0/24</a:t>
@@ -13504,7 +15021,7 @@
               <a:buNone/>
             </a:pPr>
             <a:r>
-              <a:rPr lang="en-US" dirty="0">
+              <a:rPr lang="en-US" sz="1000" dirty="0">
                 <a:latin typeface="Vodafone Rg" pitchFamily="34" charset="0"/>
               </a:rPr>
               <a:t>10.10.0.0/24</a:t>
@@ -13841,46 +15358,6 @@
       </p:sp>
       <p:sp>
         <p:nvSpPr>
-          <p:cNvPr id="80" name="TextBox 79">
-            <a:extLst>
-              <a:ext uri="{FF2B5EF4-FFF2-40B4-BE49-F238E27FC236}">
-                <a16:creationId xmlns:a16="http://schemas.microsoft.com/office/drawing/2014/main" id="{F9D7ADB7-C5E0-CACD-8799-8D2F46047D1D}"/>
-              </a:ext>
-            </a:extLst>
-          </p:cNvPr>
-          <p:cNvSpPr txBox="1"/>
-          <p:nvPr/>
-        </p:nvSpPr>
-        <p:spPr>
-          <a:xfrm>
-            <a:off x="145735" y="3721536"/>
-            <a:ext cx="1125416" cy="211387"/>
-          </a:xfrm>
-          <a:prstGeom prst="rect">
-            <a:avLst/>
-          </a:prstGeom>
-        </p:spPr>
-        <p:txBody>
-          <a:bodyPr wrap="square" lIns="0" tIns="0" rIns="0" bIns="0" rtlCol="0">
-            <a:noAutofit/>
-          </a:bodyPr>
-          <a:lstStyle/>
-          <a:p>
-            <a:pPr marL="0" indent="0">
-              <a:buFont typeface="Arial" pitchFamily="34" charset="0"/>
-              <a:buNone/>
-            </a:pPr>
-            <a:r>
-              <a:rPr lang="en-US" sz="1400" b="1" dirty="0">
-                <a:latin typeface="Vodafone Rg" pitchFamily="34" charset="0"/>
-              </a:rPr>
-              <a:t>ON-PREM SITE</a:t>
-            </a:r>
-          </a:p>
-        </p:txBody>
-      </p:sp>
-      <p:sp>
-        <p:nvSpPr>
           <p:cNvPr id="83" name="TextBox 82">
             <a:extLst>
               <a:ext uri="{FF2B5EF4-FFF2-40B4-BE49-F238E27FC236}">
@@ -13945,7 +15422,7 @@
         </p:nvSpPr>
         <p:spPr>
           <a:xfrm>
-            <a:off x="2918235" y="3778008"/>
+            <a:off x="3220338" y="3859534"/>
             <a:ext cx="1022052" cy="349298"/>
           </a:xfrm>
           <a:prstGeom prst="rect">
@@ -13963,7 +15440,7 @@
               <a:buNone/>
             </a:pPr>
             <a:r>
-              <a:rPr lang="en-US" dirty="0">
+              <a:rPr lang="en-US" sz="1000" dirty="0">
                 <a:latin typeface="Vodafone Rg" pitchFamily="34" charset="0"/>
               </a:rPr>
               <a:t>10.7.0.0/16</a:t>
@@ -14003,7 +15480,7 @@
               <a:buNone/>
             </a:pPr>
             <a:r>
-              <a:rPr lang="en-US" dirty="0">
+              <a:rPr lang="en-US" sz="1000" dirty="0">
                 <a:latin typeface="Vodafone Rg" pitchFamily="34" charset="0"/>
               </a:rPr>
               <a:t>10.7.0.0/24</a:t>
@@ -14043,7 +15520,7 @@
               <a:buNone/>
             </a:pPr>
             <a:r>
-              <a:rPr lang="en-US" dirty="0">
+              <a:rPr lang="en-US" sz="1000" dirty="0">
                 <a:latin typeface="Vodafone Rg" pitchFamily="34" charset="0"/>
               </a:rPr>
               <a:t>10.5.0.0/16</a:t>
@@ -14065,7 +15542,7 @@
         </p:nvSpPr>
         <p:spPr>
           <a:xfrm>
-            <a:off x="134091" y="6240770"/>
+            <a:off x="7960092" y="582927"/>
             <a:ext cx="1979253" cy="276612"/>
           </a:xfrm>
           <a:prstGeom prst="rect">
@@ -14171,13 +15648,15 @@
               </a:ext>
             </a:extLst>
           </p:cNvPr>
-          <p:cNvCxnSpPr/>
+          <p:cNvCxnSpPr>
+            <a:cxnSpLocks/>
+          </p:cNvCxnSpPr>
           <p:nvPr/>
         </p:nvCxnSpPr>
         <p:spPr>
-          <a:xfrm flipV="1">
+          <a:xfrm>
             <a:off x="9312333" y="1815531"/>
-            <a:ext cx="1530181" cy="23816"/>
+            <a:ext cx="1530181" cy="0"/>
           </a:xfrm>
           <a:prstGeom prst="straightConnector1">
             <a:avLst/>
@@ -14202,6 +15681,386 @@
           </a:fontRef>
         </p:style>
       </p:cxnSp>
+      <p:sp>
+        <p:nvSpPr>
+          <p:cNvPr id="94" name="TextBox 93">
+            <a:extLst>
+              <a:ext uri="{FF2B5EF4-FFF2-40B4-BE49-F238E27FC236}">
+                <a16:creationId xmlns:a16="http://schemas.microsoft.com/office/drawing/2014/main" id="{1DD1902C-B71D-B79D-1EE3-E0109997B05A}"/>
+              </a:ext>
+            </a:extLst>
+          </p:cNvPr>
+          <p:cNvSpPr txBox="1"/>
+          <p:nvPr/>
+        </p:nvSpPr>
+        <p:spPr>
+          <a:xfrm>
+            <a:off x="1327340" y="4034375"/>
+            <a:ext cx="1632098" cy="237870"/>
+          </a:xfrm>
+          <a:prstGeom prst="rect">
+            <a:avLst/>
+          </a:prstGeom>
+        </p:spPr>
+        <p:txBody>
+          <a:bodyPr wrap="square" lIns="0" tIns="0" rIns="0" bIns="0" rtlCol="0">
+            <a:noAutofit/>
+          </a:bodyPr>
+          <a:lstStyle/>
+          <a:p>
+            <a:pPr marL="0" indent="0">
+              <a:buFont typeface="Arial" pitchFamily="34" charset="0"/>
+              <a:buNone/>
+            </a:pPr>
+            <a:r>
+              <a:rPr lang="en-US" sz="1200" b="1" dirty="0">
+                <a:latin typeface="Vodafone Rg" pitchFamily="34" charset="0"/>
+              </a:rPr>
+              <a:t>VNET 1 (Azure uk south )</a:t>
+            </a:r>
+          </a:p>
+        </p:txBody>
+      </p:sp>
+      <p:sp>
+        <p:nvSpPr>
+          <p:cNvPr id="95" name="TextBox 94">
+            <a:extLst>
+              <a:ext uri="{FF2B5EF4-FFF2-40B4-BE49-F238E27FC236}">
+                <a16:creationId xmlns:a16="http://schemas.microsoft.com/office/drawing/2014/main" id="{6A399B3D-FC98-8E29-918D-EAAB19D20ADA}"/>
+              </a:ext>
+            </a:extLst>
+          </p:cNvPr>
+          <p:cNvSpPr txBox="1"/>
+          <p:nvPr/>
+        </p:nvSpPr>
+        <p:spPr>
+          <a:xfrm>
+            <a:off x="9722883" y="3778034"/>
+            <a:ext cx="1125416" cy="211387"/>
+          </a:xfrm>
+          <a:prstGeom prst="rect">
+            <a:avLst/>
+          </a:prstGeom>
+        </p:spPr>
+        <p:txBody>
+          <a:bodyPr wrap="square" lIns="0" tIns="0" rIns="0" bIns="0" rtlCol="0">
+            <a:noAutofit/>
+          </a:bodyPr>
+          <a:lstStyle/>
+          <a:p>
+            <a:pPr marL="0" indent="0">
+              <a:buFont typeface="Arial" pitchFamily="34" charset="0"/>
+              <a:buNone/>
+            </a:pPr>
+            <a:r>
+              <a:rPr lang="en-US" sz="1200" b="1" dirty="0">
+                <a:latin typeface="Vodafone Rg" pitchFamily="34" charset="0"/>
+              </a:rPr>
+              <a:t>VNET 2</a:t>
+            </a:r>
+          </a:p>
+        </p:txBody>
+      </p:sp>
+      <p:sp>
+        <p:nvSpPr>
+          <p:cNvPr id="96" name="TextBox 95">
+            <a:extLst>
+              <a:ext uri="{FF2B5EF4-FFF2-40B4-BE49-F238E27FC236}">
+                <a16:creationId xmlns:a16="http://schemas.microsoft.com/office/drawing/2014/main" id="{A7A1510E-DEA8-D076-6523-0AF76347EB36}"/>
+              </a:ext>
+            </a:extLst>
+          </p:cNvPr>
+          <p:cNvSpPr txBox="1"/>
+          <p:nvPr/>
+        </p:nvSpPr>
+        <p:spPr>
+          <a:xfrm>
+            <a:off x="5241998" y="6240770"/>
+            <a:ext cx="1125416" cy="211387"/>
+          </a:xfrm>
+          <a:prstGeom prst="rect">
+            <a:avLst/>
+          </a:prstGeom>
+        </p:spPr>
+        <p:txBody>
+          <a:bodyPr wrap="square" lIns="0" tIns="0" rIns="0" bIns="0" rtlCol="0">
+            <a:noAutofit/>
+          </a:bodyPr>
+          <a:lstStyle/>
+          <a:p>
+            <a:pPr marL="0" indent="0">
+              <a:buFont typeface="Arial" pitchFamily="34" charset="0"/>
+              <a:buNone/>
+            </a:pPr>
+            <a:r>
+              <a:rPr lang="en-US" sz="1200" b="1" dirty="0">
+                <a:latin typeface="Vodafone Rg" pitchFamily="34" charset="0"/>
+              </a:rPr>
+              <a:t>VNET 3</a:t>
+            </a:r>
+          </a:p>
+        </p:txBody>
+      </p:sp>
+      <p:sp>
+        <p:nvSpPr>
+          <p:cNvPr id="97" name="TextBox 96">
+            <a:extLst>
+              <a:ext uri="{FF2B5EF4-FFF2-40B4-BE49-F238E27FC236}">
+                <a16:creationId xmlns:a16="http://schemas.microsoft.com/office/drawing/2014/main" id="{1793245C-D5E3-8852-7EAE-F7B1367F2B9C}"/>
+              </a:ext>
+            </a:extLst>
+          </p:cNvPr>
+          <p:cNvSpPr txBox="1"/>
+          <p:nvPr/>
+        </p:nvSpPr>
+        <p:spPr>
+          <a:xfrm>
+            <a:off x="9008393" y="6229257"/>
+            <a:ext cx="1125416" cy="211387"/>
+          </a:xfrm>
+          <a:prstGeom prst="rect">
+            <a:avLst/>
+          </a:prstGeom>
+        </p:spPr>
+        <p:txBody>
+          <a:bodyPr wrap="square" lIns="0" tIns="0" rIns="0" bIns="0" rtlCol="0">
+            <a:noAutofit/>
+          </a:bodyPr>
+          <a:lstStyle/>
+          <a:p>
+            <a:pPr marL="0" indent="0">
+              <a:buFont typeface="Arial" pitchFamily="34" charset="0"/>
+              <a:buNone/>
+            </a:pPr>
+            <a:r>
+              <a:rPr lang="en-US" sz="1200" b="1" dirty="0">
+                <a:latin typeface="Vodafone Rg" pitchFamily="34" charset="0"/>
+              </a:rPr>
+              <a:t>VNET 4</a:t>
+            </a:r>
+          </a:p>
+        </p:txBody>
+      </p:sp>
+      <p:sp>
+        <p:nvSpPr>
+          <p:cNvPr id="102" name="TextBox 101">
+            <a:extLst>
+              <a:ext uri="{FF2B5EF4-FFF2-40B4-BE49-F238E27FC236}">
+                <a16:creationId xmlns:a16="http://schemas.microsoft.com/office/drawing/2014/main" id="{996BC879-E56F-631D-43E9-85A0B640002C}"/>
+              </a:ext>
+            </a:extLst>
+          </p:cNvPr>
+          <p:cNvSpPr txBox="1"/>
+          <p:nvPr/>
+        </p:nvSpPr>
+        <p:spPr>
+          <a:xfrm>
+            <a:off x="839136" y="576206"/>
+            <a:ext cx="2460945" cy="239885"/>
+          </a:xfrm>
+          <a:prstGeom prst="rect">
+            <a:avLst/>
+          </a:prstGeom>
+        </p:spPr>
+        <p:txBody>
+          <a:bodyPr wrap="square" lIns="0" tIns="0" rIns="0" bIns="0" rtlCol="0">
+            <a:noAutofit/>
+          </a:bodyPr>
+          <a:lstStyle/>
+          <a:p>
+            <a:pPr marL="0" indent="0">
+              <a:buFont typeface="Arial" pitchFamily="34" charset="0"/>
+              <a:buNone/>
+            </a:pPr>
+            <a:r>
+              <a:rPr lang="en-US" b="1" dirty="0">
+                <a:latin typeface="Vodafone Rg" pitchFamily="34" charset="0"/>
+              </a:rPr>
+              <a:t>UK South Azure Region</a:t>
+            </a:r>
+          </a:p>
+        </p:txBody>
+      </p:sp>
+      <p:sp>
+        <p:nvSpPr>
+          <p:cNvPr id="103" name="TextBox 102">
+            <a:extLst>
+              <a:ext uri="{FF2B5EF4-FFF2-40B4-BE49-F238E27FC236}">
+                <a16:creationId xmlns:a16="http://schemas.microsoft.com/office/drawing/2014/main" id="{25D24788-ACBC-F322-E4E6-732A25C09E9C}"/>
+              </a:ext>
+            </a:extLst>
+          </p:cNvPr>
+          <p:cNvSpPr txBox="1"/>
+          <p:nvPr/>
+        </p:nvSpPr>
+        <p:spPr>
+          <a:xfrm>
+            <a:off x="145734" y="3721537"/>
+            <a:ext cx="1417801" cy="94306"/>
+          </a:xfrm>
+          <a:prstGeom prst="rect">
+            <a:avLst/>
+          </a:prstGeom>
+        </p:spPr>
+        <p:txBody>
+          <a:bodyPr wrap="square" lIns="0" tIns="0" rIns="0" bIns="0" rtlCol="0">
+            <a:noAutofit/>
+          </a:bodyPr>
+          <a:lstStyle/>
+          <a:p>
+            <a:pPr marL="0" indent="0">
+              <a:buFont typeface="Arial" pitchFamily="34" charset="0"/>
+              <a:buNone/>
+            </a:pPr>
+            <a:r>
+              <a:rPr lang="en-US" sz="1400" b="1" dirty="0">
+                <a:latin typeface="Vodafone Rg" pitchFamily="34" charset="0"/>
+              </a:rPr>
+              <a:t>ON-PREM DC SITE</a:t>
+            </a:r>
+          </a:p>
+        </p:txBody>
+      </p:sp>
+      <p:pic>
+        <p:nvPicPr>
+          <p:cNvPr id="104" name="Picture 103">
+            <a:extLst>
+              <a:ext uri="{FF2B5EF4-FFF2-40B4-BE49-F238E27FC236}">
+                <a16:creationId xmlns:a16="http://schemas.microsoft.com/office/drawing/2014/main" id="{C50849AD-53DC-7AF5-F249-CE68B6EC3F90}"/>
+              </a:ext>
+            </a:extLst>
+          </p:cNvPr>
+          <p:cNvPicPr>
+            <a:picLocks noChangeAspect="1"/>
+          </p:cNvPicPr>
+          <p:nvPr/>
+        </p:nvPicPr>
+        <p:blipFill>
+          <a:blip r:embed="rId9"/>
+          <a:stretch>
+            <a:fillRect/>
+          </a:stretch>
+        </p:blipFill>
+        <p:spPr>
+          <a:xfrm>
+            <a:off x="5908118" y="3838625"/>
+            <a:ext cx="1225550" cy="641350"/>
+          </a:xfrm>
+          <a:prstGeom prst="rect">
+            <a:avLst/>
+          </a:prstGeom>
+        </p:spPr>
+      </p:pic>
+      <p:pic>
+        <p:nvPicPr>
+          <p:cNvPr id="105" name="Picture 104">
+            <a:extLst>
+              <a:ext uri="{FF2B5EF4-FFF2-40B4-BE49-F238E27FC236}">
+                <a16:creationId xmlns:a16="http://schemas.microsoft.com/office/drawing/2014/main" id="{858193CD-6B35-820D-F384-DF75F21C4741}"/>
+              </a:ext>
+            </a:extLst>
+          </p:cNvPr>
+          <p:cNvPicPr>
+            <a:picLocks noChangeAspect="1"/>
+          </p:cNvPicPr>
+          <p:nvPr/>
+        </p:nvPicPr>
+        <p:blipFill>
+          <a:blip r:embed="rId9"/>
+          <a:stretch>
+            <a:fillRect/>
+          </a:stretch>
+        </p:blipFill>
+        <p:spPr>
+          <a:xfrm>
+            <a:off x="9279448" y="3999518"/>
+            <a:ext cx="1225550" cy="641350"/>
+          </a:xfrm>
+          <a:prstGeom prst="rect">
+            <a:avLst/>
+          </a:prstGeom>
+        </p:spPr>
+      </p:pic>
+      <p:sp>
+        <p:nvSpPr>
+          <p:cNvPr id="107" name="TextBox 106">
+            <a:extLst>
+              <a:ext uri="{FF2B5EF4-FFF2-40B4-BE49-F238E27FC236}">
+                <a16:creationId xmlns:a16="http://schemas.microsoft.com/office/drawing/2014/main" id="{33A264BE-31E0-2ED6-AB19-2587CAAF6EB5}"/>
+              </a:ext>
+            </a:extLst>
+          </p:cNvPr>
+          <p:cNvSpPr txBox="1"/>
+          <p:nvPr/>
+        </p:nvSpPr>
+        <p:spPr>
+          <a:xfrm>
+            <a:off x="4823882" y="1489738"/>
+            <a:ext cx="1682979" cy="171198"/>
+          </a:xfrm>
+          <a:prstGeom prst="rect">
+            <a:avLst/>
+          </a:prstGeom>
+        </p:spPr>
+        <p:txBody>
+          <a:bodyPr wrap="square" lIns="0" tIns="0" rIns="0" bIns="0" rtlCol="0">
+            <a:noAutofit/>
+          </a:bodyPr>
+          <a:lstStyle/>
+          <a:p>
+            <a:pPr marL="0" indent="0">
+              <a:buFont typeface="Arial" pitchFamily="34" charset="0"/>
+              <a:buNone/>
+            </a:pPr>
+            <a:r>
+              <a:rPr lang="en-US" sz="1200" b="1" dirty="0">
+                <a:latin typeface="Vodafone Rg" pitchFamily="34" charset="0"/>
+              </a:rPr>
+              <a:t>IPSEC + BGP</a:t>
+            </a:r>
+          </a:p>
+        </p:txBody>
+      </p:sp>
+      <p:sp>
+        <p:nvSpPr>
+          <p:cNvPr id="109" name="TextBox 108">
+            <a:extLst>
+              <a:ext uri="{FF2B5EF4-FFF2-40B4-BE49-F238E27FC236}">
+                <a16:creationId xmlns:a16="http://schemas.microsoft.com/office/drawing/2014/main" id="{A75A1728-5FB7-1D7C-F8EA-389A3FF84BA4}"/>
+              </a:ext>
+            </a:extLst>
+          </p:cNvPr>
+          <p:cNvSpPr txBox="1"/>
+          <p:nvPr/>
+        </p:nvSpPr>
+        <p:spPr>
+          <a:xfrm>
+            <a:off x="4859839" y="3317758"/>
+            <a:ext cx="1682979" cy="171198"/>
+          </a:xfrm>
+          <a:prstGeom prst="rect">
+            <a:avLst/>
+          </a:prstGeom>
+        </p:spPr>
+        <p:txBody>
+          <a:bodyPr wrap="square" lIns="0" tIns="0" rIns="0" bIns="0" rtlCol="0">
+            <a:noAutofit/>
+          </a:bodyPr>
+          <a:lstStyle/>
+          <a:p>
+            <a:pPr marL="0" indent="0">
+              <a:buFont typeface="Arial" pitchFamily="34" charset="0"/>
+              <a:buNone/>
+            </a:pPr>
+            <a:r>
+              <a:rPr lang="en-US" sz="1200" b="1" dirty="0">
+                <a:latin typeface="Vodafone Rg" pitchFamily="34" charset="0"/>
+              </a:rPr>
+              <a:t>IPSEC + BGP</a:t>
+            </a:r>
+          </a:p>
+        </p:txBody>
+      </p:sp>
     </p:spTree>
     <p:extLst>
       <p:ext uri="{BB962C8B-B14F-4D97-AF65-F5344CB8AC3E}">
@@ -14215,7 +16074,7 @@
 </p:sld>
 </file>
 
-<file path=ppt/slides/slide4.xml><?xml version="1.0" encoding="utf-8"?>
+<file path=ppt/slides/slide5.xml><?xml version="1.0" encoding="utf-8"?>
 <p:sld xmlns:a="http://schemas.openxmlformats.org/drawingml/2006/main" xmlns:r="http://schemas.openxmlformats.org/officeDocument/2006/relationships" xmlns:p="http://schemas.openxmlformats.org/presentationml/2006/main">
   <p:cSld>
     <p:spTree>
@@ -14223,7 +16082,7 @@
         <p:cNvPr id="1" name="">
           <a:extLst>
             <a:ext uri="{FF2B5EF4-FFF2-40B4-BE49-F238E27FC236}">
-              <a16:creationId xmlns:a16="http://schemas.microsoft.com/office/drawing/2014/main" id="{15846AA1-9378-99C5-A511-BA13E5E33806}"/>
+              <a16:creationId xmlns:a16="http://schemas.microsoft.com/office/drawing/2014/main" id="{600C1BDE-C257-A428-6EDC-C57E5EC8431F}"/>
             </a:ext>
           </a:extLst>
         </p:cNvPr>
@@ -14240,10 +16099,10 @@
       </p:grpSpPr>
       <p:sp>
         <p:nvSpPr>
-          <p:cNvPr id="29" name="Rectangle 28">
+          <p:cNvPr id="78" name="Rectangle 77">
             <a:extLst>
               <a:ext uri="{FF2B5EF4-FFF2-40B4-BE49-F238E27FC236}">
-                <a16:creationId xmlns:a16="http://schemas.microsoft.com/office/drawing/2014/main" id="{71047ED1-FDB0-F3CD-65D7-574D4675AA21}"/>
+                <a16:creationId xmlns:a16="http://schemas.microsoft.com/office/drawing/2014/main" id="{D1D9EC0F-33B2-F858-543B-A1D0BD29311D}"/>
               </a:ext>
             </a:extLst>
           </p:cNvPr>
@@ -14252,8 +16111,8 @@
         </p:nvSpPr>
         <p:spPr>
           <a:xfrm>
-            <a:off x="77001" y="916417"/>
-            <a:ext cx="4263839" cy="3144052"/>
+            <a:off x="80039" y="914120"/>
+            <a:ext cx="10661267" cy="5676541"/>
           </a:xfrm>
           <a:prstGeom prst="rect">
             <a:avLst/>
@@ -14314,10 +16173,155 @@
       </p:sp>
       <p:sp>
         <p:nvSpPr>
+          <p:cNvPr id="74" name="Rectangle 73">
+            <a:extLst>
+              <a:ext uri="{FF2B5EF4-FFF2-40B4-BE49-F238E27FC236}">
+                <a16:creationId xmlns:a16="http://schemas.microsoft.com/office/drawing/2014/main" id="{94AA1993-30C4-40C4-E299-CBBA927E4F05}"/>
+              </a:ext>
+            </a:extLst>
+          </p:cNvPr>
+          <p:cNvSpPr/>
+          <p:nvPr/>
+        </p:nvSpPr>
+        <p:spPr>
+          <a:xfrm>
+            <a:off x="80038" y="1058380"/>
+            <a:ext cx="1599575" cy="2905758"/>
+          </a:xfrm>
+          <a:prstGeom prst="rect">
+            <a:avLst/>
+          </a:prstGeom>
+          <a:solidFill>
+            <a:srgbClr val="00B0F0"/>
+          </a:solidFill>
+          <a:ln w="25400" cap="flat" cmpd="sng" algn="ctr">
+            <a:noFill/>
+            <a:prstDash val="solid"/>
+          </a:ln>
+          <a:effectLst/>
+        </p:spPr>
+        <p:style>
+          <a:lnRef idx="2">
+            <a:scrgbClr r="0" g="0" b="0"/>
+          </a:lnRef>
+          <a:fillRef idx="1">
+            <a:scrgbClr r="0" g="0" b="0"/>
+          </a:fillRef>
+          <a:effectRef idx="0">
+            <a:scrgbClr r="0" g="0" b="0"/>
+          </a:effectRef>
+          <a:fontRef idx="minor">
+            <a:schemeClr val="lt1"/>
+          </a:fontRef>
+        </p:style>
+        <p:txBody>
+          <a:bodyPr spcFirstLastPara="0" vert="horz" wrap="square" lIns="6350" tIns="6350" rIns="6350" bIns="6350" numCol="1" spcCol="1270" rtlCol="0" anchor="ctr" anchorCtr="0">
+            <a:noAutofit/>
+          </a:bodyPr>
+          <a:lstStyle/>
+          <a:p>
+            <a:pPr algn="ctr" defTabSz="444500">
+              <a:lnSpc>
+                <a:spcPct val="90000"/>
+              </a:lnSpc>
+              <a:spcBef>
+                <a:spcPct val="0"/>
+              </a:spcBef>
+              <a:spcAft>
+                <a:spcPct val="35000"/>
+              </a:spcAft>
+            </a:pPr>
+            <a:endParaRPr lang="en-US" sz="1050" kern="1200" dirty="0">
+              <a:solidFill>
+                <a:srgbClr val="34342B"/>
+              </a:solidFill>
+              <a:latin typeface="Vodafone Rg" pitchFamily="34" charset="0"/>
+              <a:ea typeface="+mn-ea"/>
+              <a:cs typeface="+mn-cs"/>
+            </a:endParaRPr>
+          </a:p>
+        </p:txBody>
+      </p:sp>
+      <p:sp>
+        <p:nvSpPr>
+          <p:cNvPr id="29" name="Rectangle 28">
+            <a:extLst>
+              <a:ext uri="{FF2B5EF4-FFF2-40B4-BE49-F238E27FC236}">
+                <a16:creationId xmlns:a16="http://schemas.microsoft.com/office/drawing/2014/main" id="{FCDB8E31-8247-21DD-0766-381625732885}"/>
+              </a:ext>
+            </a:extLst>
+          </p:cNvPr>
+          <p:cNvSpPr/>
+          <p:nvPr/>
+        </p:nvSpPr>
+        <p:spPr>
+          <a:xfrm>
+            <a:off x="2497054" y="948219"/>
+            <a:ext cx="1790602" cy="2977839"/>
+          </a:xfrm>
+          <a:prstGeom prst="rect">
+            <a:avLst/>
+          </a:prstGeom>
+          <a:solidFill>
+            <a:schemeClr val="accent5">
+              <a:lumMod val="20000"/>
+              <a:lumOff val="80000"/>
+            </a:schemeClr>
+          </a:solidFill>
+          <a:ln w="25400" cap="flat" cmpd="sng" algn="ctr">
+            <a:noFill/>
+            <a:prstDash val="solid"/>
+          </a:ln>
+          <a:effectLst/>
+        </p:spPr>
+        <p:style>
+          <a:lnRef idx="2">
+            <a:scrgbClr r="0" g="0" b="0"/>
+          </a:lnRef>
+          <a:fillRef idx="1">
+            <a:scrgbClr r="0" g="0" b="0"/>
+          </a:fillRef>
+          <a:effectRef idx="0">
+            <a:scrgbClr r="0" g="0" b="0"/>
+          </a:effectRef>
+          <a:fontRef idx="minor">
+            <a:schemeClr val="lt1"/>
+          </a:fontRef>
+        </p:style>
+        <p:txBody>
+          <a:bodyPr spcFirstLastPara="0" vert="horz" wrap="square" lIns="6350" tIns="6350" rIns="6350" bIns="6350" numCol="1" spcCol="1270" rtlCol="0" anchor="ctr" anchorCtr="0">
+            <a:noAutofit/>
+          </a:bodyPr>
+          <a:lstStyle/>
+          <a:p>
+            <a:pPr algn="ctr" defTabSz="444500">
+              <a:lnSpc>
+                <a:spcPct val="90000"/>
+              </a:lnSpc>
+              <a:spcBef>
+                <a:spcPct val="0"/>
+              </a:spcBef>
+              <a:spcAft>
+                <a:spcPct val="35000"/>
+              </a:spcAft>
+            </a:pPr>
+            <a:endParaRPr lang="en-US" sz="1050" kern="1200" dirty="0">
+              <a:solidFill>
+                <a:srgbClr val="34342B"/>
+              </a:solidFill>
+              <a:latin typeface="Vodafone Rg" pitchFamily="34" charset="0"/>
+              <a:ea typeface="+mn-ea"/>
+              <a:cs typeface="+mn-cs"/>
+            </a:endParaRPr>
+          </a:p>
+        </p:txBody>
+      </p:sp>
+      <p:sp>
+        <p:nvSpPr>
           <p:cNvPr id="92" name="Title 1">
             <a:extLst>
               <a:ext uri="{FF2B5EF4-FFF2-40B4-BE49-F238E27FC236}">
-                <a16:creationId xmlns:a16="http://schemas.microsoft.com/office/drawing/2014/main" id="{44D98E6B-4FFC-4C3E-5106-903ABE55295B}"/>
+                <a16:creationId xmlns:a16="http://schemas.microsoft.com/office/drawing/2014/main" id="{C8BB6A4B-DE9E-0357-F09C-56199B4EAF50}"/>
               </a:ext>
             </a:extLst>
           </p:cNvPr>
@@ -14328,8 +16332,8 @@
         </p:nvSpPr>
         <p:spPr bwMode="auto">
           <a:xfrm>
-            <a:off x="336559" y="266712"/>
-            <a:ext cx="11099227" cy="407149"/>
+            <a:off x="324474" y="139923"/>
+            <a:ext cx="10816592" cy="367827"/>
           </a:xfrm>
           <a:prstGeom prst="rect">
             <a:avLst/>
@@ -14452,7 +16456,7 @@
                 <a:cs typeface="+mj-cs"/>
                 <a:sym typeface="Webdings" panose="05030102010509060703" pitchFamily="18" charset="2"/>
               </a:rPr>
-              <a:t>  | North-South &amp; East-West Connectivity | Adding 3rd spoke</a:t>
+              <a:t>  | North-South &amp; East-West Connectivity | Spoke-3 Addition</a:t>
             </a:r>
             <a:endParaRPr kumimoji="0" lang="en-GB" sz="2400" b="1" i="0" u="none" strike="noStrike" kern="1200" cap="none" spc="0" normalizeH="0" baseline="0" noProof="0" dirty="0">
               <a:ln>
@@ -14473,10 +16477,199 @@
       </p:sp>
       <p:sp>
         <p:nvSpPr>
+          <p:cNvPr id="2" name="Slide Number Placeholder 1">
+            <a:extLst>
+              <a:ext uri="{FF2B5EF4-FFF2-40B4-BE49-F238E27FC236}">
+                <a16:creationId xmlns:a16="http://schemas.microsoft.com/office/drawing/2014/main" id="{B458EED0-3187-F2CD-0E02-B67E66B651C7}"/>
+              </a:ext>
+            </a:extLst>
+          </p:cNvPr>
+          <p:cNvSpPr txBox="1">
+            <a:spLocks/>
+          </p:cNvSpPr>
+          <p:nvPr/>
+        </p:nvSpPr>
+        <p:spPr>
+          <a:xfrm>
+            <a:off x="5745079" y="6591288"/>
+            <a:ext cx="2743200" cy="126789"/>
+          </a:xfrm>
+          <a:prstGeom prst="rect">
+            <a:avLst/>
+          </a:prstGeom>
+        </p:spPr>
+        <p:txBody>
+          <a:bodyPr/>
+          <a:lstStyle>
+            <a:defPPr>
+              <a:defRPr lang="en-US"/>
+            </a:defPPr>
+            <a:lvl1pPr marL="0" algn="l" defTabSz="914400" rtl="0" eaLnBrk="1" latinLnBrk="0" hangingPunct="1">
+              <a:defRPr sz="1800" kern="1200">
+                <a:solidFill>
+                  <a:schemeClr val="tx1"/>
+                </a:solidFill>
+                <a:latin typeface="+mn-lt"/>
+                <a:ea typeface="+mn-ea"/>
+                <a:cs typeface="+mn-cs"/>
+              </a:defRPr>
+            </a:lvl1pPr>
+            <a:lvl2pPr marL="457200" algn="l" defTabSz="914400" rtl="0" eaLnBrk="1" latinLnBrk="0" hangingPunct="1">
+              <a:defRPr sz="1800" kern="1200">
+                <a:solidFill>
+                  <a:schemeClr val="tx1"/>
+                </a:solidFill>
+                <a:latin typeface="+mn-lt"/>
+                <a:ea typeface="+mn-ea"/>
+                <a:cs typeface="+mn-cs"/>
+              </a:defRPr>
+            </a:lvl2pPr>
+            <a:lvl3pPr marL="914400" algn="l" defTabSz="914400" rtl="0" eaLnBrk="1" latinLnBrk="0" hangingPunct="1">
+              <a:defRPr sz="1800" kern="1200">
+                <a:solidFill>
+                  <a:schemeClr val="tx1"/>
+                </a:solidFill>
+                <a:latin typeface="+mn-lt"/>
+                <a:ea typeface="+mn-ea"/>
+                <a:cs typeface="+mn-cs"/>
+              </a:defRPr>
+            </a:lvl3pPr>
+            <a:lvl4pPr marL="1371600" algn="l" defTabSz="914400" rtl="0" eaLnBrk="1" latinLnBrk="0" hangingPunct="1">
+              <a:defRPr sz="1800" kern="1200">
+                <a:solidFill>
+                  <a:schemeClr val="tx1"/>
+                </a:solidFill>
+                <a:latin typeface="+mn-lt"/>
+                <a:ea typeface="+mn-ea"/>
+                <a:cs typeface="+mn-cs"/>
+              </a:defRPr>
+            </a:lvl4pPr>
+            <a:lvl5pPr marL="1828800" algn="l" defTabSz="914400" rtl="0" eaLnBrk="1" latinLnBrk="0" hangingPunct="1">
+              <a:defRPr sz="1800" kern="1200">
+                <a:solidFill>
+                  <a:schemeClr val="tx1"/>
+                </a:solidFill>
+                <a:latin typeface="+mn-lt"/>
+                <a:ea typeface="+mn-ea"/>
+                <a:cs typeface="+mn-cs"/>
+              </a:defRPr>
+            </a:lvl5pPr>
+            <a:lvl6pPr marL="2286000" algn="l" defTabSz="914400" rtl="0" eaLnBrk="1" latinLnBrk="0" hangingPunct="1">
+              <a:defRPr sz="1800" kern="1200">
+                <a:solidFill>
+                  <a:schemeClr val="tx1"/>
+                </a:solidFill>
+                <a:latin typeface="+mn-lt"/>
+                <a:ea typeface="+mn-ea"/>
+                <a:cs typeface="+mn-cs"/>
+              </a:defRPr>
+            </a:lvl6pPr>
+            <a:lvl7pPr marL="2743200" algn="l" defTabSz="914400" rtl="0" eaLnBrk="1" latinLnBrk="0" hangingPunct="1">
+              <a:defRPr sz="1800" kern="1200">
+                <a:solidFill>
+                  <a:schemeClr val="tx1"/>
+                </a:solidFill>
+                <a:latin typeface="+mn-lt"/>
+                <a:ea typeface="+mn-ea"/>
+                <a:cs typeface="+mn-cs"/>
+              </a:defRPr>
+            </a:lvl7pPr>
+            <a:lvl8pPr marL="3200400" algn="l" defTabSz="914400" rtl="0" eaLnBrk="1" latinLnBrk="0" hangingPunct="1">
+              <a:defRPr sz="1800" kern="1200">
+                <a:solidFill>
+                  <a:schemeClr val="tx1"/>
+                </a:solidFill>
+                <a:latin typeface="+mn-lt"/>
+                <a:ea typeface="+mn-ea"/>
+                <a:cs typeface="+mn-cs"/>
+              </a:defRPr>
+            </a:lvl8pPr>
+            <a:lvl9pPr marL="3657600" algn="l" defTabSz="914400" rtl="0" eaLnBrk="1" latinLnBrk="0" hangingPunct="1">
+              <a:defRPr sz="1800" kern="1200">
+                <a:solidFill>
+                  <a:schemeClr val="tx1"/>
+                </a:solidFill>
+                <a:latin typeface="+mn-lt"/>
+                <a:ea typeface="+mn-ea"/>
+                <a:cs typeface="+mn-cs"/>
+              </a:defRPr>
+            </a:lvl9pPr>
+          </a:lstStyle>
+          <a:p>
+            <a:pPr marL="0" marR="0" lvl="0" indent="0" algn="l" defTabSz="914400" rtl="0" eaLnBrk="1" fontAlgn="auto" latinLnBrk="0" hangingPunct="1">
+              <a:lnSpc>
+                <a:spcPct val="100000"/>
+              </a:lnSpc>
+              <a:spcBef>
+                <a:spcPts val="0"/>
+              </a:spcBef>
+              <a:spcAft>
+                <a:spcPts val="0"/>
+              </a:spcAft>
+              <a:buClrTx/>
+              <a:buSzTx/>
+              <a:buFontTx/>
+              <a:buNone/>
+              <a:tabLst/>
+              <a:defRPr/>
+            </a:pPr>
+            <a:fld id="{BB55D76A-9B6E-CD41-ABBE-F6C938295BAD}" type="slidenum">
+              <a:rPr kumimoji="0" lang="en-US" sz="1000" b="0" i="0" u="none" strike="noStrike" kern="1200" cap="none" spc="0" normalizeH="0" baseline="0" noProof="0" smtClean="0">
+                <a:ln>
+                  <a:noFill/>
+                </a:ln>
+                <a:solidFill>
+                  <a:srgbClr val="000000"/>
+                </a:solidFill>
+                <a:effectLst/>
+                <a:uLnTx/>
+                <a:uFillTx/>
+                <a:latin typeface="Vodafone Rg"/>
+                <a:ea typeface="+mn-ea"/>
+                <a:cs typeface="+mn-cs"/>
+              </a:rPr>
+              <a:pPr marL="0" marR="0" lvl="0" indent="0" algn="l" defTabSz="914400" rtl="0" eaLnBrk="1" fontAlgn="auto" latinLnBrk="0" hangingPunct="1">
+                <a:lnSpc>
+                  <a:spcPct val="100000"/>
+                </a:lnSpc>
+                <a:spcBef>
+                  <a:spcPts val="0"/>
+                </a:spcBef>
+                <a:spcAft>
+                  <a:spcPts val="0"/>
+                </a:spcAft>
+                <a:buClrTx/>
+                <a:buSzTx/>
+                <a:buFontTx/>
+                <a:buNone/>
+                <a:tabLst/>
+                <a:defRPr/>
+              </a:pPr>
+              <a:t>5</a:t>
+            </a:fld>
+            <a:endParaRPr kumimoji="0" lang="en-US" sz="1000" b="0" i="0" u="none" strike="noStrike" kern="1200" cap="none" spc="0" normalizeH="0" baseline="0" noProof="0" dirty="0">
+              <a:ln>
+                <a:noFill/>
+              </a:ln>
+              <a:solidFill>
+                <a:srgbClr val="000000"/>
+              </a:solidFill>
+              <a:effectLst/>
+              <a:uLnTx/>
+              <a:uFillTx/>
+              <a:latin typeface="Vodafone Rg"/>
+              <a:ea typeface="+mn-ea"/>
+              <a:cs typeface="+mn-cs"/>
+            </a:endParaRPr>
+          </a:p>
+        </p:txBody>
+      </p:sp>
+      <p:sp>
+        <p:nvSpPr>
           <p:cNvPr id="5" name="Rectangle 4">
             <a:extLst>
               <a:ext uri="{FF2B5EF4-FFF2-40B4-BE49-F238E27FC236}">
-                <a16:creationId xmlns:a16="http://schemas.microsoft.com/office/drawing/2014/main" id="{B18E7539-2ABD-5391-1B88-1B229AC8B6F1}"/>
+                <a16:creationId xmlns:a16="http://schemas.microsoft.com/office/drawing/2014/main" id="{89553A4D-3E58-841B-F94B-4C6B7871C4BB}"/>
               </a:ext>
             </a:extLst>
           </p:cNvPr>
@@ -14547,7 +16740,7 @@
           <p:cNvPr id="6" name="Rectangle 5">
             <a:extLst>
               <a:ext uri="{FF2B5EF4-FFF2-40B4-BE49-F238E27FC236}">
-                <a16:creationId xmlns:a16="http://schemas.microsoft.com/office/drawing/2014/main" id="{031F3CA6-5048-8E8E-68FD-452D047D7B65}"/>
+                <a16:creationId xmlns:a16="http://schemas.microsoft.com/office/drawing/2014/main" id="{88167062-580E-7BBD-143F-F2CFFF187569}"/>
               </a:ext>
             </a:extLst>
           </p:cNvPr>
@@ -14622,7 +16815,7 @@
           <p:cNvPr id="7" name="Rectangle 6">
             <a:extLst>
               <a:ext uri="{FF2B5EF4-FFF2-40B4-BE49-F238E27FC236}">
-                <a16:creationId xmlns:a16="http://schemas.microsoft.com/office/drawing/2014/main" id="{9F0C49D8-69BB-D0CF-D6D1-7FC127BFECA1}"/>
+                <a16:creationId xmlns:a16="http://schemas.microsoft.com/office/drawing/2014/main" id="{953B8E2A-95C2-2ECD-FB99-A46206171B69}"/>
               </a:ext>
             </a:extLst>
           </p:cNvPr>
@@ -14697,7 +16890,7 @@
           <p:cNvPr id="8" name="Rectangle 7">
             <a:extLst>
               <a:ext uri="{FF2B5EF4-FFF2-40B4-BE49-F238E27FC236}">
-                <a16:creationId xmlns:a16="http://schemas.microsoft.com/office/drawing/2014/main" id="{2E9414DA-8D06-B268-401A-85A7C32499EB}"/>
+                <a16:creationId xmlns:a16="http://schemas.microsoft.com/office/drawing/2014/main" id="{D9256E95-061C-5662-A86E-BEF8F1B982E4}"/>
               </a:ext>
             </a:extLst>
           </p:cNvPr>
@@ -14706,7 +16899,7 @@
         </p:nvSpPr>
         <p:spPr>
           <a:xfrm>
-            <a:off x="8274378" y="1527297"/>
+            <a:off x="8256263" y="1524713"/>
             <a:ext cx="1023185" cy="331177"/>
           </a:xfrm>
           <a:prstGeom prst="rect">
@@ -14772,7 +16965,7 @@
           <p:cNvPr id="9" name="Picture 8">
             <a:extLst>
               <a:ext uri="{FF2B5EF4-FFF2-40B4-BE49-F238E27FC236}">
-                <a16:creationId xmlns:a16="http://schemas.microsoft.com/office/drawing/2014/main" id="{D021268B-966C-886A-0F8F-EF33EB6ADF62}"/>
+                <a16:creationId xmlns:a16="http://schemas.microsoft.com/office/drawing/2014/main" id="{D4AE7210-47E3-223F-2DC1-B3784508596F}"/>
               </a:ext>
             </a:extLst>
           </p:cNvPr>
@@ -14802,7 +16995,7 @@
           <p:cNvPr id="10" name="Graphic 9">
             <a:extLst>
               <a:ext uri="{FF2B5EF4-FFF2-40B4-BE49-F238E27FC236}">
-                <a16:creationId xmlns:a16="http://schemas.microsoft.com/office/drawing/2014/main" id="{CCB0C470-F9DD-765E-F353-46A8482177DC}"/>
+                <a16:creationId xmlns:a16="http://schemas.microsoft.com/office/drawing/2014/main" id="{71A8723A-270B-19FD-9829-A0C3DDB6D82C}"/>
               </a:ext>
             </a:extLst>
           </p:cNvPr>
@@ -14838,7 +17031,7 @@
           <p:cNvPr id="11" name="TextBox 10">
             <a:extLst>
               <a:ext uri="{FF2B5EF4-FFF2-40B4-BE49-F238E27FC236}">
-                <a16:creationId xmlns:a16="http://schemas.microsoft.com/office/drawing/2014/main" id="{94F12148-D774-BFF8-82F7-754CE93722F8}"/>
+                <a16:creationId xmlns:a16="http://schemas.microsoft.com/office/drawing/2014/main" id="{F866F17B-1009-AE7F-4D5C-3C827C7EE711}"/>
               </a:ext>
             </a:extLst>
           </p:cNvPr>
@@ -14878,7 +17071,7 @@
           <p:cNvPr id="12" name="TextBox 11">
             <a:extLst>
               <a:ext uri="{FF2B5EF4-FFF2-40B4-BE49-F238E27FC236}">
-                <a16:creationId xmlns:a16="http://schemas.microsoft.com/office/drawing/2014/main" id="{87532F82-A831-F031-0D78-B352D0379B0B}"/>
+                <a16:creationId xmlns:a16="http://schemas.microsoft.com/office/drawing/2014/main" id="{5E25B512-5C2D-9ABA-6499-F1AC38215281}"/>
               </a:ext>
             </a:extLst>
           </p:cNvPr>
@@ -14918,7 +17111,7 @@
           <p:cNvPr id="14" name="TextBox 13">
             <a:extLst>
               <a:ext uri="{FF2B5EF4-FFF2-40B4-BE49-F238E27FC236}">
-                <a16:creationId xmlns:a16="http://schemas.microsoft.com/office/drawing/2014/main" id="{051CB348-F48D-BCFC-0E6A-E877AF4107FE}"/>
+                <a16:creationId xmlns:a16="http://schemas.microsoft.com/office/drawing/2014/main" id="{4DC73C3A-900B-77A1-A572-917D3B626F87}"/>
               </a:ext>
             </a:extLst>
           </p:cNvPr>
@@ -14958,7 +17151,7 @@
           <p:cNvPr id="15" name="TextBox 14">
             <a:extLst>
               <a:ext uri="{FF2B5EF4-FFF2-40B4-BE49-F238E27FC236}">
-                <a16:creationId xmlns:a16="http://schemas.microsoft.com/office/drawing/2014/main" id="{05FC9F13-3E51-AFC6-261C-1424E551211E}"/>
+                <a16:creationId xmlns:a16="http://schemas.microsoft.com/office/drawing/2014/main" id="{68500105-3498-7D27-7BE9-963DC3AE6660}"/>
               </a:ext>
             </a:extLst>
           </p:cNvPr>
@@ -14967,8 +17160,8 @@
         </p:nvSpPr>
         <p:spPr>
           <a:xfrm>
-            <a:off x="8282245" y="1606878"/>
-            <a:ext cx="1125416" cy="211387"/>
+            <a:off x="8277985" y="1571878"/>
+            <a:ext cx="1074300" cy="108838"/>
           </a:xfrm>
           <a:prstGeom prst="rect">
             <a:avLst/>
@@ -14998,7 +17191,7 @@
           <p:cNvPr id="16" name="Rectangle 15">
             <a:extLst>
               <a:ext uri="{FF2B5EF4-FFF2-40B4-BE49-F238E27FC236}">
-                <a16:creationId xmlns:a16="http://schemas.microsoft.com/office/drawing/2014/main" id="{8D86BECF-B0D7-1509-F8B5-58288FF914D6}"/>
+                <a16:creationId xmlns:a16="http://schemas.microsoft.com/office/drawing/2014/main" id="{F6CB8024-EF38-6932-7E5D-3686399698AF}"/>
               </a:ext>
             </a:extLst>
           </p:cNvPr>
@@ -15007,8 +17200,8 @@
         </p:nvSpPr>
         <p:spPr>
           <a:xfrm>
-            <a:off x="1400882" y="1296701"/>
-            <a:ext cx="2388603" cy="1037660"/>
+            <a:off x="3092515" y="1510248"/>
+            <a:ext cx="530030" cy="659852"/>
           </a:xfrm>
           <a:prstGeom prst="rect">
             <a:avLst/>
@@ -15069,7 +17262,7 @@
           <p:cNvPr id="17" name="TextBox 16">
             <a:extLst>
               <a:ext uri="{FF2B5EF4-FFF2-40B4-BE49-F238E27FC236}">
-                <a16:creationId xmlns:a16="http://schemas.microsoft.com/office/drawing/2014/main" id="{9E851C07-100D-A123-EE87-C2A40181C217}"/>
+                <a16:creationId xmlns:a16="http://schemas.microsoft.com/office/drawing/2014/main" id="{27B1962B-0548-CA23-273E-4C98D76610E9}"/>
               </a:ext>
             </a:extLst>
           </p:cNvPr>
@@ -15078,7 +17271,7 @@
         </p:nvSpPr>
         <p:spPr>
           <a:xfrm>
-            <a:off x="202187" y="905858"/>
+            <a:off x="2831363" y="1103260"/>
             <a:ext cx="1125416" cy="211387"/>
           </a:xfrm>
           <a:prstGeom prst="rect">
@@ -15096,7 +17289,7 @@
               <a:buNone/>
             </a:pPr>
             <a:r>
-              <a:rPr lang="en-US" sz="1100" dirty="0">
+              <a:rPr lang="en-US" sz="1200" b="1" dirty="0">
                 <a:latin typeface="Vodafone Rg" pitchFamily="34" charset="0"/>
               </a:rPr>
               <a:t>Connectivity Hub</a:t>
@@ -15109,7 +17302,7 @@
           <p:cNvPr id="18" name="Picture 17">
             <a:extLst>
               <a:ext uri="{FF2B5EF4-FFF2-40B4-BE49-F238E27FC236}">
-                <a16:creationId xmlns:a16="http://schemas.microsoft.com/office/drawing/2014/main" id="{BD855CAF-398A-F6A3-583B-2C05B2918909}"/>
+                <a16:creationId xmlns:a16="http://schemas.microsoft.com/office/drawing/2014/main" id="{47AE167C-0ED4-9D1B-2E2C-99D30A26A1A6}"/>
               </a:ext>
             </a:extLst>
           </p:cNvPr>
@@ -15134,64 +17327,12 @@
           </a:prstGeom>
         </p:spPr>
       </p:pic>
-      <p:sp>
-        <p:nvSpPr>
-          <p:cNvPr id="19" name="TextBox 18">
-            <a:extLst>
-              <a:ext uri="{FF2B5EF4-FFF2-40B4-BE49-F238E27FC236}">
-                <a16:creationId xmlns:a16="http://schemas.microsoft.com/office/drawing/2014/main" id="{3E9488D1-31E1-91FA-4390-98FFF9139D03}"/>
-              </a:ext>
-            </a:extLst>
-          </p:cNvPr>
-          <p:cNvSpPr txBox="1"/>
-          <p:nvPr/>
-        </p:nvSpPr>
-        <p:spPr>
-          <a:xfrm>
-            <a:off x="1529862" y="1482785"/>
-            <a:ext cx="1351084" cy="670960"/>
-          </a:xfrm>
-          <a:prstGeom prst="rect">
-            <a:avLst/>
-          </a:prstGeom>
-        </p:spPr>
-        <p:txBody>
-          <a:bodyPr wrap="square" lIns="0" tIns="0" rIns="0" bIns="0" rtlCol="0">
-            <a:noAutofit/>
-          </a:bodyPr>
-          <a:lstStyle/>
-          <a:p>
-            <a:pPr marL="0" indent="0">
-              <a:buFont typeface="Arial" pitchFamily="34" charset="0"/>
-              <a:buNone/>
-            </a:pPr>
-            <a:r>
-              <a:rPr lang="en-US" sz="1000" dirty="0">
-                <a:latin typeface="Vodafone Rg" pitchFamily="34" charset="0"/>
-              </a:rPr>
-              <a:t>SDWAN connectivity has been mimicked by using VNG &amp; creating  BGP-</a:t>
-            </a:r>
-            <a:r>
-              <a:rPr lang="en-US" sz="1000" dirty="0" err="1">
-                <a:latin typeface="Vodafone Rg" pitchFamily="34" charset="0"/>
-              </a:rPr>
-              <a:t>IPSec</a:t>
-            </a:r>
-            <a:r>
-              <a:rPr lang="en-US" sz="1000" dirty="0">
-                <a:latin typeface="Vodafone Rg" pitchFamily="34" charset="0"/>
-              </a:rPr>
-              <a:t> tunnel</a:t>
-            </a:r>
-          </a:p>
-        </p:txBody>
-      </p:sp>
       <p:grpSp>
         <p:nvGrpSpPr>
           <p:cNvPr id="24" name="Group 23">
             <a:extLst>
               <a:ext uri="{FF2B5EF4-FFF2-40B4-BE49-F238E27FC236}">
-                <a16:creationId xmlns:a16="http://schemas.microsoft.com/office/drawing/2014/main" id="{83421F1B-FEAA-E9D7-8A19-5A9DD108937A}"/>
+                <a16:creationId xmlns:a16="http://schemas.microsoft.com/office/drawing/2014/main" id="{15D80DC6-8A7C-5129-4406-017A74C3B8A2}"/>
               </a:ext>
             </a:extLst>
           </p:cNvPr>
@@ -15211,7 +17352,7 @@
             <p:cNvPr id="22" name="Picture 21">
               <a:extLst>
                 <a:ext uri="{FF2B5EF4-FFF2-40B4-BE49-F238E27FC236}">
-                  <a16:creationId xmlns:a16="http://schemas.microsoft.com/office/drawing/2014/main" id="{CBB45647-E636-2252-57FE-0BA06CDC9B3C}"/>
+                  <a16:creationId xmlns:a16="http://schemas.microsoft.com/office/drawing/2014/main" id="{5100F74F-50EA-A0D3-590F-8B82E75DF1AB}"/>
                 </a:ext>
               </a:extLst>
             </p:cNvPr>
@@ -15249,7 +17390,7 @@
             <p:cNvPr id="23" name="Arrow: Bent 22">
               <a:extLst>
                 <a:ext uri="{FF2B5EF4-FFF2-40B4-BE49-F238E27FC236}">
-                  <a16:creationId xmlns:a16="http://schemas.microsoft.com/office/drawing/2014/main" id="{F1AB5ADD-E60F-B3C8-8AB8-D916FE7C5228}"/>
+                  <a16:creationId xmlns:a16="http://schemas.microsoft.com/office/drawing/2014/main" id="{7EB1DB9B-8E32-A132-F054-83100B3A757E}"/>
                 </a:ext>
               </a:extLst>
             </p:cNvPr>
@@ -15321,7 +17462,7 @@
           <p:cNvPr id="43" name="Group 42">
             <a:extLst>
               <a:ext uri="{FF2B5EF4-FFF2-40B4-BE49-F238E27FC236}">
-                <a16:creationId xmlns:a16="http://schemas.microsoft.com/office/drawing/2014/main" id="{2277AB26-7CF3-60AC-876B-7ABD070C6766}"/>
+                <a16:creationId xmlns:a16="http://schemas.microsoft.com/office/drawing/2014/main" id="{727AF875-EDFD-FE30-B668-AAE4B1C0624D}"/>
               </a:ext>
             </a:extLst>
           </p:cNvPr>
@@ -15330,7 +17471,7 @@
         </p:nvGrpSpPr>
         <p:grpSpPr>
           <a:xfrm>
-            <a:off x="1940269" y="4783271"/>
+            <a:off x="903757" y="4820561"/>
             <a:ext cx="3159370" cy="1703075"/>
             <a:chOff x="4220482" y="4783271"/>
             <a:chExt cx="3159370" cy="1703075"/>
@@ -15341,7 +17482,7 @@
             <p:cNvPr id="25" name="Rectangle 24">
               <a:extLst>
                 <a:ext uri="{FF2B5EF4-FFF2-40B4-BE49-F238E27FC236}">
-                  <a16:creationId xmlns:a16="http://schemas.microsoft.com/office/drawing/2014/main" id="{8E6DFE8C-5503-6B89-61CD-2EFA64747C77}"/>
+                  <a16:creationId xmlns:a16="http://schemas.microsoft.com/office/drawing/2014/main" id="{C866E812-42EB-0C05-6C8E-9C5F187CE42A}"/>
                 </a:ext>
               </a:extLst>
             </p:cNvPr>
@@ -15415,7 +17556,7 @@
             <p:cNvPr id="26" name="Rectangle 25">
               <a:extLst>
                 <a:ext uri="{FF2B5EF4-FFF2-40B4-BE49-F238E27FC236}">
-                  <a16:creationId xmlns:a16="http://schemas.microsoft.com/office/drawing/2014/main" id="{9DAF83D8-911E-C0C9-8998-B24A5EA03505}"/>
+                  <a16:creationId xmlns:a16="http://schemas.microsoft.com/office/drawing/2014/main" id="{3AC259D2-335A-F40B-7FC7-A542B675702D}"/>
                 </a:ext>
               </a:extLst>
             </p:cNvPr>
@@ -15486,7 +17627,7 @@
             <p:cNvPr id="28" name="Rectangle 27">
               <a:extLst>
                 <a:ext uri="{FF2B5EF4-FFF2-40B4-BE49-F238E27FC236}">
-                  <a16:creationId xmlns:a16="http://schemas.microsoft.com/office/drawing/2014/main" id="{84FB2705-DA23-02CB-4E79-38145F912C22}"/>
+                  <a16:creationId xmlns:a16="http://schemas.microsoft.com/office/drawing/2014/main" id="{1C4BAEBA-05CB-82F3-8A8A-FF42D2DE4828}"/>
                 </a:ext>
               </a:extLst>
             </p:cNvPr>
@@ -15561,7 +17702,7 @@
             <p:cNvPr id="33" name="TextBox 32">
               <a:extLst>
                 <a:ext uri="{FF2B5EF4-FFF2-40B4-BE49-F238E27FC236}">
-                  <a16:creationId xmlns:a16="http://schemas.microsoft.com/office/drawing/2014/main" id="{0586656B-2B6B-7E15-00DD-3830E4043D2E}"/>
+                  <a16:creationId xmlns:a16="http://schemas.microsoft.com/office/drawing/2014/main" id="{F5820A4A-7CA7-5912-9417-8C8C41C91D7E}"/>
                 </a:ext>
               </a:extLst>
             </p:cNvPr>
@@ -15570,8 +17711,8 @@
           </p:nvSpPr>
           <p:spPr>
             <a:xfrm>
-              <a:off x="4361364" y="6254448"/>
-              <a:ext cx="1125416" cy="231898"/>
+              <a:off x="4378406" y="5966561"/>
+              <a:ext cx="1682979" cy="171198"/>
             </a:xfrm>
             <a:prstGeom prst="rect">
               <a:avLst/>
@@ -15588,10 +17729,10 @@
                 <a:buNone/>
               </a:pPr>
               <a:r>
-                <a:rPr lang="en-US" sz="1000" dirty="0">
+                <a:rPr lang="en-US" sz="1200" b="1" dirty="0">
                   <a:latin typeface="Vodafone Rg" pitchFamily="34" charset="0"/>
                 </a:rPr>
-                <a:t>Test-env-spoke1-vnet</a:t>
+                <a:t>Local Market- Spoke-1</a:t>
               </a:r>
             </a:p>
           </p:txBody>
@@ -15601,7 +17742,7 @@
             <p:cNvPr id="34" name="TextBox 33">
               <a:extLst>
                 <a:ext uri="{FF2B5EF4-FFF2-40B4-BE49-F238E27FC236}">
-                  <a16:creationId xmlns:a16="http://schemas.microsoft.com/office/drawing/2014/main" id="{8C16805E-6D4E-8C3D-0546-0EA3E66777C7}"/>
+                  <a16:creationId xmlns:a16="http://schemas.microsoft.com/office/drawing/2014/main" id="{39B36072-B477-84A4-3E2A-E3A31547E63E}"/>
                 </a:ext>
               </a:extLst>
             </p:cNvPr>
@@ -15641,7 +17782,7 @@
             <p:cNvPr id="35" name="TextBox 34">
               <a:extLst>
                 <a:ext uri="{FF2B5EF4-FFF2-40B4-BE49-F238E27FC236}">
-                  <a16:creationId xmlns:a16="http://schemas.microsoft.com/office/drawing/2014/main" id="{CCFAA573-A1D0-29C8-CA23-2FA1BC0CFF1B}"/>
+                  <a16:creationId xmlns:a16="http://schemas.microsoft.com/office/drawing/2014/main" id="{0B60C25B-B39C-1E64-3C6B-C6190433BB60}"/>
                 </a:ext>
               </a:extLst>
             </p:cNvPr>
@@ -15681,7 +17822,7 @@
             <p:cNvPr id="37" name="Group 36">
               <a:extLst>
                 <a:ext uri="{FF2B5EF4-FFF2-40B4-BE49-F238E27FC236}">
-                  <a16:creationId xmlns:a16="http://schemas.microsoft.com/office/drawing/2014/main" id="{A6971663-ECA4-466E-F497-7530DEDD375D}"/>
+                  <a16:creationId xmlns:a16="http://schemas.microsoft.com/office/drawing/2014/main" id="{C8BA6843-A730-8D4A-B27D-B9B1771D9923}"/>
                 </a:ext>
               </a:extLst>
             </p:cNvPr>
@@ -15701,7 +17842,7 @@
               <p:cNvPr id="38" name="Picture 37">
                 <a:extLst>
                   <a:ext uri="{FF2B5EF4-FFF2-40B4-BE49-F238E27FC236}">
-                    <a16:creationId xmlns:a16="http://schemas.microsoft.com/office/drawing/2014/main" id="{A24FA240-41F1-F1A4-2A29-F62033C0A887}"/>
+                    <a16:creationId xmlns:a16="http://schemas.microsoft.com/office/drawing/2014/main" id="{BF790555-0FF9-FBFD-8984-ACA8D3CCF823}"/>
                   </a:ext>
                 </a:extLst>
               </p:cNvPr>
@@ -15739,7 +17880,7 @@
               <p:cNvPr id="39" name="Arrow: Bent 38">
                 <a:extLst>
                   <a:ext uri="{FF2B5EF4-FFF2-40B4-BE49-F238E27FC236}">
-                    <a16:creationId xmlns:a16="http://schemas.microsoft.com/office/drawing/2014/main" id="{1D7C2FCB-BA77-7320-EC9A-73B12374CECD}"/>
+                    <a16:creationId xmlns:a16="http://schemas.microsoft.com/office/drawing/2014/main" id="{B56FDA86-C92C-33B4-2E05-BC14FE476119}"/>
                   </a:ext>
                 </a:extLst>
               </p:cNvPr>
@@ -15811,7 +17952,7 @@
             <p:cNvPr id="40" name="Picture 39">
               <a:extLst>
                 <a:ext uri="{FF2B5EF4-FFF2-40B4-BE49-F238E27FC236}">
-                  <a16:creationId xmlns:a16="http://schemas.microsoft.com/office/drawing/2014/main" id="{FA524D15-E055-4C8A-92DE-FF2867BD9635}"/>
+                  <a16:creationId xmlns:a16="http://schemas.microsoft.com/office/drawing/2014/main" id="{F9705B4C-FCFC-8EBE-797F-1F2965D027CA}"/>
                 </a:ext>
               </a:extLst>
             </p:cNvPr>
@@ -15841,7 +17982,7 @@
             <p:cNvPr id="41" name="Picture 40">
               <a:extLst>
                 <a:ext uri="{FF2B5EF4-FFF2-40B4-BE49-F238E27FC236}">
-                  <a16:creationId xmlns:a16="http://schemas.microsoft.com/office/drawing/2014/main" id="{AF6FEC07-C1C4-9D21-CB72-CED1912A3E3C}"/>
+                  <a16:creationId xmlns:a16="http://schemas.microsoft.com/office/drawing/2014/main" id="{4E7C72B9-6C9A-A800-0273-BBEC83D93EA4}"/>
                 </a:ext>
               </a:extLst>
             </p:cNvPr>
@@ -15872,7 +18013,7 @@
           <p:cNvPr id="42" name="TextBox 41">
             <a:extLst>
               <a:ext uri="{FF2B5EF4-FFF2-40B4-BE49-F238E27FC236}">
-                <a16:creationId xmlns:a16="http://schemas.microsoft.com/office/drawing/2014/main" id="{D7F824F3-5A97-4E92-8003-47A8B00D41DA}"/>
+                <a16:creationId xmlns:a16="http://schemas.microsoft.com/office/drawing/2014/main" id="{B825C727-18A6-34CC-69B1-C54074C74ABB}"/>
               </a:ext>
             </a:extLst>
           </p:cNvPr>
@@ -15912,7 +18053,7 @@
           <p:cNvPr id="44" name="Group 43">
             <a:extLst>
               <a:ext uri="{FF2B5EF4-FFF2-40B4-BE49-F238E27FC236}">
-                <a16:creationId xmlns:a16="http://schemas.microsoft.com/office/drawing/2014/main" id="{6A05D550-3A71-9DA0-47AE-5AC8344C2494}"/>
+                <a16:creationId xmlns:a16="http://schemas.microsoft.com/office/drawing/2014/main" id="{A6FA70BD-7659-C88D-4978-32CBA3F06558}"/>
               </a:ext>
             </a:extLst>
           </p:cNvPr>
@@ -15921,8 +18062,8 @@
         </p:nvGrpSpPr>
         <p:grpSpPr>
           <a:xfrm>
-            <a:off x="5559121" y="4782645"/>
-            <a:ext cx="3159370" cy="1703075"/>
+            <a:off x="4522609" y="4819935"/>
+            <a:ext cx="2998805" cy="1703075"/>
             <a:chOff x="4220482" y="4783271"/>
             <a:chExt cx="3159370" cy="1703075"/>
           </a:xfrm>
@@ -15932,7 +18073,7 @@
             <p:cNvPr id="45" name="Rectangle 44">
               <a:extLst>
                 <a:ext uri="{FF2B5EF4-FFF2-40B4-BE49-F238E27FC236}">
-                  <a16:creationId xmlns:a16="http://schemas.microsoft.com/office/drawing/2014/main" id="{BFF0839E-E81C-F654-C536-78D577662463}"/>
+                  <a16:creationId xmlns:a16="http://schemas.microsoft.com/office/drawing/2014/main" id="{254A4C01-B171-A121-F65B-9127BC2C7BDE}"/>
                 </a:ext>
               </a:extLst>
             </p:cNvPr>
@@ -16006,7 +18147,7 @@
             <p:cNvPr id="46" name="Rectangle 45">
               <a:extLst>
                 <a:ext uri="{FF2B5EF4-FFF2-40B4-BE49-F238E27FC236}">
-                  <a16:creationId xmlns:a16="http://schemas.microsoft.com/office/drawing/2014/main" id="{B485AC45-C3E5-D795-B930-4F226E82AA7F}"/>
+                  <a16:creationId xmlns:a16="http://schemas.microsoft.com/office/drawing/2014/main" id="{208EF21A-C9B8-7537-4528-3CECC343EBD8}"/>
                 </a:ext>
               </a:extLst>
             </p:cNvPr>
@@ -16077,7 +18218,7 @@
             <p:cNvPr id="47" name="Rectangle 46">
               <a:extLst>
                 <a:ext uri="{FF2B5EF4-FFF2-40B4-BE49-F238E27FC236}">
-                  <a16:creationId xmlns:a16="http://schemas.microsoft.com/office/drawing/2014/main" id="{EED8F491-498F-BD45-36AB-1999EBF6AAC7}"/>
+                  <a16:creationId xmlns:a16="http://schemas.microsoft.com/office/drawing/2014/main" id="{0232A2A9-3DAF-D310-5CC0-BF2D7992D578}"/>
                 </a:ext>
               </a:extLst>
             </p:cNvPr>
@@ -16149,50 +18290,10 @@
         </p:sp>
         <p:sp>
           <p:nvSpPr>
-            <p:cNvPr id="48" name="TextBox 47">
-              <a:extLst>
-                <a:ext uri="{FF2B5EF4-FFF2-40B4-BE49-F238E27FC236}">
-                  <a16:creationId xmlns:a16="http://schemas.microsoft.com/office/drawing/2014/main" id="{A5FE4E8A-D1A3-D926-4966-3D645419034F}"/>
-                </a:ext>
-              </a:extLst>
-            </p:cNvPr>
-            <p:cNvSpPr txBox="1"/>
-            <p:nvPr/>
-          </p:nvSpPr>
-          <p:spPr>
-            <a:xfrm>
-              <a:off x="4361364" y="6254448"/>
-              <a:ext cx="1125416" cy="231898"/>
-            </a:xfrm>
-            <a:prstGeom prst="rect">
-              <a:avLst/>
-            </a:prstGeom>
-          </p:spPr>
-          <p:txBody>
-            <a:bodyPr wrap="square" lIns="0" tIns="0" rIns="0" bIns="0" rtlCol="0">
-              <a:noAutofit/>
-            </a:bodyPr>
-            <a:lstStyle/>
-            <a:p>
-              <a:pPr marL="0" indent="0">
-                <a:buFont typeface="Arial" pitchFamily="34" charset="0"/>
-                <a:buNone/>
-              </a:pPr>
-              <a:r>
-                <a:rPr lang="en-US" sz="1000" dirty="0">
-                  <a:latin typeface="Vodafone Rg" pitchFamily="34" charset="0"/>
-                </a:rPr>
-                <a:t>Test-env-spoke2-vnet</a:t>
-              </a:r>
-            </a:p>
-          </p:txBody>
-        </p:sp>
-        <p:sp>
-          <p:nvSpPr>
             <p:cNvPr id="49" name="TextBox 48">
               <a:extLst>
                 <a:ext uri="{FF2B5EF4-FFF2-40B4-BE49-F238E27FC236}">
-                  <a16:creationId xmlns:a16="http://schemas.microsoft.com/office/drawing/2014/main" id="{E6D7EE9A-82C8-4683-7F44-967A68F2BD89}"/>
+                  <a16:creationId xmlns:a16="http://schemas.microsoft.com/office/drawing/2014/main" id="{1317EFD1-83A7-C5EF-375F-44874098A4B5}"/>
                 </a:ext>
               </a:extLst>
             </p:cNvPr>
@@ -16232,7 +18333,7 @@
             <p:cNvPr id="50" name="TextBox 49">
               <a:extLst>
                 <a:ext uri="{FF2B5EF4-FFF2-40B4-BE49-F238E27FC236}">
-                  <a16:creationId xmlns:a16="http://schemas.microsoft.com/office/drawing/2014/main" id="{72A8E596-9BB4-BD5D-115F-F9FD5959B7C9}"/>
+                  <a16:creationId xmlns:a16="http://schemas.microsoft.com/office/drawing/2014/main" id="{43EBAA5A-4C4D-6234-1280-A0A66D960A68}"/>
                 </a:ext>
               </a:extLst>
             </p:cNvPr>
@@ -16272,7 +18373,7 @@
             <p:cNvPr id="51" name="Group 50">
               <a:extLst>
                 <a:ext uri="{FF2B5EF4-FFF2-40B4-BE49-F238E27FC236}">
-                  <a16:creationId xmlns:a16="http://schemas.microsoft.com/office/drawing/2014/main" id="{171DE913-B16D-96AE-69B7-F8DFDF1CCE26}"/>
+                  <a16:creationId xmlns:a16="http://schemas.microsoft.com/office/drawing/2014/main" id="{97298378-1355-68BF-FD6E-E83472371420}"/>
                 </a:ext>
               </a:extLst>
             </p:cNvPr>
@@ -16292,7 +18393,7 @@
               <p:cNvPr id="54" name="Picture 53">
                 <a:extLst>
                   <a:ext uri="{FF2B5EF4-FFF2-40B4-BE49-F238E27FC236}">
-                    <a16:creationId xmlns:a16="http://schemas.microsoft.com/office/drawing/2014/main" id="{B6B4F057-1439-A51B-FECD-3BA1536B249F}"/>
+                    <a16:creationId xmlns:a16="http://schemas.microsoft.com/office/drawing/2014/main" id="{71A716DC-F206-0370-9DFE-728547B5ABC3}"/>
                   </a:ext>
                 </a:extLst>
               </p:cNvPr>
@@ -16330,7 +18431,7 @@
               <p:cNvPr id="55" name="Arrow: Bent 54">
                 <a:extLst>
                   <a:ext uri="{FF2B5EF4-FFF2-40B4-BE49-F238E27FC236}">
-                    <a16:creationId xmlns:a16="http://schemas.microsoft.com/office/drawing/2014/main" id="{CB83C711-19B1-C401-1834-E16FC952E7B1}"/>
+                    <a16:creationId xmlns:a16="http://schemas.microsoft.com/office/drawing/2014/main" id="{012096FB-3EEC-3462-6B3D-D93521CF6636}"/>
                   </a:ext>
                 </a:extLst>
               </p:cNvPr>
@@ -16402,7 +18503,7 @@
             <p:cNvPr id="52" name="Picture 51">
               <a:extLst>
                 <a:ext uri="{FF2B5EF4-FFF2-40B4-BE49-F238E27FC236}">
-                  <a16:creationId xmlns:a16="http://schemas.microsoft.com/office/drawing/2014/main" id="{5ED0B0DF-C328-C3B6-1C95-9F01A73C8698}"/>
+                  <a16:creationId xmlns:a16="http://schemas.microsoft.com/office/drawing/2014/main" id="{F63A1C31-141B-3B14-BD0E-2D8471039330}"/>
                 </a:ext>
               </a:extLst>
             </p:cNvPr>
@@ -16432,7 +18533,7 @@
             <p:cNvPr id="53" name="Picture 52">
               <a:extLst>
                 <a:ext uri="{FF2B5EF4-FFF2-40B4-BE49-F238E27FC236}">
-                  <a16:creationId xmlns:a16="http://schemas.microsoft.com/office/drawing/2014/main" id="{4D763363-1E20-1B9C-2368-665CD84E69F3}"/>
+                  <a16:creationId xmlns:a16="http://schemas.microsoft.com/office/drawing/2014/main" id="{361E3EB6-8E96-016F-72EA-E5341AEFAF62}"/>
                 </a:ext>
               </a:extLst>
             </p:cNvPr>
@@ -16463,7 +18564,7 @@
           <p:cNvPr id="56" name="Picture 55">
             <a:extLst>
               <a:ext uri="{FF2B5EF4-FFF2-40B4-BE49-F238E27FC236}">
-                <a16:creationId xmlns:a16="http://schemas.microsoft.com/office/drawing/2014/main" id="{C8246ED7-AECD-1321-A5A7-969C9FAB67D0}"/>
+                <a16:creationId xmlns:a16="http://schemas.microsoft.com/office/drawing/2014/main" id="{39EC1738-94C4-261A-13B0-77B2FC101C46}"/>
               </a:ext>
             </a:extLst>
           </p:cNvPr>
@@ -16480,7 +18581,7 @@
         </p:blipFill>
         <p:spPr>
           <a:xfrm>
-            <a:off x="8268155" y="5935111"/>
+            <a:off x="7231643" y="5972401"/>
             <a:ext cx="294146" cy="294146"/>
           </a:xfrm>
           <a:prstGeom prst="rect">
@@ -16493,7 +18594,7 @@
           <p:cNvPr id="57" name="Picture 56">
             <a:extLst>
               <a:ext uri="{FF2B5EF4-FFF2-40B4-BE49-F238E27FC236}">
-                <a16:creationId xmlns:a16="http://schemas.microsoft.com/office/drawing/2014/main" id="{8935D077-61E3-B94E-954A-FB8634CD6E4B}"/>
+                <a16:creationId xmlns:a16="http://schemas.microsoft.com/office/drawing/2014/main" id="{C98A7ACA-04F0-D51A-BCA2-0E986B175C5B}"/>
               </a:ext>
             </a:extLst>
           </p:cNvPr>
@@ -16510,7 +18611,7 @@
         </p:blipFill>
         <p:spPr>
           <a:xfrm>
-            <a:off x="4672364" y="5958956"/>
+            <a:off x="3635852" y="5996246"/>
             <a:ext cx="294146" cy="294146"/>
           </a:xfrm>
           <a:prstGeom prst="rect">
@@ -16523,7 +18624,7 @@
           <p:cNvPr id="59" name="Straight Arrow Connector 58">
             <a:extLst>
               <a:ext uri="{FF2B5EF4-FFF2-40B4-BE49-F238E27FC236}">
-                <a16:creationId xmlns:a16="http://schemas.microsoft.com/office/drawing/2014/main" id="{BB874D96-4504-E7FD-82AD-DF10B8737488}"/>
+                <a16:creationId xmlns:a16="http://schemas.microsoft.com/office/drawing/2014/main" id="{083279B5-E959-75F8-CBBD-AF49C9629154}"/>
               </a:ext>
             </a:extLst>
           </p:cNvPr>
@@ -16535,7 +18636,7 @@
         <p:spPr>
           <a:xfrm>
             <a:off x="9663195" y="3851034"/>
-            <a:ext cx="0" cy="932238"/>
+            <a:ext cx="3984" cy="1010741"/>
           </a:xfrm>
           <a:prstGeom prst="straightConnector1">
             <a:avLst/>
@@ -16569,17 +18670,19 @@
           <p:cNvPr id="66" name="Straight Arrow Connector 65">
             <a:extLst>
               <a:ext uri="{FF2B5EF4-FFF2-40B4-BE49-F238E27FC236}">
-                <a16:creationId xmlns:a16="http://schemas.microsoft.com/office/drawing/2014/main" id="{96F906B5-956C-1A7C-6590-11905DC82A32}"/>
+                <a16:creationId xmlns:a16="http://schemas.microsoft.com/office/drawing/2014/main" id="{84CD597B-A19A-B634-7F2D-9403C242FF37}"/>
               </a:ext>
             </a:extLst>
           </p:cNvPr>
-          <p:cNvCxnSpPr/>
+          <p:cNvCxnSpPr>
+            <a:cxnSpLocks/>
+          </p:cNvCxnSpPr>
           <p:nvPr/>
         </p:nvCxnSpPr>
         <p:spPr>
           <a:xfrm>
             <a:off x="6768589" y="3771902"/>
-            <a:ext cx="0" cy="1089873"/>
+            <a:ext cx="4680" cy="1212323"/>
           </a:xfrm>
           <a:prstGeom prst="straightConnector1">
             <a:avLst/>
@@ -16608,72 +18711,12 @@
           </a:fontRef>
         </p:style>
       </p:cxnSp>
-      <p:pic>
-        <p:nvPicPr>
-          <p:cNvPr id="67" name="Picture 66">
-            <a:extLst>
-              <a:ext uri="{FF2B5EF4-FFF2-40B4-BE49-F238E27FC236}">
-                <a16:creationId xmlns:a16="http://schemas.microsoft.com/office/drawing/2014/main" id="{7A2F9271-56E1-A060-8E14-C481D5923C64}"/>
-              </a:ext>
-            </a:extLst>
-          </p:cNvPr>
-          <p:cNvPicPr>
-            <a:picLocks noChangeAspect="1"/>
-          </p:cNvPicPr>
-          <p:nvPr/>
-        </p:nvPicPr>
-        <p:blipFill>
-          <a:blip r:embed="rId8"/>
-          <a:stretch>
-            <a:fillRect/>
-          </a:stretch>
-        </p:blipFill>
-        <p:spPr>
-          <a:xfrm>
-            <a:off x="3771098" y="3779561"/>
-            <a:ext cx="355337" cy="355337"/>
-          </a:xfrm>
-          <a:prstGeom prst="rect">
-            <a:avLst/>
-          </a:prstGeom>
-        </p:spPr>
-      </p:pic>
-      <p:pic>
-        <p:nvPicPr>
-          <p:cNvPr id="68" name="Picture 67">
-            <a:extLst>
-              <a:ext uri="{FF2B5EF4-FFF2-40B4-BE49-F238E27FC236}">
-                <a16:creationId xmlns:a16="http://schemas.microsoft.com/office/drawing/2014/main" id="{F9807164-A73B-8454-F2E0-DA525A1DBF74}"/>
-              </a:ext>
-            </a:extLst>
-          </p:cNvPr>
-          <p:cNvPicPr>
-            <a:picLocks noChangeAspect="1"/>
-          </p:cNvPicPr>
-          <p:nvPr/>
-        </p:nvPicPr>
-        <p:blipFill>
-          <a:blip r:embed="rId8"/>
-          <a:stretch>
-            <a:fillRect/>
-          </a:stretch>
-        </p:blipFill>
-        <p:spPr>
-          <a:xfrm>
-            <a:off x="10232706" y="3567378"/>
-            <a:ext cx="355337" cy="355337"/>
-          </a:xfrm>
-          <a:prstGeom prst="rect">
-            <a:avLst/>
-          </a:prstGeom>
-        </p:spPr>
-      </p:pic>
       <p:sp>
         <p:nvSpPr>
           <p:cNvPr id="3" name="Rectangle 2">
             <a:extLst>
               <a:ext uri="{FF2B5EF4-FFF2-40B4-BE49-F238E27FC236}">
-                <a16:creationId xmlns:a16="http://schemas.microsoft.com/office/drawing/2014/main" id="{4D16C8F6-8FBA-E347-DD10-6E780CD9D0E0}"/>
+                <a16:creationId xmlns:a16="http://schemas.microsoft.com/office/drawing/2014/main" id="{14378A54-C186-4CCD-F154-B74FADA429A7}"/>
               </a:ext>
             </a:extLst>
           </p:cNvPr>
@@ -16682,8 +18725,8 @@
         </p:nvSpPr>
         <p:spPr>
           <a:xfrm>
-            <a:off x="1400882" y="2802259"/>
-            <a:ext cx="2388603" cy="1037660"/>
+            <a:off x="3138855" y="2980407"/>
+            <a:ext cx="392722" cy="652241"/>
           </a:xfrm>
           <a:prstGeom prst="rect">
             <a:avLst/>
@@ -16744,7 +18787,7 @@
           <p:cNvPr id="20" name="Picture 19">
             <a:extLst>
               <a:ext uri="{FF2B5EF4-FFF2-40B4-BE49-F238E27FC236}">
-                <a16:creationId xmlns:a16="http://schemas.microsoft.com/office/drawing/2014/main" id="{BBA6AA87-7ABE-805F-95C2-3A1FA0B59FCC}"/>
+                <a16:creationId xmlns:a16="http://schemas.microsoft.com/office/drawing/2014/main" id="{17F1DC55-F09F-326C-564B-0BB2460F0004}"/>
               </a:ext>
             </a:extLst>
           </p:cNvPr>
@@ -16771,62 +18814,10 @@
       </p:pic>
       <p:sp>
         <p:nvSpPr>
-          <p:cNvPr id="27" name="TextBox 26">
+          <p:cNvPr id="31" name="Rectangle 30">
             <a:extLst>
               <a:ext uri="{FF2B5EF4-FFF2-40B4-BE49-F238E27FC236}">
-                <a16:creationId xmlns:a16="http://schemas.microsoft.com/office/drawing/2014/main" id="{7E23772A-55D9-2961-B37B-8E8DEC70AB1D}"/>
-              </a:ext>
-            </a:extLst>
-          </p:cNvPr>
-          <p:cNvSpPr txBox="1"/>
-          <p:nvPr/>
-        </p:nvSpPr>
-        <p:spPr>
-          <a:xfrm>
-            <a:off x="1529862" y="2988343"/>
-            <a:ext cx="1351084" cy="670960"/>
-          </a:xfrm>
-          <a:prstGeom prst="rect">
-            <a:avLst/>
-          </a:prstGeom>
-        </p:spPr>
-        <p:txBody>
-          <a:bodyPr wrap="square" lIns="0" tIns="0" rIns="0" bIns="0" rtlCol="0">
-            <a:noAutofit/>
-          </a:bodyPr>
-          <a:lstStyle/>
-          <a:p>
-            <a:pPr marL="0" indent="0">
-              <a:buFont typeface="Arial" pitchFamily="34" charset="0"/>
-              <a:buNone/>
-            </a:pPr>
-            <a:r>
-              <a:rPr lang="en-US" sz="1000" dirty="0">
-                <a:latin typeface="Vodafone Rg" pitchFamily="34" charset="0"/>
-              </a:rPr>
-              <a:t>SDWAN connectivity has been mimicked by using VNG &amp; creating  BGP-</a:t>
-            </a:r>
-            <a:r>
-              <a:rPr lang="en-US" sz="1000" dirty="0" err="1">
-                <a:latin typeface="Vodafone Rg" pitchFamily="34" charset="0"/>
-              </a:rPr>
-              <a:t>IPSec</a:t>
-            </a:r>
-            <a:r>
-              <a:rPr lang="en-US" sz="1000" dirty="0">
-                <a:latin typeface="Vodafone Rg" pitchFamily="34" charset="0"/>
-              </a:rPr>
-              <a:t> tunnel</a:t>
-            </a:r>
-          </a:p>
-        </p:txBody>
-      </p:sp>
-      <p:sp>
-        <p:nvSpPr>
-          <p:cNvPr id="31" name="Rectangle 30">
-            <a:extLst>
-              <a:ext uri="{FF2B5EF4-FFF2-40B4-BE49-F238E27FC236}">
-                <a16:creationId xmlns:a16="http://schemas.microsoft.com/office/drawing/2014/main" id="{6280A7BB-1B1B-B3F5-5FC5-C125EA5520CC}"/>
+                <a16:creationId xmlns:a16="http://schemas.microsoft.com/office/drawing/2014/main" id="{F7C30D68-CDAA-6752-10A6-CF203E57AA5D}"/>
               </a:ext>
             </a:extLst>
           </p:cNvPr>
@@ -16901,7 +18892,7 @@
           <p:cNvPr id="32" name="Picture 31">
             <a:extLst>
               <a:ext uri="{FF2B5EF4-FFF2-40B4-BE49-F238E27FC236}">
-                <a16:creationId xmlns:a16="http://schemas.microsoft.com/office/drawing/2014/main" id="{06C93DE8-FC73-B8AE-23B4-10FCA02B153C}"/>
+                <a16:creationId xmlns:a16="http://schemas.microsoft.com/office/drawing/2014/main" id="{584031EB-CD7F-7424-7007-9CD9BE8017F1}"/>
               </a:ext>
             </a:extLst>
           </p:cNvPr>
@@ -16931,7 +18922,7 @@
           <p:cNvPr id="36" name="Group 35">
             <a:extLst>
               <a:ext uri="{FF2B5EF4-FFF2-40B4-BE49-F238E27FC236}">
-                <a16:creationId xmlns:a16="http://schemas.microsoft.com/office/drawing/2014/main" id="{B31F1643-8D58-5C91-140C-3BB337673844}"/>
+                <a16:creationId xmlns:a16="http://schemas.microsoft.com/office/drawing/2014/main" id="{2F5AC172-935E-3A87-33B4-5D6085D0C424}"/>
               </a:ext>
             </a:extLst>
           </p:cNvPr>
@@ -16951,7 +18942,7 @@
             <p:cNvPr id="58" name="Picture 57">
               <a:extLst>
                 <a:ext uri="{FF2B5EF4-FFF2-40B4-BE49-F238E27FC236}">
-                  <a16:creationId xmlns:a16="http://schemas.microsoft.com/office/drawing/2014/main" id="{44329A90-C245-7B10-D204-CB040686EB58}"/>
+                  <a16:creationId xmlns:a16="http://schemas.microsoft.com/office/drawing/2014/main" id="{16C1BAB2-5A58-854C-9767-8341B53D9515}"/>
                 </a:ext>
               </a:extLst>
             </p:cNvPr>
@@ -16989,7 +18980,7 @@
             <p:cNvPr id="60" name="Arrow: Bent 59">
               <a:extLst>
                 <a:ext uri="{FF2B5EF4-FFF2-40B4-BE49-F238E27FC236}">
-                  <a16:creationId xmlns:a16="http://schemas.microsoft.com/office/drawing/2014/main" id="{A592A357-2901-0D15-E5BE-0F693104BDE0}"/>
+                  <a16:creationId xmlns:a16="http://schemas.microsoft.com/office/drawing/2014/main" id="{DC1E5D7D-1612-322A-7A89-B876314FCD64}"/>
                 </a:ext>
               </a:extLst>
             </p:cNvPr>
@@ -17061,7 +19052,7 @@
           <p:cNvPr id="65" name="Straight Arrow Connector 64">
             <a:extLst>
               <a:ext uri="{FF2B5EF4-FFF2-40B4-BE49-F238E27FC236}">
-                <a16:creationId xmlns:a16="http://schemas.microsoft.com/office/drawing/2014/main" id="{DD2A58F2-3DBE-40ED-AB2C-E3471B92DED0}"/>
+                <a16:creationId xmlns:a16="http://schemas.microsoft.com/office/drawing/2014/main" id="{82100ED8-F34D-2DC5-2EA2-C34D6BBE4C74}"/>
               </a:ext>
             </a:extLst>
           </p:cNvPr>
@@ -17105,7 +19096,7 @@
           <p:cNvPr id="70" name="Straight Arrow Connector 69">
             <a:extLst>
               <a:ext uri="{FF2B5EF4-FFF2-40B4-BE49-F238E27FC236}">
-                <a16:creationId xmlns:a16="http://schemas.microsoft.com/office/drawing/2014/main" id="{98A22CC6-B82F-84F7-5228-F53E1F29D092}"/>
+                <a16:creationId xmlns:a16="http://schemas.microsoft.com/office/drawing/2014/main" id="{C36B3854-A9EE-FFCF-E550-D1C66CFE0D82}"/>
               </a:ext>
             </a:extLst>
           </p:cNvPr>
@@ -17151,7 +19142,7 @@
           <p:cNvPr id="73" name="Rectangle 72">
             <a:extLst>
               <a:ext uri="{FF2B5EF4-FFF2-40B4-BE49-F238E27FC236}">
-                <a16:creationId xmlns:a16="http://schemas.microsoft.com/office/drawing/2014/main" id="{65D62A3F-1947-1794-A20E-0C4356D640E6}"/>
+                <a16:creationId xmlns:a16="http://schemas.microsoft.com/office/drawing/2014/main" id="{68B35F87-F05A-5D3B-090C-A8F39993D9C5}"/>
               </a:ext>
             </a:extLst>
           </p:cNvPr>
@@ -17160,8 +19151,8 @@
         </p:nvSpPr>
         <p:spPr>
           <a:xfrm>
-            <a:off x="57426" y="2100904"/>
-            <a:ext cx="1270177" cy="830390"/>
+            <a:off x="128633" y="2100904"/>
+            <a:ext cx="1198970" cy="830390"/>
           </a:xfrm>
           <a:prstGeom prst="rect">
             <a:avLst/>
@@ -17237,7 +19228,7 @@
           <p:cNvPr id="75" name="Picture 74">
             <a:extLst>
               <a:ext uri="{FF2B5EF4-FFF2-40B4-BE49-F238E27FC236}">
-                <a16:creationId xmlns:a16="http://schemas.microsoft.com/office/drawing/2014/main" id="{4B6CF505-FC62-FCED-D815-3514212F85C2}"/>
+                <a16:creationId xmlns:a16="http://schemas.microsoft.com/office/drawing/2014/main" id="{352B37D7-2970-8926-2383-0256D08397DC}"/>
               </a:ext>
             </a:extLst>
           </p:cNvPr>
@@ -17267,7 +19258,7 @@
           <p:cNvPr id="77" name="Freeform: Shape 76">
             <a:extLst>
               <a:ext uri="{FF2B5EF4-FFF2-40B4-BE49-F238E27FC236}">
-                <a16:creationId xmlns:a16="http://schemas.microsoft.com/office/drawing/2014/main" id="{C8F42FC6-9C5A-4AC6-4B55-652676298964}"/>
+                <a16:creationId xmlns:a16="http://schemas.microsoft.com/office/drawing/2014/main" id="{B4D5C9A7-4A0E-3084-C808-69B7E439FA78}"/>
               </a:ext>
             </a:extLst>
           </p:cNvPr>
@@ -17659,7 +19650,7 @@
           <p:cNvPr id="81" name="TextBox 80">
             <a:extLst>
               <a:ext uri="{FF2B5EF4-FFF2-40B4-BE49-F238E27FC236}">
-                <a16:creationId xmlns:a16="http://schemas.microsoft.com/office/drawing/2014/main" id="{287A66FC-1B38-CE4F-E140-6A0A2A7B9D75}"/>
+                <a16:creationId xmlns:a16="http://schemas.microsoft.com/office/drawing/2014/main" id="{535D06A9-D3C7-9FA6-A8D0-A441B417377D}"/>
               </a:ext>
             </a:extLst>
           </p:cNvPr>
@@ -17699,7 +19690,7 @@
           <p:cNvPr id="82" name="Picture 81">
             <a:extLst>
               <a:ext uri="{FF2B5EF4-FFF2-40B4-BE49-F238E27FC236}">
-                <a16:creationId xmlns:a16="http://schemas.microsoft.com/office/drawing/2014/main" id="{AF3DB749-D69E-0CD4-3B55-66EA8B46F1F8}"/>
+                <a16:creationId xmlns:a16="http://schemas.microsoft.com/office/drawing/2014/main" id="{C9AA502F-C2F5-3EB4-EBDB-5939B20A8090}"/>
               </a:ext>
             </a:extLst>
           </p:cNvPr>
@@ -17729,7 +19720,7 @@
           <p:cNvPr id="91" name="TextBox 90">
             <a:extLst>
               <a:ext uri="{FF2B5EF4-FFF2-40B4-BE49-F238E27FC236}">
-                <a16:creationId xmlns:a16="http://schemas.microsoft.com/office/drawing/2014/main" id="{62B91EA4-A8B8-BDBB-5AAA-C3913130EC1B}"/>
+                <a16:creationId xmlns:a16="http://schemas.microsoft.com/office/drawing/2014/main" id="{9B06DC5E-9F5D-FD96-857B-30D86AD25148}"/>
               </a:ext>
             </a:extLst>
           </p:cNvPr>
@@ -17769,7 +19760,7 @@
           <p:cNvPr id="100" name="Freeform: Shape 99">
             <a:extLst>
               <a:ext uri="{FF2B5EF4-FFF2-40B4-BE49-F238E27FC236}">
-                <a16:creationId xmlns:a16="http://schemas.microsoft.com/office/drawing/2014/main" id="{48E3D30C-C5C0-4893-6A35-F1B13DF4E7FF}"/>
+                <a16:creationId xmlns:a16="http://schemas.microsoft.com/office/drawing/2014/main" id="{C99C5846-1A07-0139-3A28-C62CF52D1B63}"/>
               </a:ext>
             </a:extLst>
           </p:cNvPr>
@@ -17924,7 +19915,7 @@
           <p:cNvPr id="106" name="Connector: Elbow 105">
             <a:extLst>
               <a:ext uri="{FF2B5EF4-FFF2-40B4-BE49-F238E27FC236}">
-                <a16:creationId xmlns:a16="http://schemas.microsoft.com/office/drawing/2014/main" id="{DF00C1B2-710D-3180-4C29-EA249C7CA590}"/>
+                <a16:creationId xmlns:a16="http://schemas.microsoft.com/office/drawing/2014/main" id="{0B4F0097-306E-3BF9-5120-7E650E9FFD4B}"/>
               </a:ext>
             </a:extLst>
           </p:cNvPr>
@@ -17965,7 +19956,7 @@
           <p:cNvPr id="108" name="Connector: Elbow 107">
             <a:extLst>
               <a:ext uri="{FF2B5EF4-FFF2-40B4-BE49-F238E27FC236}">
-                <a16:creationId xmlns:a16="http://schemas.microsoft.com/office/drawing/2014/main" id="{568391B6-04B1-0E1D-DB1A-39715694D81C}"/>
+                <a16:creationId xmlns:a16="http://schemas.microsoft.com/office/drawing/2014/main" id="{898C5DBF-8949-7458-3160-64B3BC8FC9EC}"/>
               </a:ext>
             </a:extLst>
           </p:cNvPr>
@@ -18008,7 +19999,7 @@
           <p:cNvPr id="111" name="Freeform: Shape 110">
             <a:extLst>
               <a:ext uri="{FF2B5EF4-FFF2-40B4-BE49-F238E27FC236}">
-                <a16:creationId xmlns:a16="http://schemas.microsoft.com/office/drawing/2014/main" id="{B7B895A6-418F-5250-AACA-B36FCBF028FF}"/>
+                <a16:creationId xmlns:a16="http://schemas.microsoft.com/office/drawing/2014/main" id="{160BBC4B-9DA2-625B-D011-74D5478F84FE}"/>
               </a:ext>
             </a:extLst>
           </p:cNvPr>
@@ -18119,7 +20110,7 @@
           <p:cNvPr id="119" name="Freeform: Shape 118">
             <a:extLst>
               <a:ext uri="{FF2B5EF4-FFF2-40B4-BE49-F238E27FC236}">
-                <a16:creationId xmlns:a16="http://schemas.microsoft.com/office/drawing/2014/main" id="{C9E0F65D-DCE6-598F-ABE0-EC29B41269BE}"/>
+                <a16:creationId xmlns:a16="http://schemas.microsoft.com/office/drawing/2014/main" id="{40F06881-9FFA-4479-D11D-B9E19C0CA5C9}"/>
               </a:ext>
             </a:extLst>
           </p:cNvPr>
@@ -18295,7 +20286,7 @@
           <p:cNvPr id="120" name="Freeform: Shape 119">
             <a:extLst>
               <a:ext uri="{FF2B5EF4-FFF2-40B4-BE49-F238E27FC236}">
-                <a16:creationId xmlns:a16="http://schemas.microsoft.com/office/drawing/2014/main" id="{16A82AC9-E681-E08C-AAB5-B3D6DDADABCD}"/>
+                <a16:creationId xmlns:a16="http://schemas.microsoft.com/office/drawing/2014/main" id="{FC9C7A9B-4BFF-2B37-AA2D-1D95D95366D3}"/>
               </a:ext>
             </a:extLst>
           </p:cNvPr>
@@ -18474,7 +20465,7 @@
           <p:cNvPr id="121" name="Rectangle 120">
             <a:extLst>
               <a:ext uri="{FF2B5EF4-FFF2-40B4-BE49-F238E27FC236}">
-                <a16:creationId xmlns:a16="http://schemas.microsoft.com/office/drawing/2014/main" id="{9E9E0FC7-8E8B-E8EE-F028-0B971941BCB2}"/>
+                <a16:creationId xmlns:a16="http://schemas.microsoft.com/office/drawing/2014/main" id="{BA3BD2BD-EFA9-6CD2-25BB-F37A0ED3942E}"/>
               </a:ext>
             </a:extLst>
           </p:cNvPr>
@@ -18483,8 +20474,8 @@
         </p:nvSpPr>
         <p:spPr>
           <a:xfrm>
-            <a:off x="45306" y="1088551"/>
-            <a:ext cx="3961136" cy="2875587"/>
+            <a:off x="35128" y="1011550"/>
+            <a:ext cx="3971313" cy="3022441"/>
           </a:xfrm>
           <a:prstGeom prst="rect">
             <a:avLst/>
@@ -18545,7 +20536,7 @@
           <p:cNvPr id="122" name="TextBox 121">
             <a:extLst>
               <a:ext uri="{FF2B5EF4-FFF2-40B4-BE49-F238E27FC236}">
-                <a16:creationId xmlns:a16="http://schemas.microsoft.com/office/drawing/2014/main" id="{71CD513F-50CF-37C1-BE52-0741D5B505F4}"/>
+                <a16:creationId xmlns:a16="http://schemas.microsoft.com/office/drawing/2014/main" id="{EC911B0B-792B-0F37-7AFF-712C13F3CC2D}"/>
               </a:ext>
             </a:extLst>
           </p:cNvPr>
@@ -18554,7 +20545,7 @@
         </p:nvSpPr>
         <p:spPr>
           <a:xfrm>
-            <a:off x="9601706" y="1011551"/>
+            <a:off x="9312333" y="1011551"/>
             <a:ext cx="1125416" cy="211387"/>
           </a:xfrm>
           <a:prstGeom prst="rect">
@@ -18572,7 +20563,7 @@
               <a:buNone/>
             </a:pPr>
             <a:r>
-              <a:rPr lang="en-US" sz="1100" dirty="0">
+              <a:rPr lang="en-US" sz="1200" b="1" dirty="0">
                 <a:latin typeface="Vodafone Rg" pitchFamily="34" charset="0"/>
               </a:rPr>
               <a:t>Routable Hub</a:t>
@@ -18582,10 +20573,10 @@
       </p:sp>
       <p:sp>
         <p:nvSpPr>
-          <p:cNvPr id="4" name="TextBox 3">
+          <p:cNvPr id="21" name="TextBox 20">
             <a:extLst>
               <a:ext uri="{FF2B5EF4-FFF2-40B4-BE49-F238E27FC236}">
-                <a16:creationId xmlns:a16="http://schemas.microsoft.com/office/drawing/2014/main" id="{8D07426D-2253-24DB-003D-A39031D3F75B}"/>
+                <a16:creationId xmlns:a16="http://schemas.microsoft.com/office/drawing/2014/main" id="{9BD3E859-EBAC-D337-BB4A-712948D5AAA3}"/>
               </a:ext>
             </a:extLst>
           </p:cNvPr>
@@ -18594,8 +20585,8 @@
         </p:nvSpPr>
         <p:spPr>
           <a:xfrm>
-            <a:off x="-13909" y="3993064"/>
-            <a:ext cx="2450727" cy="914400"/>
+            <a:off x="1036225" y="5005450"/>
+            <a:ext cx="1022052" cy="349298"/>
           </a:xfrm>
           <a:prstGeom prst="rect">
             <a:avLst/>
@@ -18612,44 +20603,347 @@
               <a:buNone/>
             </a:pPr>
             <a:r>
-              <a:rPr lang="en-US" dirty="0">
+              <a:rPr lang="en-US" sz="1000" dirty="0">
                 <a:latin typeface="Vodafone Rg" pitchFamily="34" charset="0"/>
               </a:rPr>
-              <a:t>10.7.0.0/16 – cidr subnet</a:t>
+              <a:t>10.9.0.0/24</a:t>
             </a:r>
           </a:p>
+        </p:txBody>
+      </p:sp>
+      <p:sp>
+        <p:nvSpPr>
+          <p:cNvPr id="30" name="TextBox 29">
+            <a:extLst>
+              <a:ext uri="{FF2B5EF4-FFF2-40B4-BE49-F238E27FC236}">
+                <a16:creationId xmlns:a16="http://schemas.microsoft.com/office/drawing/2014/main" id="{2DD6D3CE-A91A-C74C-CB52-FD4431C6F457}"/>
+              </a:ext>
+            </a:extLst>
+          </p:cNvPr>
+          <p:cNvSpPr txBox="1"/>
+          <p:nvPr/>
+        </p:nvSpPr>
+        <p:spPr>
+          <a:xfrm>
+            <a:off x="4672605" y="4984225"/>
+            <a:ext cx="1022052" cy="349298"/>
+          </a:xfrm>
+          <a:prstGeom prst="rect">
+            <a:avLst/>
+          </a:prstGeom>
+        </p:spPr>
+        <p:txBody>
+          <a:bodyPr wrap="none" lIns="0" tIns="0" rIns="0" bIns="0" rtlCol="0">
+            <a:noAutofit/>
+          </a:bodyPr>
+          <a:lstStyle/>
           <a:p>
             <a:pPr marL="0" indent="0">
               <a:buFont typeface="Arial" pitchFamily="34" charset="0"/>
               <a:buNone/>
             </a:pPr>
             <a:r>
-              <a:rPr lang="en-US" dirty="0">
+              <a:rPr lang="en-US" sz="1000" dirty="0">
                 <a:latin typeface="Vodafone Rg" pitchFamily="34" charset="0"/>
               </a:rPr>
-              <a:t>10.7.1.0/24 -- gateway subnet</a:t>
+              <a:t>10.10.0.0/24</a:t>
             </a:r>
           </a:p>
+        </p:txBody>
+      </p:sp>
+      <p:sp>
+        <p:nvSpPr>
+          <p:cNvPr id="61" name="Rectangle 60">
+            <a:extLst>
+              <a:ext uri="{FF2B5EF4-FFF2-40B4-BE49-F238E27FC236}">
+                <a16:creationId xmlns:a16="http://schemas.microsoft.com/office/drawing/2014/main" id="{8ECF7C49-F5F4-E1A9-6777-9DFC1FAAC07B}"/>
+              </a:ext>
+            </a:extLst>
+          </p:cNvPr>
+          <p:cNvSpPr/>
+          <p:nvPr/>
+        </p:nvSpPr>
+        <p:spPr>
+          <a:xfrm>
+            <a:off x="2947277" y="1434874"/>
+            <a:ext cx="827668" cy="2337028"/>
+          </a:xfrm>
+          <a:prstGeom prst="rect">
+            <a:avLst/>
+          </a:prstGeom>
+          <a:noFill/>
+          <a:ln w="12700" cap="flat" cmpd="sng" algn="ctr">
+            <a:solidFill>
+              <a:srgbClr val="0070C0"/>
+            </a:solidFill>
+            <a:prstDash val="sysDash"/>
+          </a:ln>
+          <a:effectLst/>
+        </p:spPr>
+        <p:style>
+          <a:lnRef idx="2">
+            <a:scrgbClr r="0" g="0" b="0"/>
+          </a:lnRef>
+          <a:fillRef idx="1">
+            <a:scrgbClr r="0" g="0" b="0"/>
+          </a:fillRef>
+          <a:effectRef idx="0">
+            <a:scrgbClr r="0" g="0" b="0"/>
+          </a:effectRef>
+          <a:fontRef idx="minor">
+            <a:schemeClr val="lt1"/>
+          </a:fontRef>
+        </p:style>
+        <p:txBody>
+          <a:bodyPr spcFirstLastPara="0" vert="horz" wrap="square" lIns="6350" tIns="6350" rIns="6350" bIns="6350" numCol="1" spcCol="1270" rtlCol="0" anchor="ctr" anchorCtr="0">
+            <a:noAutofit/>
+          </a:bodyPr>
+          <a:lstStyle/>
+          <a:p>
+            <a:pPr algn="ctr" defTabSz="444500">
+              <a:lnSpc>
+                <a:spcPct val="90000"/>
+              </a:lnSpc>
+              <a:spcBef>
+                <a:spcPct val="0"/>
+              </a:spcBef>
+              <a:spcAft>
+                <a:spcPct val="35000"/>
+              </a:spcAft>
+            </a:pPr>
+            <a:endParaRPr lang="en-US" sz="1000" kern="1200" dirty="0">
+              <a:solidFill>
+                <a:srgbClr val="34342B"/>
+              </a:solidFill>
+              <a:latin typeface="Vodafone Rg" pitchFamily="34" charset="0"/>
+              <a:ea typeface="+mn-ea"/>
+              <a:cs typeface="+mn-cs"/>
+            </a:endParaRPr>
+          </a:p>
+        </p:txBody>
+      </p:sp>
+      <p:cxnSp>
+        <p:nvCxnSpPr>
+          <p:cNvPr id="62" name="Straight Arrow Connector 61">
+            <a:extLst>
+              <a:ext uri="{FF2B5EF4-FFF2-40B4-BE49-F238E27FC236}">
+                <a16:creationId xmlns:a16="http://schemas.microsoft.com/office/drawing/2014/main" id="{E9EC889F-CEA4-9305-74FF-66C92FED8180}"/>
+              </a:ext>
+            </a:extLst>
+          </p:cNvPr>
+          <p:cNvCxnSpPr>
+            <a:cxnSpLocks/>
+            <a:endCxn id="18" idx="1"/>
+          </p:cNvCxnSpPr>
+          <p:nvPr/>
+        </p:nvCxnSpPr>
+        <p:spPr>
+          <a:xfrm flipV="1">
+            <a:off x="1327603" y="1815531"/>
+            <a:ext cx="1811251" cy="700376"/>
+          </a:xfrm>
+          <a:prstGeom prst="straightConnector1">
+            <a:avLst/>
+          </a:prstGeom>
+          <a:ln>
+            <a:solidFill>
+              <a:schemeClr val="tx1"/>
+            </a:solidFill>
+            <a:prstDash val="sysDot"/>
+            <a:headEnd type="triangle"/>
+            <a:tailEnd type="triangle"/>
+          </a:ln>
+        </p:spPr>
+        <p:style>
+          <a:lnRef idx="1">
+            <a:schemeClr val="accent1"/>
+          </a:lnRef>
+          <a:fillRef idx="0">
+            <a:schemeClr val="accent1"/>
+          </a:fillRef>
+          <a:effectRef idx="0">
+            <a:schemeClr val="accent1"/>
+          </a:effectRef>
+          <a:fontRef idx="minor">
+            <a:schemeClr val="tx1"/>
+          </a:fontRef>
+        </p:style>
+      </p:cxnSp>
+      <p:cxnSp>
+        <p:nvCxnSpPr>
+          <p:cNvPr id="64" name="Straight Arrow Connector 63">
+            <a:extLst>
+              <a:ext uri="{FF2B5EF4-FFF2-40B4-BE49-F238E27FC236}">
+                <a16:creationId xmlns:a16="http://schemas.microsoft.com/office/drawing/2014/main" id="{43F1B42B-6232-773F-5C7A-3B33D7A1FCE9}"/>
+              </a:ext>
+            </a:extLst>
+          </p:cNvPr>
+          <p:cNvCxnSpPr>
+            <a:cxnSpLocks/>
+          </p:cNvCxnSpPr>
+          <p:nvPr/>
+        </p:nvCxnSpPr>
+        <p:spPr>
+          <a:xfrm>
+            <a:off x="1345103" y="2522980"/>
+            <a:ext cx="1779211" cy="830390"/>
+          </a:xfrm>
+          <a:prstGeom prst="straightConnector1">
+            <a:avLst/>
+          </a:prstGeom>
+          <a:ln>
+            <a:solidFill>
+              <a:schemeClr val="tx1"/>
+            </a:solidFill>
+            <a:prstDash val="sysDot"/>
+            <a:headEnd type="triangle"/>
+            <a:tailEnd type="triangle"/>
+          </a:ln>
+        </p:spPr>
+        <p:style>
+          <a:lnRef idx="1">
+            <a:schemeClr val="accent1"/>
+          </a:lnRef>
+          <a:fillRef idx="0">
+            <a:schemeClr val="accent1"/>
+          </a:fillRef>
+          <a:effectRef idx="0">
+            <a:schemeClr val="accent1"/>
+          </a:effectRef>
+          <a:fontRef idx="minor">
+            <a:schemeClr val="tx1"/>
+          </a:fontRef>
+        </p:style>
+      </p:cxnSp>
+      <p:sp>
+        <p:nvSpPr>
+          <p:cNvPr id="72" name="Rectangle: Rounded Corners 71">
+            <a:extLst>
+              <a:ext uri="{FF2B5EF4-FFF2-40B4-BE49-F238E27FC236}">
+                <a16:creationId xmlns:a16="http://schemas.microsoft.com/office/drawing/2014/main" id="{B33173B0-4138-74A1-A2DC-5454B0525CC9}"/>
+              </a:ext>
+            </a:extLst>
+          </p:cNvPr>
+          <p:cNvSpPr/>
+          <p:nvPr/>
+        </p:nvSpPr>
+        <p:spPr>
+          <a:xfrm>
+            <a:off x="1203767" y="2417717"/>
+            <a:ext cx="247146" cy="241408"/>
+          </a:xfrm>
+          <a:prstGeom prst="roundRect">
+            <a:avLst/>
+          </a:prstGeom>
+          <a:solidFill>
+            <a:schemeClr val="accent1"/>
+          </a:solidFill>
+          <a:ln w="25400" cap="flat" cmpd="sng" algn="ctr">
+            <a:noFill/>
+            <a:prstDash val="solid"/>
+          </a:ln>
+          <a:effectLst/>
+        </p:spPr>
+        <p:style>
+          <a:lnRef idx="2">
+            <a:scrgbClr r="0" g="0" b="0"/>
+          </a:lnRef>
+          <a:fillRef idx="1">
+            <a:scrgbClr r="0" g="0" b="0"/>
+          </a:fillRef>
+          <a:effectRef idx="0">
+            <a:scrgbClr r="0" g="0" b="0"/>
+          </a:effectRef>
+          <a:fontRef idx="minor">
+            <a:schemeClr val="lt1"/>
+          </a:fontRef>
+        </p:style>
+        <p:txBody>
+          <a:bodyPr spcFirstLastPara="0" vert="horz" wrap="square" lIns="6350" tIns="6350" rIns="6350" bIns="6350" numCol="1" spcCol="1270" rtlCol="0" anchor="ctr" anchorCtr="0">
+            <a:noAutofit/>
+          </a:bodyPr>
+          <a:lstStyle/>
+          <a:p>
+            <a:pPr algn="ctr" defTabSz="444500">
+              <a:lnSpc>
+                <a:spcPct val="90000"/>
+              </a:lnSpc>
+              <a:spcBef>
+                <a:spcPct val="0"/>
+              </a:spcBef>
+              <a:spcAft>
+                <a:spcPct val="35000"/>
+              </a:spcAft>
+            </a:pPr>
+            <a:endParaRPr lang="en-US" sz="1000" kern="1200" dirty="0">
+              <a:solidFill>
+                <a:srgbClr val="34342B"/>
+              </a:solidFill>
+              <a:latin typeface="Vodafone Rg" pitchFamily="34" charset="0"/>
+              <a:ea typeface="+mn-ea"/>
+              <a:cs typeface="+mn-cs"/>
+            </a:endParaRPr>
+          </a:p>
+        </p:txBody>
+      </p:sp>
+      <p:sp>
+        <p:nvSpPr>
+          <p:cNvPr id="76" name="TextBox 75">
+            <a:extLst>
+              <a:ext uri="{FF2B5EF4-FFF2-40B4-BE49-F238E27FC236}">
+                <a16:creationId xmlns:a16="http://schemas.microsoft.com/office/drawing/2014/main" id="{3245AE43-F6C2-E303-A634-B13515497D21}"/>
+              </a:ext>
+            </a:extLst>
+          </p:cNvPr>
+          <p:cNvSpPr txBox="1"/>
+          <p:nvPr/>
+        </p:nvSpPr>
+        <p:spPr>
+          <a:xfrm>
+            <a:off x="180743" y="1153301"/>
+            <a:ext cx="1125416" cy="211387"/>
+          </a:xfrm>
+          <a:prstGeom prst="rect">
+            <a:avLst/>
+          </a:prstGeom>
+        </p:spPr>
+        <p:txBody>
+          <a:bodyPr wrap="square" lIns="0" tIns="0" rIns="0" bIns="0" rtlCol="0">
+            <a:noAutofit/>
+          </a:bodyPr>
+          <a:lstStyle/>
           <a:p>
             <a:pPr marL="0" indent="0">
               <a:buFont typeface="Arial" pitchFamily="34" charset="0"/>
               <a:buNone/>
             </a:pPr>
             <a:r>
-              <a:rPr lang="en-US" dirty="0">
+              <a:rPr lang="en-US" sz="1400" b="1" dirty="0">
                 <a:latin typeface="Vodafone Rg" pitchFamily="34" charset="0"/>
               </a:rPr>
-              <a:t>10.7.0.0/24 – vm subnet</a:t>
+              <a:t>VCI</a:t>
+            </a:r>
+            <a:r>
+              <a:rPr lang="en-US" sz="1100" dirty="0">
+                <a:latin typeface="Vodafone Rg" pitchFamily="34" charset="0"/>
+              </a:rPr>
+              <a:t> </a:t>
+            </a:r>
+            <a:r>
+              <a:rPr lang="en-US" sz="1400" b="1" dirty="0">
+                <a:latin typeface="Vodafone Rg" pitchFamily="34" charset="0"/>
+              </a:rPr>
+              <a:t>SWINDON</a:t>
             </a:r>
           </a:p>
         </p:txBody>
       </p:sp>
       <p:sp>
         <p:nvSpPr>
-          <p:cNvPr id="13" name="TextBox 12">
+          <p:cNvPr id="79" name="TextBox 78">
             <a:extLst>
               <a:ext uri="{FF2B5EF4-FFF2-40B4-BE49-F238E27FC236}">
-                <a16:creationId xmlns:a16="http://schemas.microsoft.com/office/drawing/2014/main" id="{F20742B8-EF3B-383D-B95C-0308AF3C57D4}"/>
+                <a16:creationId xmlns:a16="http://schemas.microsoft.com/office/drawing/2014/main" id="{AE5BD221-BA4E-E1F9-E8D5-FEE187C758F4}"/>
               </a:ext>
             </a:extLst>
           </p:cNvPr>
@@ -18658,8 +20952,140 @@
         </p:nvSpPr>
         <p:spPr>
           <a:xfrm>
-            <a:off x="9537397" y="2488443"/>
-            <a:ext cx="2450727" cy="914400"/>
+            <a:off x="4732948" y="6003851"/>
+            <a:ext cx="1682979" cy="171198"/>
+          </a:xfrm>
+          <a:prstGeom prst="rect">
+            <a:avLst/>
+          </a:prstGeom>
+        </p:spPr>
+        <p:txBody>
+          <a:bodyPr wrap="square" lIns="0" tIns="0" rIns="0" bIns="0" rtlCol="0">
+            <a:noAutofit/>
+          </a:bodyPr>
+          <a:lstStyle/>
+          <a:p>
+            <a:pPr marL="0" indent="0">
+              <a:buFont typeface="Arial" pitchFamily="34" charset="0"/>
+              <a:buNone/>
+            </a:pPr>
+            <a:r>
+              <a:rPr lang="en-US" sz="1200" b="1" dirty="0">
+                <a:latin typeface="Vodafone Rg" pitchFamily="34" charset="0"/>
+              </a:rPr>
+              <a:t>Local Market- Spoke-2</a:t>
+            </a:r>
+          </a:p>
+        </p:txBody>
+      </p:sp>
+      <p:sp>
+        <p:nvSpPr>
+          <p:cNvPr id="80" name="TextBox 79">
+            <a:extLst>
+              <a:ext uri="{FF2B5EF4-FFF2-40B4-BE49-F238E27FC236}">
+                <a16:creationId xmlns:a16="http://schemas.microsoft.com/office/drawing/2014/main" id="{FAFE0D5D-B5E6-B67E-EF9E-DFC497181FF7}"/>
+              </a:ext>
+            </a:extLst>
+          </p:cNvPr>
+          <p:cNvSpPr txBox="1"/>
+          <p:nvPr/>
+        </p:nvSpPr>
+        <p:spPr>
+          <a:xfrm>
+            <a:off x="145734" y="3721537"/>
+            <a:ext cx="1417801" cy="94306"/>
+          </a:xfrm>
+          <a:prstGeom prst="rect">
+            <a:avLst/>
+          </a:prstGeom>
+        </p:spPr>
+        <p:txBody>
+          <a:bodyPr wrap="square" lIns="0" tIns="0" rIns="0" bIns="0" rtlCol="0">
+            <a:noAutofit/>
+          </a:bodyPr>
+          <a:lstStyle/>
+          <a:p>
+            <a:pPr marL="0" indent="0">
+              <a:buFont typeface="Arial" pitchFamily="34" charset="0"/>
+              <a:buNone/>
+            </a:pPr>
+            <a:r>
+              <a:rPr lang="en-US" sz="1400" b="1" dirty="0">
+                <a:latin typeface="Vodafone Rg" pitchFamily="34" charset="0"/>
+              </a:rPr>
+              <a:t>ON-PREM DC SITE</a:t>
+            </a:r>
+          </a:p>
+        </p:txBody>
+      </p:sp>
+      <p:sp>
+        <p:nvSpPr>
+          <p:cNvPr id="83" name="TextBox 82">
+            <a:extLst>
+              <a:ext uri="{FF2B5EF4-FFF2-40B4-BE49-F238E27FC236}">
+                <a16:creationId xmlns:a16="http://schemas.microsoft.com/office/drawing/2014/main" id="{C74ADC9D-6708-2F8D-7DD7-F44D6BFEBD7A}"/>
+              </a:ext>
+            </a:extLst>
+          </p:cNvPr>
+          <p:cNvSpPr txBox="1"/>
+          <p:nvPr/>
+        </p:nvSpPr>
+        <p:spPr>
+          <a:xfrm>
+            <a:off x="3169279" y="2193100"/>
+            <a:ext cx="640836" cy="365164"/>
+          </a:xfrm>
+          <a:prstGeom prst="rect">
+            <a:avLst/>
+          </a:prstGeom>
+        </p:spPr>
+        <p:txBody>
+          <a:bodyPr wrap="square" lIns="0" tIns="0" rIns="0" bIns="0" rtlCol="0">
+            <a:noAutofit/>
+          </a:bodyPr>
+          <a:lstStyle/>
+          <a:p>
+            <a:pPr marL="0" indent="0">
+              <a:buFont typeface="Arial" pitchFamily="34" charset="0"/>
+              <a:buNone/>
+            </a:pPr>
+            <a:r>
+              <a:rPr lang="en-US" sz="1200" b="1" dirty="0">
+                <a:latin typeface="Vodafone Rg" pitchFamily="34" charset="0"/>
+              </a:rPr>
+              <a:t>SDWAN EDGES</a:t>
+            </a:r>
+          </a:p>
+          <a:p>
+            <a:pPr marL="0" indent="0">
+              <a:buFont typeface="Arial" pitchFamily="34" charset="0"/>
+              <a:buNone/>
+            </a:pPr>
+            <a:r>
+              <a:rPr lang="en-US" sz="1200" b="1" dirty="0">
+                <a:latin typeface="Vodafone Rg" pitchFamily="34" charset="0"/>
+              </a:rPr>
+              <a:t>AS VPN GW</a:t>
+            </a:r>
+          </a:p>
+        </p:txBody>
+      </p:sp>
+      <p:sp>
+        <p:nvSpPr>
+          <p:cNvPr id="84" name="TextBox 83">
+            <a:extLst>
+              <a:ext uri="{FF2B5EF4-FFF2-40B4-BE49-F238E27FC236}">
+                <a16:creationId xmlns:a16="http://schemas.microsoft.com/office/drawing/2014/main" id="{F446B3B9-9233-88B6-F75B-AA2CD86057BF}"/>
+              </a:ext>
+            </a:extLst>
+          </p:cNvPr>
+          <p:cNvSpPr txBox="1"/>
+          <p:nvPr/>
+        </p:nvSpPr>
+        <p:spPr>
+          <a:xfrm>
+            <a:off x="3369650" y="3882183"/>
+            <a:ext cx="1022052" cy="349298"/>
           </a:xfrm>
           <a:prstGeom prst="rect">
             <a:avLst/>
@@ -18676,32 +21102,60 @@
               <a:buNone/>
             </a:pPr>
             <a:r>
-              <a:rPr lang="en-US" dirty="0">
+              <a:rPr lang="en-US" sz="1000" dirty="0">
                 <a:latin typeface="Vodafone Rg" pitchFamily="34" charset="0"/>
               </a:rPr>
-              <a:t>10.5.0.0/16 – cidr subnet</a:t>
+              <a:t>10.7.0.0/16</a:t>
             </a:r>
           </a:p>
+        </p:txBody>
+      </p:sp>
+      <p:sp>
+        <p:nvSpPr>
+          <p:cNvPr id="85" name="TextBox 84">
+            <a:extLst>
+              <a:ext uri="{FF2B5EF4-FFF2-40B4-BE49-F238E27FC236}">
+                <a16:creationId xmlns:a16="http://schemas.microsoft.com/office/drawing/2014/main" id="{5B8787AE-EB1D-14CB-11B9-51D84BA9A8EC}"/>
+              </a:ext>
+            </a:extLst>
+          </p:cNvPr>
+          <p:cNvSpPr txBox="1"/>
+          <p:nvPr/>
+        </p:nvSpPr>
+        <p:spPr>
+          <a:xfrm>
+            <a:off x="188324" y="2923769"/>
+            <a:ext cx="1022052" cy="211387"/>
+          </a:xfrm>
+          <a:prstGeom prst="rect">
+            <a:avLst/>
+          </a:prstGeom>
+        </p:spPr>
+        <p:txBody>
+          <a:bodyPr wrap="none" lIns="0" tIns="0" rIns="0" bIns="0" rtlCol="0">
+            <a:noAutofit/>
+          </a:bodyPr>
+          <a:lstStyle/>
           <a:p>
             <a:pPr marL="0" indent="0">
               <a:buFont typeface="Arial" pitchFamily="34" charset="0"/>
               <a:buNone/>
             </a:pPr>
             <a:r>
-              <a:rPr lang="en-US" dirty="0">
+              <a:rPr lang="en-US" sz="1000" dirty="0">
                 <a:latin typeface="Vodafone Rg" pitchFamily="34" charset="0"/>
               </a:rPr>
-              <a:t>10.5.1.0/24 -- gateway subnet</a:t>
+              <a:t>10.7.0.0/24</a:t>
             </a:r>
           </a:p>
         </p:txBody>
       </p:sp>
       <p:sp>
         <p:nvSpPr>
-          <p:cNvPr id="21" name="TextBox 20">
+          <p:cNvPr id="86" name="TextBox 85">
             <a:extLst>
               <a:ext uri="{FF2B5EF4-FFF2-40B4-BE49-F238E27FC236}">
-                <a16:creationId xmlns:a16="http://schemas.microsoft.com/office/drawing/2014/main" id="{B2329BB0-CFC5-18A2-F584-6D068E9821A8}"/>
+                <a16:creationId xmlns:a16="http://schemas.microsoft.com/office/drawing/2014/main" id="{CB7A6235-0274-3E8A-8B6C-33CF41AB8BFF}"/>
               </a:ext>
             </a:extLst>
           </p:cNvPr>
@@ -18710,7 +21164,7 @@
         </p:nvSpPr>
         <p:spPr>
           <a:xfrm>
-            <a:off x="2072737" y="4968160"/>
+            <a:off x="9833197" y="3593911"/>
             <a:ext cx="1022052" cy="349298"/>
           </a:xfrm>
           <a:prstGeom prst="rect">
@@ -18728,20 +21182,20 @@
               <a:buNone/>
             </a:pPr>
             <a:r>
-              <a:rPr lang="en-US" dirty="0">
+              <a:rPr lang="en-US" sz="1000" dirty="0">
                 <a:latin typeface="Vodafone Rg" pitchFamily="34" charset="0"/>
               </a:rPr>
-              <a:t>10.9.0.0/24</a:t>
+              <a:t>10.5.0.0/16</a:t>
             </a:r>
           </a:p>
         </p:txBody>
       </p:sp>
       <p:sp>
         <p:nvSpPr>
-          <p:cNvPr id="30" name="TextBox 29">
+          <p:cNvPr id="87" name="TextBox 86">
             <a:extLst>
               <a:ext uri="{FF2B5EF4-FFF2-40B4-BE49-F238E27FC236}">
-                <a16:creationId xmlns:a16="http://schemas.microsoft.com/office/drawing/2014/main" id="{0D5E0323-7E8A-A6DD-6CDC-F8CF94096235}"/>
+                <a16:creationId xmlns:a16="http://schemas.microsoft.com/office/drawing/2014/main" id="{C5CDDC8F-0856-18B9-C070-0CB2DBE6380E}"/>
               </a:ext>
             </a:extLst>
           </p:cNvPr>
@@ -18750,15 +21204,15 @@
         </p:nvSpPr>
         <p:spPr>
           <a:xfrm>
-            <a:off x="5709117" y="4946935"/>
-            <a:ext cx="1022052" cy="349298"/>
+            <a:off x="7622938" y="539244"/>
+            <a:ext cx="1979253" cy="276612"/>
           </a:xfrm>
           <a:prstGeom prst="rect">
             <a:avLst/>
           </a:prstGeom>
         </p:spPr>
         <p:txBody>
-          <a:bodyPr wrap="none" lIns="0" tIns="0" rIns="0" bIns="0" rtlCol="0">
+          <a:bodyPr wrap="square" lIns="0" tIns="0" rIns="0" bIns="0" rtlCol="0">
             <a:noAutofit/>
           </a:bodyPr>
           <a:lstStyle/>
@@ -18768,20 +21222,293 @@
               <a:buNone/>
             </a:pPr>
             <a:r>
-              <a:rPr lang="en-US" dirty="0">
+              <a:rPr lang="en-US" b="1" dirty="0">
                 <a:latin typeface="Vodafone Rg" pitchFamily="34" charset="0"/>
               </a:rPr>
-              <a:t>10.10.0.0/24</a:t>
+              <a:t>Dublin Azure Region</a:t>
+            </a:r>
+          </a:p>
+        </p:txBody>
+      </p:sp>
+      <p:sp>
+        <p:nvSpPr>
+          <p:cNvPr id="88" name="Thought Bubble: Cloud 87">
+            <a:extLst>
+              <a:ext uri="{FF2B5EF4-FFF2-40B4-BE49-F238E27FC236}">
+                <a16:creationId xmlns:a16="http://schemas.microsoft.com/office/drawing/2014/main" id="{A5BFB04A-EC9C-86BC-7992-A34677B53841}"/>
+              </a:ext>
+            </a:extLst>
+          </p:cNvPr>
+          <p:cNvSpPr/>
+          <p:nvPr/>
+        </p:nvSpPr>
+        <p:spPr>
+          <a:xfrm>
+            <a:off x="10842514" y="884798"/>
+            <a:ext cx="1205107" cy="1318928"/>
+          </a:xfrm>
+          <a:prstGeom prst="cloudCallout">
+            <a:avLst/>
+          </a:prstGeom>
+          <a:ln>
+            <a:solidFill>
+              <a:schemeClr val="accent5"/>
+            </a:solidFill>
+          </a:ln>
+        </p:spPr>
+        <p:style>
+          <a:lnRef idx="2">
+            <a:schemeClr val="accent2"/>
+          </a:lnRef>
+          <a:fillRef idx="1">
+            <a:schemeClr val="lt1"/>
+          </a:fillRef>
+          <a:effectRef idx="0">
+            <a:schemeClr val="accent2"/>
+          </a:effectRef>
+          <a:fontRef idx="minor">
+            <a:schemeClr val="dk1"/>
+          </a:fontRef>
+        </p:style>
+        <p:txBody>
+          <a:bodyPr spcFirstLastPara="0" vert="horz" wrap="square" lIns="6350" tIns="6350" rIns="6350" bIns="6350" numCol="1" spcCol="1270" rtlCol="0" anchor="ctr" anchorCtr="0">
+            <a:noAutofit/>
+          </a:bodyPr>
+          <a:lstStyle/>
+          <a:p>
+            <a:pPr algn="ctr" defTabSz="444500">
+              <a:lnSpc>
+                <a:spcPct val="90000"/>
+              </a:lnSpc>
+              <a:spcBef>
+                <a:spcPct val="0"/>
+              </a:spcBef>
+              <a:spcAft>
+                <a:spcPct val="35000"/>
+              </a:spcAft>
+            </a:pPr>
+            <a:r>
+              <a:rPr lang="en-US" sz="1400" b="1" kern="1200" dirty="0">
+                <a:solidFill>
+                  <a:srgbClr val="34342B"/>
+                </a:solidFill>
+                <a:latin typeface="Vodafone Rg" pitchFamily="34" charset="0"/>
+                <a:ea typeface="+mn-ea"/>
+                <a:cs typeface="+mn-cs"/>
+              </a:rPr>
+              <a:t>INTERNET</a:t>
+            </a:r>
+          </a:p>
+        </p:txBody>
+      </p:sp>
+      <p:cxnSp>
+        <p:nvCxnSpPr>
+          <p:cNvPr id="90" name="Straight Arrow Connector 89">
+            <a:extLst>
+              <a:ext uri="{FF2B5EF4-FFF2-40B4-BE49-F238E27FC236}">
+                <a16:creationId xmlns:a16="http://schemas.microsoft.com/office/drawing/2014/main" id="{3C90D8CF-77F1-A73A-6D17-9E3D1A28BAD6}"/>
+              </a:ext>
+            </a:extLst>
+          </p:cNvPr>
+          <p:cNvCxnSpPr>
+            <a:cxnSpLocks/>
+          </p:cNvCxnSpPr>
+          <p:nvPr/>
+        </p:nvCxnSpPr>
+        <p:spPr>
+          <a:xfrm>
+            <a:off x="9312333" y="1815531"/>
+            <a:ext cx="1530181" cy="0"/>
+          </a:xfrm>
+          <a:prstGeom prst="straightConnector1">
+            <a:avLst/>
+          </a:prstGeom>
+          <a:ln>
+            <a:prstDash val="dashDot"/>
+            <a:tailEnd type="triangle"/>
+          </a:ln>
+        </p:spPr>
+        <p:style>
+          <a:lnRef idx="1">
+            <a:schemeClr val="accent1"/>
+          </a:lnRef>
+          <a:fillRef idx="0">
+            <a:schemeClr val="accent1"/>
+          </a:fillRef>
+          <a:effectRef idx="0">
+            <a:schemeClr val="accent1"/>
+          </a:effectRef>
+          <a:fontRef idx="minor">
+            <a:schemeClr val="tx1"/>
+          </a:fontRef>
+        </p:style>
+      </p:cxnSp>
+      <p:sp>
+        <p:nvSpPr>
+          <p:cNvPr id="94" name="TextBox 93">
+            <a:extLst>
+              <a:ext uri="{FF2B5EF4-FFF2-40B4-BE49-F238E27FC236}">
+                <a16:creationId xmlns:a16="http://schemas.microsoft.com/office/drawing/2014/main" id="{E4F86859-8282-BFAF-6A43-01640AA87966}"/>
+              </a:ext>
+            </a:extLst>
+          </p:cNvPr>
+          <p:cNvSpPr txBox="1"/>
+          <p:nvPr/>
+        </p:nvSpPr>
+        <p:spPr>
+          <a:xfrm>
+            <a:off x="3505990" y="4035625"/>
+            <a:ext cx="1125416" cy="211387"/>
+          </a:xfrm>
+          <a:prstGeom prst="rect">
+            <a:avLst/>
+          </a:prstGeom>
+        </p:spPr>
+        <p:txBody>
+          <a:bodyPr wrap="square" lIns="0" tIns="0" rIns="0" bIns="0" rtlCol="0">
+            <a:noAutofit/>
+          </a:bodyPr>
+          <a:lstStyle/>
+          <a:p>
+            <a:pPr marL="0" indent="0">
+              <a:buFont typeface="Arial" pitchFamily="34" charset="0"/>
+              <a:buNone/>
+            </a:pPr>
+            <a:r>
+              <a:rPr lang="en-US" sz="1200" b="1" dirty="0">
+                <a:latin typeface="Vodafone Rg" pitchFamily="34" charset="0"/>
+              </a:rPr>
+              <a:t>VNET 1</a:t>
+            </a:r>
+          </a:p>
+        </p:txBody>
+      </p:sp>
+      <p:sp>
+        <p:nvSpPr>
+          <p:cNvPr id="95" name="TextBox 94">
+            <a:extLst>
+              <a:ext uri="{FF2B5EF4-FFF2-40B4-BE49-F238E27FC236}">
+                <a16:creationId xmlns:a16="http://schemas.microsoft.com/office/drawing/2014/main" id="{34B0E8EC-397B-E8C1-B556-CE579983038F}"/>
+              </a:ext>
+            </a:extLst>
+          </p:cNvPr>
+          <p:cNvSpPr txBox="1"/>
+          <p:nvPr/>
+        </p:nvSpPr>
+        <p:spPr>
+          <a:xfrm>
+            <a:off x="10015650" y="3752919"/>
+            <a:ext cx="1125416" cy="211387"/>
+          </a:xfrm>
+          <a:prstGeom prst="rect">
+            <a:avLst/>
+          </a:prstGeom>
+        </p:spPr>
+        <p:txBody>
+          <a:bodyPr wrap="square" lIns="0" tIns="0" rIns="0" bIns="0" rtlCol="0">
+            <a:noAutofit/>
+          </a:bodyPr>
+          <a:lstStyle/>
+          <a:p>
+            <a:pPr marL="0" indent="0">
+              <a:buFont typeface="Arial" pitchFamily="34" charset="0"/>
+              <a:buNone/>
+            </a:pPr>
+            <a:r>
+              <a:rPr lang="en-US" sz="1200" b="1" dirty="0">
+                <a:latin typeface="Vodafone Rg" pitchFamily="34" charset="0"/>
+              </a:rPr>
+              <a:t>VNET 2</a:t>
+            </a:r>
+          </a:p>
+        </p:txBody>
+      </p:sp>
+      <p:sp>
+        <p:nvSpPr>
+          <p:cNvPr id="96" name="TextBox 95">
+            <a:extLst>
+              <a:ext uri="{FF2B5EF4-FFF2-40B4-BE49-F238E27FC236}">
+                <a16:creationId xmlns:a16="http://schemas.microsoft.com/office/drawing/2014/main" id="{F75FB7AA-2F46-E08C-CE8D-874C07ED3E9B}"/>
+              </a:ext>
+            </a:extLst>
+          </p:cNvPr>
+          <p:cNvSpPr txBox="1"/>
+          <p:nvPr/>
+        </p:nvSpPr>
+        <p:spPr>
+          <a:xfrm>
+            <a:off x="1925273" y="6278060"/>
+            <a:ext cx="1125416" cy="211387"/>
+          </a:xfrm>
+          <a:prstGeom prst="rect">
+            <a:avLst/>
+          </a:prstGeom>
+        </p:spPr>
+        <p:txBody>
+          <a:bodyPr wrap="square" lIns="0" tIns="0" rIns="0" bIns="0" rtlCol="0">
+            <a:noAutofit/>
+          </a:bodyPr>
+          <a:lstStyle/>
+          <a:p>
+            <a:pPr marL="0" indent="0">
+              <a:buFont typeface="Arial" pitchFamily="34" charset="0"/>
+              <a:buNone/>
+            </a:pPr>
+            <a:r>
+              <a:rPr lang="en-US" sz="1200" b="1" dirty="0">
+                <a:latin typeface="Vodafone Rg" pitchFamily="34" charset="0"/>
+              </a:rPr>
+              <a:t>VNET 3</a:t>
+            </a:r>
+          </a:p>
+        </p:txBody>
+      </p:sp>
+      <p:sp>
+        <p:nvSpPr>
+          <p:cNvPr id="97" name="TextBox 96">
+            <a:extLst>
+              <a:ext uri="{FF2B5EF4-FFF2-40B4-BE49-F238E27FC236}">
+                <a16:creationId xmlns:a16="http://schemas.microsoft.com/office/drawing/2014/main" id="{49784DF5-548D-1941-C3E5-5E07E677BF2A}"/>
+              </a:ext>
+            </a:extLst>
+          </p:cNvPr>
+          <p:cNvSpPr txBox="1"/>
+          <p:nvPr/>
+        </p:nvSpPr>
+        <p:spPr>
+          <a:xfrm>
+            <a:off x="5691668" y="6266547"/>
+            <a:ext cx="1125416" cy="211387"/>
+          </a:xfrm>
+          <a:prstGeom prst="rect">
+            <a:avLst/>
+          </a:prstGeom>
+        </p:spPr>
+        <p:txBody>
+          <a:bodyPr wrap="square" lIns="0" tIns="0" rIns="0" bIns="0" rtlCol="0">
+            <a:noAutofit/>
+          </a:bodyPr>
+          <a:lstStyle/>
+          <a:p>
+            <a:pPr marL="0" indent="0">
+              <a:buFont typeface="Arial" pitchFamily="34" charset="0"/>
+              <a:buNone/>
+            </a:pPr>
+            <a:r>
+              <a:rPr lang="en-US" sz="1200" b="1" dirty="0">
+                <a:latin typeface="Vodafone Rg" pitchFamily="34" charset="0"/>
+              </a:rPr>
+              <a:t>VNET 4</a:t>
             </a:r>
           </a:p>
         </p:txBody>
       </p:sp>
       <p:grpSp>
         <p:nvGrpSpPr>
-          <p:cNvPr id="61" name="Group 60">
+          <p:cNvPr id="4" name="Group 3">
             <a:extLst>
               <a:ext uri="{FF2B5EF4-FFF2-40B4-BE49-F238E27FC236}">
-                <a16:creationId xmlns:a16="http://schemas.microsoft.com/office/drawing/2014/main" id="{C3255A7D-712F-71C5-34AD-E08F771673FA}"/>
+                <a16:creationId xmlns:a16="http://schemas.microsoft.com/office/drawing/2014/main" id="{E1AB63D6-7286-699C-FD82-649C7D23ED6A}"/>
               </a:ext>
             </a:extLst>
           </p:cNvPr>
@@ -18790,8 +21517,8 @@
         </p:nvGrpSpPr>
         <p:grpSpPr>
           <a:xfrm>
-            <a:off x="8940860" y="4865599"/>
-            <a:ext cx="3159370" cy="1662382"/>
+            <a:off x="7644494" y="4854024"/>
+            <a:ext cx="3096812" cy="1424036"/>
             <a:chOff x="4220482" y="4783271"/>
             <a:chExt cx="3159370" cy="1703075"/>
           </a:xfrm>
@@ -18801,10 +21528,10 @@
         </p:grpSpPr>
         <p:sp>
           <p:nvSpPr>
-            <p:cNvPr id="62" name="Rectangle 61">
+            <p:cNvPr id="13" name="Rectangle 12">
               <a:extLst>
                 <a:ext uri="{FF2B5EF4-FFF2-40B4-BE49-F238E27FC236}">
-                  <a16:creationId xmlns:a16="http://schemas.microsoft.com/office/drawing/2014/main" id="{23AAF9B9-80D9-87D5-FB59-71DC7546D500}"/>
+                  <a16:creationId xmlns:a16="http://schemas.microsoft.com/office/drawing/2014/main" id="{2204D74D-2E7B-2974-25BE-E480A606AA7B}"/>
                 </a:ext>
               </a:extLst>
             </p:cNvPr>
@@ -18870,10 +21597,10 @@
         </p:sp>
         <p:sp>
           <p:nvSpPr>
-            <p:cNvPr id="63" name="Rectangle 62">
+            <p:cNvPr id="19" name="Rectangle 18">
               <a:extLst>
                 <a:ext uri="{FF2B5EF4-FFF2-40B4-BE49-F238E27FC236}">
-                  <a16:creationId xmlns:a16="http://schemas.microsoft.com/office/drawing/2014/main" id="{AD1DBF47-6E57-0B2A-5C55-F44B8B4A24A0}"/>
+                  <a16:creationId xmlns:a16="http://schemas.microsoft.com/office/drawing/2014/main" id="{0018CD53-F616-AF7E-8E98-1C4C56EEDD44}"/>
                 </a:ext>
               </a:extLst>
             </p:cNvPr>
@@ -18941,10 +21668,10 @@
         </p:sp>
         <p:sp>
           <p:nvSpPr>
-            <p:cNvPr id="64" name="Rectangle 63">
+            <p:cNvPr id="27" name="Rectangle 26">
               <a:extLst>
                 <a:ext uri="{FF2B5EF4-FFF2-40B4-BE49-F238E27FC236}">
-                  <a16:creationId xmlns:a16="http://schemas.microsoft.com/office/drawing/2014/main" id="{F3BE0A09-BF21-4994-E5F1-5AB3CBCBD554}"/>
+                  <a16:creationId xmlns:a16="http://schemas.microsoft.com/office/drawing/2014/main" id="{F804356B-30F1-FFA4-F64F-C51018DDFE42}"/>
                 </a:ext>
               </a:extLst>
             </p:cNvPr>
@@ -19014,10 +21741,10 @@
         </p:sp>
         <p:sp>
           <p:nvSpPr>
-            <p:cNvPr id="69" name="TextBox 68">
+            <p:cNvPr id="48" name="TextBox 47">
               <a:extLst>
                 <a:ext uri="{FF2B5EF4-FFF2-40B4-BE49-F238E27FC236}">
-                  <a16:creationId xmlns:a16="http://schemas.microsoft.com/office/drawing/2014/main" id="{207E3152-3EBC-FCE6-AF34-A5082CAD47CD}"/>
+                  <a16:creationId xmlns:a16="http://schemas.microsoft.com/office/drawing/2014/main" id="{D933E31E-F133-2FDB-F782-E2D4775C84AE}"/>
                 </a:ext>
               </a:extLst>
             </p:cNvPr>
@@ -19026,39 +21753,43 @@
           </p:nvSpPr>
           <p:spPr>
             <a:xfrm>
-              <a:off x="4361364" y="6254448"/>
-              <a:ext cx="1125416" cy="231898"/>
+              <a:off x="4361363" y="6254449"/>
+              <a:ext cx="1560650" cy="218128"/>
             </a:xfrm>
             <a:prstGeom prst="rect">
               <a:avLst/>
             </a:prstGeom>
-            <a:grpFill/>
           </p:spPr>
           <p:txBody>
             <a:bodyPr wrap="square" lIns="0" tIns="0" rIns="0" bIns="0" rtlCol="0">
               <a:noAutofit/>
             </a:bodyPr>
-            <a:lstStyle/>
-            <a:p>
-              <a:pPr marL="0" indent="0">
+            <a:lstStyle>
+              <a:defPPr>
+                <a:defRPr lang="en-US"/>
+              </a:defPPr>
+              <a:lvl1pPr indent="0">
                 <a:buFont typeface="Arial" pitchFamily="34" charset="0"/>
                 <a:buNone/>
-              </a:pPr>
+                <a:defRPr sz="1200" b="1">
+                  <a:latin typeface="Vodafone Rg" pitchFamily="34" charset="0"/>
+                </a:defRPr>
+              </a:lvl1pPr>
+            </a:lstStyle>
+            <a:p>
               <a:r>
-                <a:rPr lang="en-US" sz="1000" dirty="0">
-                  <a:latin typeface="Vodafone Rg" pitchFamily="34" charset="0"/>
-                </a:rPr>
-                <a:t>Test-env-spoke3-vnet</a:t>
+                <a:rPr lang="en-US" dirty="0"/>
+                <a:t>Local Market Spoke-3</a:t>
               </a:r>
             </a:p>
           </p:txBody>
         </p:sp>
         <p:sp>
           <p:nvSpPr>
-            <p:cNvPr id="71" name="TextBox 70">
+            <p:cNvPr id="63" name="TextBox 62">
               <a:extLst>
                 <a:ext uri="{FF2B5EF4-FFF2-40B4-BE49-F238E27FC236}">
-                  <a16:creationId xmlns:a16="http://schemas.microsoft.com/office/drawing/2014/main" id="{DC39D31A-3930-3758-2B3A-BDB205D81DDE}"/>
+                  <a16:creationId xmlns:a16="http://schemas.microsoft.com/office/drawing/2014/main" id="{A55CDB97-D499-2FB7-FB88-F21BC0021F6F}"/>
                 </a:ext>
               </a:extLst>
             </p:cNvPr>
@@ -19096,10 +21827,10 @@
         </p:sp>
         <p:sp>
           <p:nvSpPr>
-            <p:cNvPr id="72" name="TextBox 71">
+            <p:cNvPr id="69" name="TextBox 68">
               <a:extLst>
                 <a:ext uri="{FF2B5EF4-FFF2-40B4-BE49-F238E27FC236}">
-                  <a16:creationId xmlns:a16="http://schemas.microsoft.com/office/drawing/2014/main" id="{5094F5FD-A520-BC8F-3A5D-0C765703F732}"/>
+                  <a16:creationId xmlns:a16="http://schemas.microsoft.com/office/drawing/2014/main" id="{CF5CE89F-E7C2-F419-DDC2-F39323696430}"/>
                 </a:ext>
               </a:extLst>
             </p:cNvPr>
@@ -19137,10 +21868,10 @@
         </p:sp>
         <p:grpSp>
           <p:nvGrpSpPr>
-            <p:cNvPr id="74" name="Group 73">
+            <p:cNvPr id="71" name="Group 70">
               <a:extLst>
                 <a:ext uri="{FF2B5EF4-FFF2-40B4-BE49-F238E27FC236}">
-                  <a16:creationId xmlns:a16="http://schemas.microsoft.com/office/drawing/2014/main" id="{FACA070F-5518-0868-DF60-94DC9D88E286}"/>
+                  <a16:creationId xmlns:a16="http://schemas.microsoft.com/office/drawing/2014/main" id="{16B86C97-C301-A5C3-B1CB-3686292947B8}"/>
                 </a:ext>
               </a:extLst>
             </p:cNvPr>
@@ -19158,10 +21889,10 @@
           </p:grpSpPr>
           <p:pic>
             <p:nvPicPr>
-              <p:cNvPr id="79" name="Picture 78">
+              <p:cNvPr id="98" name="Picture 97">
                 <a:extLst>
                   <a:ext uri="{FF2B5EF4-FFF2-40B4-BE49-F238E27FC236}">
-                    <a16:creationId xmlns:a16="http://schemas.microsoft.com/office/drawing/2014/main" id="{787C982C-8904-F98A-76AF-39177329DB2A}"/>
+                    <a16:creationId xmlns:a16="http://schemas.microsoft.com/office/drawing/2014/main" id="{1B52BF45-2D4A-EA83-5222-26265453BB95}"/>
                   </a:ext>
                 </a:extLst>
               </p:cNvPr>
@@ -19197,10 +21928,10 @@
           </p:pic>
           <p:sp>
             <p:nvSpPr>
-              <p:cNvPr id="80" name="Arrow: Bent 79">
+              <p:cNvPr id="99" name="Arrow: Bent 98">
                 <a:extLst>
                   <a:ext uri="{FF2B5EF4-FFF2-40B4-BE49-F238E27FC236}">
-                    <a16:creationId xmlns:a16="http://schemas.microsoft.com/office/drawing/2014/main" id="{4E427351-1F4D-0648-4A85-9434061D4D5D}"/>
+                    <a16:creationId xmlns:a16="http://schemas.microsoft.com/office/drawing/2014/main" id="{FBBB2BB2-70BD-06C8-B81A-8176483C191C}"/>
                   </a:ext>
                 </a:extLst>
               </p:cNvPr>
@@ -19267,10 +21998,10 @@
         </p:grpSp>
         <p:pic>
           <p:nvPicPr>
-            <p:cNvPr id="76" name="Picture 75">
+            <p:cNvPr id="89" name="Picture 88">
               <a:extLst>
                 <a:ext uri="{FF2B5EF4-FFF2-40B4-BE49-F238E27FC236}">
-                  <a16:creationId xmlns:a16="http://schemas.microsoft.com/office/drawing/2014/main" id="{CE421689-CE1D-C3A1-D6C3-EA04CFF7A2EC}"/>
+                  <a16:creationId xmlns:a16="http://schemas.microsoft.com/office/drawing/2014/main" id="{659809E3-860A-06E3-5532-79C1994C68CB}"/>
                 </a:ext>
               </a:extLst>
             </p:cNvPr>
@@ -19298,10 +22029,10 @@
         </p:pic>
         <p:pic>
           <p:nvPicPr>
-            <p:cNvPr id="78" name="Picture 77">
+            <p:cNvPr id="93" name="Picture 92">
               <a:extLst>
                 <a:ext uri="{FF2B5EF4-FFF2-40B4-BE49-F238E27FC236}">
-                  <a16:creationId xmlns:a16="http://schemas.microsoft.com/office/drawing/2014/main" id="{949DB664-4083-230F-9A3C-BB6BB8861EE5}"/>
+                  <a16:creationId xmlns:a16="http://schemas.microsoft.com/office/drawing/2014/main" id="{7F7BC213-99BC-39A0-8308-7F8C1BB74031}"/>
                 </a:ext>
               </a:extLst>
             </p:cNvPr>
@@ -19330,10 +22061,10 @@
       </p:grpSp>
       <p:pic>
         <p:nvPicPr>
-          <p:cNvPr id="83" name="Picture 82">
+          <p:cNvPr id="101" name="Picture 100">
             <a:extLst>
               <a:ext uri="{FF2B5EF4-FFF2-40B4-BE49-F238E27FC236}">
-                <a16:creationId xmlns:a16="http://schemas.microsoft.com/office/drawing/2014/main" id="{3F5B865B-109F-E1D7-97D3-7CDDFE559F47}"/>
+                <a16:creationId xmlns:a16="http://schemas.microsoft.com/office/drawing/2014/main" id="{7F2A7ED6-BA31-F0A5-407E-174777C9EC83}"/>
               </a:ext>
             </a:extLst>
           </p:cNvPr>
@@ -19350,7 +22081,7 @@
         </p:blipFill>
         <p:spPr>
           <a:xfrm>
-            <a:off x="11649894" y="6018064"/>
+            <a:off x="10353527" y="6006489"/>
             <a:ext cx="294146" cy="294146"/>
           </a:xfrm>
           <a:prstGeom prst="rect">
@@ -19360,10 +22091,10 @@
       </p:pic>
       <p:sp>
         <p:nvSpPr>
-          <p:cNvPr id="84" name="TextBox 83">
+          <p:cNvPr id="102" name="TextBox 101">
             <a:extLst>
               <a:ext uri="{FF2B5EF4-FFF2-40B4-BE49-F238E27FC236}">
-                <a16:creationId xmlns:a16="http://schemas.microsoft.com/office/drawing/2014/main" id="{1E8B96A0-5596-BC97-E213-23D72E16D9C8}"/>
+                <a16:creationId xmlns:a16="http://schemas.microsoft.com/office/drawing/2014/main" id="{F7E934AD-145A-BC45-7491-4B839DF0859D}"/>
               </a:ext>
             </a:extLst>
           </p:cNvPr>
@@ -19372,7 +22103,7 @@
         </p:nvSpPr>
         <p:spPr>
           <a:xfrm>
-            <a:off x="9090856" y="5029888"/>
+            <a:off x="7794489" y="5018313"/>
             <a:ext cx="1022052" cy="349298"/>
           </a:xfrm>
           <a:prstGeom prst="rect">
@@ -19390,7 +22121,7 @@
               <a:buNone/>
             </a:pPr>
             <a:r>
-              <a:rPr lang="en-US" dirty="0">
+              <a:rPr lang="en-US" sz="1000" dirty="0">
                 <a:latin typeface="Vodafone Rg" pitchFamily="34" charset="0"/>
               </a:rPr>
               <a:t>10.11.0.0/24</a:t>
@@ -19398,25 +22129,63 @@
           </a:p>
         </p:txBody>
       </p:sp>
+      <p:sp>
+        <p:nvSpPr>
+          <p:cNvPr id="103" name="TextBox 102">
+            <a:extLst>
+              <a:ext uri="{FF2B5EF4-FFF2-40B4-BE49-F238E27FC236}">
+                <a16:creationId xmlns:a16="http://schemas.microsoft.com/office/drawing/2014/main" id="{89E3F4FD-6D06-051F-E544-FC9D22FC98A6}"/>
+              </a:ext>
+            </a:extLst>
+          </p:cNvPr>
+          <p:cNvSpPr txBox="1"/>
+          <p:nvPr/>
+        </p:nvSpPr>
+        <p:spPr>
+          <a:xfrm>
+            <a:off x="8541763" y="6316203"/>
+            <a:ext cx="1125416" cy="211387"/>
+          </a:xfrm>
+          <a:prstGeom prst="rect">
+            <a:avLst/>
+          </a:prstGeom>
+        </p:spPr>
+        <p:txBody>
+          <a:bodyPr wrap="square" lIns="0" tIns="0" rIns="0" bIns="0" rtlCol="0">
+            <a:noAutofit/>
+          </a:bodyPr>
+          <a:lstStyle/>
+          <a:p>
+            <a:pPr marL="0" indent="0">
+              <a:buFont typeface="Arial" pitchFamily="34" charset="0"/>
+              <a:buNone/>
+            </a:pPr>
+            <a:r>
+              <a:rPr lang="en-US" sz="1200" b="1" dirty="0">
+                <a:latin typeface="Vodafone Rg" pitchFamily="34" charset="0"/>
+              </a:rPr>
+              <a:t>VNET 5</a:t>
+            </a:r>
+          </a:p>
+        </p:txBody>
+      </p:sp>
       <p:cxnSp>
         <p:nvCxnSpPr>
-          <p:cNvPr id="86" name="Connector: Elbow 85">
+          <p:cNvPr id="115" name="Connector: Elbow 114">
             <a:extLst>
               <a:ext uri="{FF2B5EF4-FFF2-40B4-BE49-F238E27FC236}">
-                <a16:creationId xmlns:a16="http://schemas.microsoft.com/office/drawing/2014/main" id="{33605172-69D3-5C49-3A88-120C1B009CC3}"/>
+                <a16:creationId xmlns:a16="http://schemas.microsoft.com/office/drawing/2014/main" id="{147CF99B-6597-C66D-62C5-4667B41FB411}"/>
               </a:ext>
             </a:extLst>
           </p:cNvPr>
           <p:cNvCxnSpPr>
             <a:cxnSpLocks/>
-            <a:stCxn id="25" idx="0"/>
-            <a:endCxn id="5" idx="2"/>
           </p:cNvCxnSpPr>
           <p:nvPr/>
         </p:nvCxnSpPr>
         <p:spPr>
           <a:xfrm rot="5400000" flipH="1" flipV="1">
-            <a:off x="5525175" y="1766682"/>
+            <a:off x="4744498" y="1881709"/>
             <a:ext cx="1011369" cy="5021810"/>
           </a:xfrm>
           <a:prstGeom prst="bentConnector3">
@@ -19446,10 +22215,220 @@
           </a:fontRef>
         </p:style>
       </p:cxnSp>
+      <p:pic>
+        <p:nvPicPr>
+          <p:cNvPr id="124" name="Picture 123">
+            <a:extLst>
+              <a:ext uri="{FF2B5EF4-FFF2-40B4-BE49-F238E27FC236}">
+                <a16:creationId xmlns:a16="http://schemas.microsoft.com/office/drawing/2014/main" id="{3DBC2700-64AC-4F01-58C6-617058A56D13}"/>
+              </a:ext>
+            </a:extLst>
+          </p:cNvPr>
+          <p:cNvPicPr>
+            <a:picLocks noChangeAspect="1"/>
+          </p:cNvPicPr>
+          <p:nvPr/>
+        </p:nvPicPr>
+        <p:blipFill>
+          <a:blip r:embed="rId9"/>
+          <a:stretch>
+            <a:fillRect/>
+          </a:stretch>
+        </p:blipFill>
+        <p:spPr>
+          <a:xfrm>
+            <a:off x="3782925" y="4080214"/>
+            <a:ext cx="1225550" cy="641350"/>
+          </a:xfrm>
+          <a:prstGeom prst="rect">
+            <a:avLst/>
+          </a:prstGeom>
+        </p:spPr>
+      </p:pic>
+      <p:pic>
+        <p:nvPicPr>
+          <p:cNvPr id="126" name="Picture 125">
+            <a:extLst>
+              <a:ext uri="{FF2B5EF4-FFF2-40B4-BE49-F238E27FC236}">
+                <a16:creationId xmlns:a16="http://schemas.microsoft.com/office/drawing/2014/main" id="{479033F4-6384-EE4C-47CB-FEE5C404901C}"/>
+              </a:ext>
+            </a:extLst>
+          </p:cNvPr>
+          <p:cNvPicPr>
+            <a:picLocks noChangeAspect="1"/>
+          </p:cNvPicPr>
+          <p:nvPr/>
+        </p:nvPicPr>
+        <p:blipFill>
+          <a:blip r:embed="rId10"/>
+          <a:stretch>
+            <a:fillRect/>
+          </a:stretch>
+        </p:blipFill>
+        <p:spPr>
+          <a:xfrm>
+            <a:off x="9256661" y="4182707"/>
+            <a:ext cx="1225550" cy="641350"/>
+          </a:xfrm>
+          <a:prstGeom prst="rect">
+            <a:avLst/>
+          </a:prstGeom>
+        </p:spPr>
+      </p:pic>
+      <p:pic>
+        <p:nvPicPr>
+          <p:cNvPr id="128" name="Picture 127">
+            <a:extLst>
+              <a:ext uri="{FF2B5EF4-FFF2-40B4-BE49-F238E27FC236}">
+                <a16:creationId xmlns:a16="http://schemas.microsoft.com/office/drawing/2014/main" id="{707B8A71-12EB-18BE-5EEE-6BFE69E27C73}"/>
+              </a:ext>
+            </a:extLst>
+          </p:cNvPr>
+          <p:cNvPicPr>
+            <a:picLocks noChangeAspect="1"/>
+          </p:cNvPicPr>
+          <p:nvPr/>
+        </p:nvPicPr>
+        <p:blipFill>
+          <a:blip r:embed="rId11"/>
+          <a:stretch>
+            <a:fillRect/>
+          </a:stretch>
+        </p:blipFill>
+        <p:spPr>
+          <a:xfrm>
+            <a:off x="5970805" y="3779601"/>
+            <a:ext cx="1225550" cy="641350"/>
+          </a:xfrm>
+          <a:prstGeom prst="rect">
+            <a:avLst/>
+          </a:prstGeom>
+        </p:spPr>
+      </p:pic>
+      <p:sp>
+        <p:nvSpPr>
+          <p:cNvPr id="129" name="TextBox 128">
+            <a:extLst>
+              <a:ext uri="{FF2B5EF4-FFF2-40B4-BE49-F238E27FC236}">
+                <a16:creationId xmlns:a16="http://schemas.microsoft.com/office/drawing/2014/main" id="{DD8B70ED-C09F-E808-BB99-54B90D824883}"/>
+              </a:ext>
+            </a:extLst>
+          </p:cNvPr>
+          <p:cNvSpPr txBox="1"/>
+          <p:nvPr/>
+        </p:nvSpPr>
+        <p:spPr>
+          <a:xfrm>
+            <a:off x="687802" y="633652"/>
+            <a:ext cx="2460945" cy="239885"/>
+          </a:xfrm>
+          <a:prstGeom prst="rect">
+            <a:avLst/>
+          </a:prstGeom>
+        </p:spPr>
+        <p:txBody>
+          <a:bodyPr wrap="square" lIns="0" tIns="0" rIns="0" bIns="0" rtlCol="0">
+            <a:noAutofit/>
+          </a:bodyPr>
+          <a:lstStyle/>
+          <a:p>
+            <a:pPr marL="0" indent="0">
+              <a:buFont typeface="Arial" pitchFamily="34" charset="0"/>
+              <a:buNone/>
+            </a:pPr>
+            <a:r>
+              <a:rPr lang="en-US" b="1" dirty="0">
+                <a:latin typeface="Vodafone Rg" pitchFamily="34" charset="0"/>
+              </a:rPr>
+              <a:t>UK South Azure Region</a:t>
+            </a:r>
+          </a:p>
+        </p:txBody>
+      </p:sp>
+      <p:sp>
+        <p:nvSpPr>
+          <p:cNvPr id="130" name="TextBox 129">
+            <a:extLst>
+              <a:ext uri="{FF2B5EF4-FFF2-40B4-BE49-F238E27FC236}">
+                <a16:creationId xmlns:a16="http://schemas.microsoft.com/office/drawing/2014/main" id="{959EE520-D25D-B671-AE13-E035CB052680}"/>
+              </a:ext>
+            </a:extLst>
+          </p:cNvPr>
+          <p:cNvSpPr txBox="1"/>
+          <p:nvPr/>
+        </p:nvSpPr>
+        <p:spPr>
+          <a:xfrm>
+            <a:off x="4656413" y="1514264"/>
+            <a:ext cx="1682979" cy="171198"/>
+          </a:xfrm>
+          <a:prstGeom prst="rect">
+            <a:avLst/>
+          </a:prstGeom>
+        </p:spPr>
+        <p:txBody>
+          <a:bodyPr wrap="square" lIns="0" tIns="0" rIns="0" bIns="0" rtlCol="0">
+            <a:noAutofit/>
+          </a:bodyPr>
+          <a:lstStyle/>
+          <a:p>
+            <a:pPr marL="0" indent="0">
+              <a:buFont typeface="Arial" pitchFamily="34" charset="0"/>
+              <a:buNone/>
+            </a:pPr>
+            <a:r>
+              <a:rPr lang="en-US" sz="1200" b="1" dirty="0">
+                <a:latin typeface="Vodafone Rg" pitchFamily="34" charset="0"/>
+              </a:rPr>
+              <a:t>IPSEC + BGP</a:t>
+            </a:r>
+          </a:p>
+        </p:txBody>
+      </p:sp>
+      <p:sp>
+        <p:nvSpPr>
+          <p:cNvPr id="131" name="TextBox 130">
+            <a:extLst>
+              <a:ext uri="{FF2B5EF4-FFF2-40B4-BE49-F238E27FC236}">
+                <a16:creationId xmlns:a16="http://schemas.microsoft.com/office/drawing/2014/main" id="{C89FCDA4-4350-9BDD-656B-10E89D4A026C}"/>
+              </a:ext>
+            </a:extLst>
+          </p:cNvPr>
+          <p:cNvSpPr txBox="1"/>
+          <p:nvPr/>
+        </p:nvSpPr>
+        <p:spPr>
+          <a:xfrm>
+            <a:off x="4684788" y="3355540"/>
+            <a:ext cx="1682979" cy="171198"/>
+          </a:xfrm>
+          <a:prstGeom prst="rect">
+            <a:avLst/>
+          </a:prstGeom>
+        </p:spPr>
+        <p:txBody>
+          <a:bodyPr wrap="square" lIns="0" tIns="0" rIns="0" bIns="0" rtlCol="0">
+            <a:noAutofit/>
+          </a:bodyPr>
+          <a:lstStyle/>
+          <a:p>
+            <a:pPr marL="0" indent="0">
+              <a:buFont typeface="Arial" pitchFamily="34" charset="0"/>
+              <a:buNone/>
+            </a:pPr>
+            <a:r>
+              <a:rPr lang="en-US" sz="1200" b="1" dirty="0">
+                <a:latin typeface="Vodafone Rg" pitchFamily="34" charset="0"/>
+              </a:rPr>
+              <a:t>IPSEC + BGP</a:t>
+            </a:r>
+          </a:p>
+        </p:txBody>
+      </p:sp>
     </p:spTree>
     <p:extLst>
       <p:ext uri="{BB962C8B-B14F-4D97-AF65-F5344CB8AC3E}">
-        <p14:creationId xmlns:p14="http://schemas.microsoft.com/office/powerpoint/2010/main" val="1330310226"/>
+        <p14:creationId xmlns:p14="http://schemas.microsoft.com/office/powerpoint/2010/main" val="1998312597"/>
       </p:ext>
     </p:extLst>
   </p:cSld>
@@ -19459,7 +22438,7 @@
 </p:sld>
 </file>
 
-<file path=ppt/slides/slide5.xml><?xml version="1.0" encoding="utf-8"?>
+<file path=ppt/slides/slide6.xml><?xml version="1.0" encoding="utf-8"?>
 <p:sld xmlns:a="http://schemas.openxmlformats.org/drawingml/2006/main" xmlns:r="http://schemas.openxmlformats.org/officeDocument/2006/relationships" xmlns:p="http://schemas.openxmlformats.org/presentationml/2006/main">
   <p:cSld>
     <p:spTree>
